--- a/protected-downloads/praesentation/M24.pptx
+++ b/protected-downloads/praesentation/M24.pptx
@@ -4266,7 +4266,7 @@
                 </a:solidFill>
                 <a:latin typeface="Arial"/>
               </a:rPr>
-              <a:t>v0.1</a:t>
+              <a:t>v1.0</a:t>
             </a:r>
           </a:p>
         </p:txBody>

--- a/protected-downloads/praesentation/M24.pptx
+++ b/protected-downloads/praesentation/M24.pptx
@@ -6684,13 +6684,13 @@
               </a:spcAft>
             </a:pPr>
             <a:r>
-              <a:rPr sz="1200">
+              <a:rPr sz="1300">
                 <a:solidFill>
                   <a:srgbClr val="3D5466"/>
                 </a:solidFill>
                 <a:latin typeface="Arial"/>
               </a:rPr>
-              <a:t>Bevor ein mittelständisches Ergebnis bewertet werden kann, muss es normalisiert werden. Drei Korrekturen sind fast immer nötig:</a:t>
+              <a:t>▸  Bevor ein mittelständisches Ergebnis bewertet werden kann, muss es normalisiert werden. Drei Korrekturen sind fast immer nötig:</a:t>
             </a:r>
           </a:p>
           <a:p>

--- a/protected-downloads/praesentation/M24.pptx
+++ b/protected-downloads/praesentation/M24.pptx
@@ -3941,7 +3941,7 @@
                 <a:solidFill>
                   <a:srgbClr val="C8D2E6"/>
                 </a:solidFill>
-                <a:latin typeface="JetBrains Mono"/>
+                <a:latin typeface="Consolas"/>
               </a:rPr>
               <a:t>FKB CAMPUS  ·  FIRMENKUNDENAKADEMIE  ·  M24</a:t>
             </a:r>
@@ -3976,7 +3976,7 @@
                 <a:solidFill>
                   <a:srgbClr val="FFFFFF"/>
                 </a:solidFill>
-                <a:latin typeface="Source Serif 4"/>
+                <a:latin typeface="Arial"/>
               </a:rPr>
               <a:t>Unternehmensbewertung, Nachfolge und Verkauf</a:t>
             </a:r>
@@ -4011,7 +4011,7 @@
                 <a:solidFill>
                   <a:srgbClr val="BECDE6"/>
                 </a:solidFill>
-                <a:latin typeface="Source Serif 4"/>
+                <a:latin typeface="Arial"/>
               </a:rPr>
               <a:t>Den Wert eines Lebenswerks ermitteln und den Übergabeprozess begleiten</a:t>
             </a:r>
@@ -4089,7 +4089,7 @@
                 <a:solidFill>
                   <a:srgbClr val="A0B4D2"/>
                 </a:solidFill>
-                <a:latin typeface="JetBrains Mono"/>
+                <a:latin typeface="Consolas"/>
               </a:rPr>
               <a:t>KOMPETENZFELD</a:t>
             </a:r>
@@ -4159,7 +4159,7 @@
                 <a:solidFill>
                   <a:srgbClr val="A0B4D2"/>
                 </a:solidFill>
-                <a:latin typeface="JetBrains Mono"/>
+                <a:latin typeface="Consolas"/>
               </a:rPr>
               <a:t>KOMPETENZSTUFE</a:t>
             </a:r>
@@ -4229,7 +4229,7 @@
                 <a:solidFill>
                   <a:srgbClr val="A0B4D2"/>
                 </a:solidFill>
-                <a:latin typeface="JetBrains Mono"/>
+                <a:latin typeface="Consolas"/>
               </a:rPr>
               <a:t>VERSION</a:t>
             </a:r>
@@ -4342,7 +4342,7 @@
                 <a:solidFill>
                   <a:srgbClr val="96A5BE"/>
                 </a:solidFill>
-                <a:latin typeface="JetBrains Mono"/>
+                <a:latin typeface="Consolas"/>
               </a:rPr>
               <a:t>FKB Campus  ·  2026</a:t>
             </a:r>
@@ -4377,7 +4377,7 @@
                 <a:solidFill>
                   <a:srgbClr val="96A5BE"/>
                 </a:solidFill>
-                <a:latin typeface="JetBrains Mono"/>
+                <a:latin typeface="Consolas"/>
               </a:rPr>
               <a:t>Trainer-Präsentation</a:t>
             </a:r>
@@ -4516,7 +4516,7 @@
                 <a:solidFill>
                   <a:srgbClr val="78808C"/>
                 </a:solidFill>
-                <a:latin typeface="JetBrains Mono"/>
+                <a:latin typeface="Consolas"/>
               </a:rPr>
               <a:t>M24  ·  INHALT</a:t>
             </a:r>
@@ -4637,7 +4637,7 @@
                 <a:solidFill>
                   <a:srgbClr val="1F2C56"/>
                 </a:solidFill>
-                <a:latin typeface="Source Serif 4"/>
+                <a:latin typeface="Arial"/>
               </a:rPr>
               <a:t>Reflexionsfragen</a:t>
             </a:r>
@@ -4653,7 +4653,7 @@
         <p:spPr>
           <a:xfrm>
             <a:off x="685800" y="1417320"/>
-            <a:ext cx="10817352" cy="5029200"/>
+            <a:ext cx="10817352" cy="4892040"/>
           </a:xfrm>
           <a:prstGeom prst="rect">
             <a:avLst/>
@@ -4661,12 +4661,12 @@
           <a:noFill/>
         </p:spPr>
         <p:txBody>
-          <a:bodyPr wrap="square">
+          <a:bodyPr wrap="square" anchor="ctr">
             <a:spAutoFit/>
           </a:bodyPr>
           <a:lstStyle/>
           <a:p>
-            <a:pPr>
+            <a:pPr marL="190500" indent="-190500">
               <a:spcBef>
                 <a:spcPts val="400"/>
               </a:spcBef>
@@ -4685,7 +4685,7 @@
             </a:r>
           </a:p>
           <a:p>
-            <a:pPr>
+            <a:pPr marL="190500" indent="-190500">
               <a:spcBef>
                 <a:spcPts val="400"/>
               </a:spcBef>
@@ -4704,7 +4704,7 @@
             </a:r>
           </a:p>
           <a:p>
-            <a:pPr>
+            <a:pPr marL="190500" indent="-190500">
               <a:spcBef>
                 <a:spcPts val="400"/>
               </a:spcBef>
@@ -4723,7 +4723,7 @@
             </a:r>
           </a:p>
           <a:p>
-            <a:pPr>
+            <a:pPr marL="190500" indent="-190500">
               <a:spcBef>
                 <a:spcPts val="400"/>
               </a:spcBef>
@@ -4814,7 +4814,7 @@
                 <a:solidFill>
                   <a:srgbClr val="A0B4D2"/>
                 </a:solidFill>
-                <a:latin typeface="JetBrains Mono"/>
+                <a:latin typeface="Consolas"/>
               </a:rPr>
               <a:t>FKB Campus  ·  M24</a:t>
             </a:r>
@@ -4953,7 +4953,7 @@
                 <a:solidFill>
                   <a:srgbClr val="78808C"/>
                 </a:solidFill>
-                <a:latin typeface="JetBrains Mono"/>
+                <a:latin typeface="Consolas"/>
               </a:rPr>
               <a:t>ÜBERBLICK  ·  M24</a:t>
             </a:r>
@@ -5031,7 +5031,7 @@
                 <a:solidFill>
                   <a:srgbClr val="1F2C56"/>
                 </a:solidFill>
-                <a:latin typeface="Source Serif 4"/>
+                <a:latin typeface="Arial"/>
               </a:rPr>
               <a:t>Worum geht es heute</a:t>
             </a:r>
@@ -5180,7 +5180,7 @@
                 <a:solidFill>
                   <a:srgbClr val="A0B4D2"/>
                 </a:solidFill>
-                <a:latin typeface="JetBrains Mono"/>
+                <a:latin typeface="Consolas"/>
               </a:rPr>
               <a:t>FKB Campus  ·  M24</a:t>
             </a:r>
@@ -5319,7 +5319,7 @@
                 <a:solidFill>
                   <a:srgbClr val="78808C"/>
                 </a:solidFill>
-                <a:latin typeface="JetBrains Mono"/>
+                <a:latin typeface="Consolas"/>
               </a:rPr>
               <a:t>LERNZIELE  ·  M24</a:t>
             </a:r>
@@ -5397,7 +5397,7 @@
                 <a:solidFill>
                   <a:srgbClr val="1F2C56"/>
                 </a:solidFill>
-                <a:latin typeface="Source Serif 4"/>
+                <a:latin typeface="Arial"/>
               </a:rPr>
               <a:t>Was Sie heute mitnehmen</a:t>
             </a:r>
@@ -5593,7 +5593,7 @@
                 <a:solidFill>
                   <a:srgbClr val="A0B4D2"/>
                 </a:solidFill>
-                <a:latin typeface="JetBrains Mono"/>
+                <a:latin typeface="Consolas"/>
               </a:rPr>
               <a:t>FKB Campus  ·  M24</a:t>
             </a:r>
@@ -5732,7 +5732,7 @@
                 <a:solidFill>
                   <a:srgbClr val="78808C"/>
                 </a:solidFill>
-                <a:latin typeface="JetBrains Mono"/>
+                <a:latin typeface="Consolas"/>
               </a:rPr>
               <a:t>AGENDA  ·  M24</a:t>
             </a:r>
@@ -5810,7 +5810,7 @@
                 <a:solidFill>
                   <a:srgbClr val="1F2C56"/>
                 </a:solidFill>
-                <a:latin typeface="Source Serif 4"/>
+                <a:latin typeface="Arial"/>
               </a:rPr>
               <a:t>So läuft das Modul</a:t>
             </a:r>
@@ -6291,7 +6291,7 @@
                 <a:solidFill>
                   <a:srgbClr val="A0B4D2"/>
                 </a:solidFill>
-                <a:latin typeface="JetBrains Mono"/>
+                <a:latin typeface="Consolas"/>
               </a:rPr>
               <a:t>FKB Campus  ·  M24</a:t>
             </a:r>
@@ -6430,7 +6430,7 @@
                 <a:solidFill>
                   <a:srgbClr val="78808C"/>
                 </a:solidFill>
-                <a:latin typeface="JetBrains Mono"/>
+                <a:latin typeface="Consolas"/>
               </a:rPr>
               <a:t>M24  ·  INHALT</a:t>
             </a:r>
@@ -6551,7 +6551,7 @@
                 <a:solidFill>
                   <a:srgbClr val="1F2C56"/>
                 </a:solidFill>
-                <a:latin typeface="Source Serif 4"/>
+                <a:latin typeface="Arial"/>
               </a:rPr>
               <a:t>Theorie-Input: Die drei Verfahrensfamilien der Unternehmensbewertung</a:t>
             </a:r>
@@ -6567,7 +6567,7 @@
         <p:spPr>
           <a:xfrm>
             <a:off x="685800" y="1417320"/>
-            <a:ext cx="10817352" cy="5029200"/>
+            <a:ext cx="10817352" cy="4892040"/>
           </a:xfrm>
           <a:prstGeom prst="rect">
             <a:avLst/>
@@ -6593,9 +6593,28 @@
                 <a:solidFill>
                   <a:srgbClr val="78808C"/>
                 </a:solidFill>
-                <a:latin typeface="JetBrains Mono"/>
-              </a:rPr>
-              <a:t>WARUM EIN BERATER BEWERTUNG VERSTEHEN MUSS</a:t>
+                <a:latin typeface="Consolas"/>
+              </a:rPr>
+              <a:t>DIE DREI VERFAHRENSFAMILIEN</a:t>
+            </a:r>
+          </a:p>
+          <a:p>
+            <a:pPr marL="177800" indent="-177800">
+              <a:spcBef>
+                <a:spcPts val="600"/>
+              </a:spcBef>
+              <a:spcAft>
+                <a:spcPts val="200"/>
+              </a:spcAft>
+            </a:pPr>
+            <a:r>
+              <a:rPr sz="1200" i="1">
+                <a:solidFill>
+                  <a:srgbClr val="3D5466"/>
+                </a:solidFill>
+                <a:latin typeface="Arial"/>
+              </a:rPr>
+              <a:t>→  Begriff: Earn-out</a:t>
             </a:r>
           </a:p>
           <a:p>
@@ -6612,70 +6631,13 @@
                 <a:solidFill>
                   <a:srgbClr val="78808C"/>
                 </a:solidFill>
-                <a:latin typeface="JetBrains Mono"/>
-              </a:rPr>
-              <a:t>ANLASS UND FUNKTION: DER ORIENTIERUNGSWERT</a:t>
-            </a:r>
-          </a:p>
-          <a:p>
-            <a:pPr>
-              <a:spcBef>
-                <a:spcPts val="1000"/>
-              </a:spcBef>
-              <a:spcAft>
-                <a:spcPts val="200"/>
-              </a:spcAft>
-            </a:pPr>
-            <a:r>
-              <a:rPr sz="800" b="1">
-                <a:solidFill>
-                  <a:srgbClr val="78808C"/>
-                </a:solidFill>
-                <a:latin typeface="JetBrains Mono"/>
-              </a:rPr>
-              <a:t>DIE DREI VERFAHRENSFAMILIEN</a:t>
-            </a:r>
-          </a:p>
-          <a:p>
-            <a:pPr>
-              <a:spcBef>
-                <a:spcPts val="600"/>
-              </a:spcBef>
-              <a:spcAft>
-                <a:spcPts val="200"/>
-              </a:spcAft>
-            </a:pPr>
-            <a:r>
-              <a:rPr sz="1200" i="1">
-                <a:solidFill>
-                  <a:srgbClr val="3D5466"/>
-                </a:solidFill>
-                <a:latin typeface="Arial"/>
-              </a:rPr>
-              <a:t>→  Begriff: Earn-out</a:t>
-            </a:r>
-          </a:p>
-          <a:p>
-            <a:pPr>
-              <a:spcBef>
-                <a:spcPts val="1000"/>
-              </a:spcBef>
-              <a:spcAft>
-                <a:spcPts val="200"/>
-              </a:spcAft>
-            </a:pPr>
-            <a:r>
-              <a:rPr sz="800" b="1">
-                <a:solidFill>
-                  <a:srgbClr val="78808C"/>
-                </a:solidFill>
-                <a:latin typeface="JetBrains Mono"/>
+                <a:latin typeface="Consolas"/>
               </a:rPr>
               <a:t>DIE DREI KMU-KORREKTUREN</a:t>
             </a:r>
           </a:p>
           <a:p>
-            <a:pPr>
+            <a:pPr marL="190500" indent="-190500">
               <a:spcBef>
                 <a:spcPts val="400"/>
               </a:spcBef>
@@ -6694,7 +6656,7 @@
             </a:r>
           </a:p>
           <a:p>
-            <a:pPr>
+            <a:pPr marL="190500" indent="-190500">
               <a:spcBef>
                 <a:spcPts val="400"/>
               </a:spcBef>
@@ -6713,7 +6675,7 @@
             </a:r>
           </a:p>
           <a:p>
-            <a:pPr>
+            <a:pPr marL="190500" indent="-190500">
               <a:spcBef>
                 <a:spcPts val="400"/>
               </a:spcBef>
@@ -6732,7 +6694,7 @@
             </a:r>
           </a:p>
           <a:p>
-            <a:pPr>
+            <a:pPr marL="190500" indent="-190500">
               <a:spcBef>
                 <a:spcPts val="400"/>
               </a:spcBef>
@@ -6823,7 +6785,7 @@
                 <a:solidFill>
                   <a:srgbClr val="A0B4D2"/>
                 </a:solidFill>
-                <a:latin typeface="JetBrains Mono"/>
+                <a:latin typeface="Consolas"/>
               </a:rPr>
               <a:t>FKB Campus  ·  M24</a:t>
             </a:r>
@@ -6962,7 +6924,7 @@
                 <a:solidFill>
                   <a:srgbClr val="78808C"/>
                 </a:solidFill>
-                <a:latin typeface="JetBrains Mono"/>
+                <a:latin typeface="Consolas"/>
               </a:rPr>
               <a:t>M24  ·  SCHAUBILD</a:t>
             </a:r>
@@ -6997,7 +6959,7 @@
                 <a:solidFill>
                   <a:srgbClr val="1F2C56"/>
                 </a:solidFill>
-                <a:latin typeface="Source Serif 4"/>
+                <a:latin typeface="Arial"/>
               </a:rPr>
               <a:t>Die drei Verfahrensfamilien der Unternehmensbewertung und ih</a:t>
             </a:r>
@@ -7142,7 +7104,7 @@
                 <a:solidFill>
                   <a:srgbClr val="A0B4D2"/>
                 </a:solidFill>
-                <a:latin typeface="JetBrains Mono"/>
+                <a:latin typeface="Consolas"/>
               </a:rPr>
               <a:t>FKB Campus  ·  M24</a:t>
             </a:r>
@@ -7177,7 +7139,7 @@
                 <a:solidFill>
                   <a:srgbClr val="A0B4D2"/>
                 </a:solidFill>
-                <a:latin typeface="JetBrains Mono"/>
+                <a:latin typeface="Consolas"/>
               </a:rPr>
               <a:t>Schaubild</a:t>
             </a:r>
@@ -7316,7 +7278,7 @@
                 <a:solidFill>
                   <a:srgbClr val="78808C"/>
                 </a:solidFill>
-                <a:latin typeface="JetBrains Mono"/>
+                <a:latin typeface="Consolas"/>
               </a:rPr>
               <a:t>M24  ·  INHALT</a:t>
             </a:r>
@@ -7437,7 +7399,7 @@
                 <a:solidFill>
                   <a:srgbClr val="1F2C56"/>
                 </a:solidFill>
-                <a:latin typeface="Source Serif 4"/>
+                <a:latin typeface="Arial"/>
               </a:rPr>
               <a:t>Theorie-Input: Verkaufs- und Übergabeprozess</a:t>
             </a:r>
@@ -7453,7 +7415,7 @@
         <p:spPr>
           <a:xfrm>
             <a:off x="685800" y="1417320"/>
-            <a:ext cx="10817352" cy="5029200"/>
+            <a:ext cx="10817352" cy="4892040"/>
           </a:xfrm>
           <a:prstGeom prst="rect">
             <a:avLst/>
@@ -7461,67 +7423,11 @@
           <a:noFill/>
         </p:spPr>
         <p:txBody>
-          <a:bodyPr wrap="square">
+          <a:bodyPr wrap="square" anchor="ctr">
             <a:spAutoFit/>
           </a:bodyPr>
           <a:lstStyle/>
-          <a:p>
-            <a:pPr>
-              <a:spcBef>
-                <a:spcPts val="1000"/>
-              </a:spcBef>
-              <a:spcAft>
-                <a:spcPts val="200"/>
-              </a:spcAft>
-            </a:pPr>
-            <a:r>
-              <a:rPr sz="800" b="1">
-                <a:solidFill>
-                  <a:srgbClr val="78808C"/>
-                </a:solidFill>
-                <a:latin typeface="JetBrains Mono"/>
-              </a:rPr>
-              <a:t>DIE OPTIONEN DER NACHFOLGE</a:t>
-            </a:r>
-          </a:p>
-          <a:p>
-            <a:pPr>
-              <a:spcBef>
-                <a:spcPts val="1000"/>
-              </a:spcBef>
-              <a:spcAft>
-                <a:spcPts val="200"/>
-              </a:spcAft>
-            </a:pPr>
-            <a:r>
-              <a:rPr sz="800" b="1">
-                <a:solidFill>
-                  <a:srgbClr val="78808C"/>
-                </a:solidFill>
-                <a:latin typeface="JetBrains Mono"/>
-              </a:rPr>
-              <a:t>DER PROZESS IN PHASEN</a:t>
-            </a:r>
-          </a:p>
-          <a:p>
-            <a:pPr>
-              <a:spcBef>
-                <a:spcPts val="1000"/>
-              </a:spcBef>
-              <a:spcAft>
-                <a:spcPts val="200"/>
-              </a:spcAft>
-            </a:pPr>
-            <a:r>
-              <a:rPr sz="800" b="1">
-                <a:solidFill>
-                  <a:srgbClr val="78808C"/>
-                </a:solidFill>
-                <a:latin typeface="JetBrains Mono"/>
-              </a:rPr>
-              <a:t>DIE EMOTIONALE DIMENSION</a:t>
-            </a:r>
-          </a:p>
+          <a:p/>
         </p:txBody>
       </p:sp>
       <p:sp>
@@ -7595,7 +7501,7 @@
                 <a:solidFill>
                   <a:srgbClr val="A0B4D2"/>
                 </a:solidFill>
-                <a:latin typeface="JetBrains Mono"/>
+                <a:latin typeface="Consolas"/>
               </a:rPr>
               <a:t>FKB Campus  ·  M24</a:t>
             </a:r>
@@ -7734,7 +7640,7 @@
                 <a:solidFill>
                   <a:srgbClr val="78808C"/>
                 </a:solidFill>
-                <a:latin typeface="JetBrains Mono"/>
+                <a:latin typeface="Consolas"/>
               </a:rPr>
               <a:t>M24  ·  ARBEITSBLATT</a:t>
             </a:r>
@@ -7855,7 +7761,7 @@
                 <a:solidFill>
                   <a:srgbClr val="1F2C56"/>
                 </a:solidFill>
-                <a:latin typeface="Source Serif 4"/>
+                <a:latin typeface="Arial"/>
               </a:rPr>
               <a:t>Praxisfall: Präzisionstechnik Musterregion GmbH</a:t>
             </a:r>
@@ -7884,7 +7790,7 @@
           </a:bodyPr>
           <a:lstStyle/>
           <a:p>
-            <a:pPr>
+            <a:pPr marL="190500" indent="-190500">
               <a:spcBef>
                 <a:spcPts val="400"/>
               </a:spcBef>
@@ -7903,7 +7809,7 @@
             </a:r>
           </a:p>
           <a:p>
-            <a:pPr>
+            <a:pPr marL="190500" indent="-190500">
               <a:spcBef>
                 <a:spcPts val="400"/>
               </a:spcBef>
@@ -7922,7 +7828,7 @@
             </a:r>
           </a:p>
           <a:p>
-            <a:pPr>
+            <a:pPr marL="190500" indent="-190500">
               <a:spcBef>
                 <a:spcPts val="400"/>
               </a:spcBef>
@@ -7941,7 +7847,7 @@
             </a:r>
           </a:p>
           <a:p>
-            <a:pPr>
+            <a:pPr marL="190500" indent="-190500">
               <a:spcBef>
                 <a:spcPts val="400"/>
               </a:spcBef>
@@ -7960,7 +7866,7 @@
             </a:r>
           </a:p>
           <a:p>
-            <a:pPr>
+            <a:pPr marL="190500" indent="-190500">
               <a:spcBef>
                 <a:spcPts val="400"/>
               </a:spcBef>
@@ -8129,7 +8035,7 @@
                 <a:solidFill>
                   <a:srgbClr val="A0B4D2"/>
                 </a:solidFill>
-                <a:latin typeface="JetBrains Mono"/>
+                <a:latin typeface="Consolas"/>
               </a:rPr>
               <a:t>FKB Campus  ·  M24</a:t>
             </a:r>
@@ -8268,7 +8174,7 @@
                 <a:solidFill>
                   <a:srgbClr val="78808C"/>
                 </a:solidFill>
-                <a:latin typeface="JetBrains Mono"/>
+                <a:latin typeface="Consolas"/>
               </a:rPr>
               <a:t>M24  ·  SCHAUBILD</a:t>
             </a:r>
@@ -8303,7 +8209,7 @@
                 <a:solidFill>
                   <a:srgbClr val="1F2C56"/>
                 </a:solidFill>
-                <a:latin typeface="Source Serif 4"/>
+                <a:latin typeface="Arial"/>
               </a:rPr>
               <a:t>Handlungsempfehlung</a:t>
             </a:r>
@@ -8448,7 +8354,7 @@
                 <a:solidFill>
                   <a:srgbClr val="A0B4D2"/>
                 </a:solidFill>
-                <a:latin typeface="JetBrains Mono"/>
+                <a:latin typeface="Consolas"/>
               </a:rPr>
               <a:t>FKB Campus  ·  M24</a:t>
             </a:r>
@@ -8483,7 +8389,7 @@
                 <a:solidFill>
                   <a:srgbClr val="A0B4D2"/>
                 </a:solidFill>
-                <a:latin typeface="JetBrains Mono"/>
+                <a:latin typeface="Consolas"/>
               </a:rPr>
               <a:t>Schaubild</a:t>
             </a:r>

--- a/protected-downloads/praesentation/M24.pptx
+++ b/protected-downloads/praesentation/M24.pptx
@@ -15,6 +15,16 @@
     <p:sldId id="263" r:id="rId15"/>
     <p:sldId id="264" r:id="rId16"/>
     <p:sldId id="265" r:id="rId17"/>
+    <p:sldId id="266" r:id="rId18"/>
+    <p:sldId id="267" r:id="rId19"/>
+    <p:sldId id="268" r:id="rId20"/>
+    <p:sldId id="269" r:id="rId21"/>
+    <p:sldId id="270" r:id="rId22"/>
+    <p:sldId id="271" r:id="rId23"/>
+    <p:sldId id="272" r:id="rId24"/>
+    <p:sldId id="273" r:id="rId25"/>
+    <p:sldId id="274" r:id="rId26"/>
+    <p:sldId id="275" r:id="rId27"/>
   </p:sldIdLst>
   <p:sldSz cx="12188952" cy="6858000" type="screen4x3"/>
   <p:notesSz cx="6858000" cy="9144000"/>
@@ -536,6 +546,146 @@
 </p:notes>
 </file>
 
+<file path=ppt/notesSlides/notesSlide10.xml><?xml version="1.0" encoding="utf-8"?>
+<p:notes xmlns:a="http://schemas.openxmlformats.org/drawingml/2006/main" xmlns:p="http://schemas.openxmlformats.org/presentationml/2006/main" xmlns:r="http://schemas.openxmlformats.org/officeDocument/2006/relationships">
+  <p:cSld>
+    <p:spTree>
+      <p:nvGrpSpPr>
+        <p:cNvPr id="1" name=""/>
+        <p:cNvGrpSpPr/>
+        <p:nvPr/>
+      </p:nvGrpSpPr>
+      <p:grpSpPr>
+        <a:xfrm>
+          <a:off x="0" y="0"/>
+          <a:ext cx="0" cy="0"/>
+          <a:chOff x="0" y="0"/>
+          <a:chExt cx="0" cy="0"/>
+        </a:xfrm>
+      </p:grpSpPr>
+      <p:sp>
+        <p:nvSpPr>
+          <p:cNvPr id="2" name="Slide Image Placeholder 1"/>
+          <p:cNvSpPr>
+            <a:spLocks noGrp="1"/>
+          </p:cNvSpPr>
+          <p:nvPr>
+            <p:ph type="sldImg" idx="2"/>
+          </p:nvPr>
+        </p:nvSpPr>
+        <p:spPr/>
+      </p:sp>
+      <p:sp>
+        <p:nvSpPr>
+          <p:cNvPr id="3" name="Notes Placeholder 2"/>
+          <p:cNvSpPr>
+            <a:spLocks noGrp="1"/>
+          </p:cNvSpPr>
+          <p:nvPr>
+            <p:ph type="body" idx="3" sz="quarter"/>
+          </p:nvPr>
+        </p:nvSpPr>
+        <p:spPr/>
+        <p:txBody>
+          <a:bodyPr/>
+          <a:lstStyle/>
+          <a:p>
+            <a:r>
+              <a:t>Nachfolge-Radar (AB-6) und Transferaufgabe vorstellen; Selbstcheck als Hausaufgabe.</a:t>
+            </a:r>
+          </a:p>
+        </p:txBody>
+      </p:sp>
+      <p:sp>
+        <p:nvSpPr>
+          <p:cNvPr id="4" name="Slide Number Placeholder 3"/>
+          <p:cNvSpPr>
+            <a:spLocks noGrp="1"/>
+          </p:cNvSpPr>
+          <p:nvPr>
+            <p:ph type="sldNum" idx="5" sz="quarter"/>
+          </p:nvPr>
+        </p:nvSpPr>
+        <p:spPr/>
+      </p:sp>
+    </p:spTree>
+  </p:cSld>
+  <p:clrMapOvr>
+    <a:masterClrMapping/>
+  </p:clrMapOvr>
+</p:notes>
+</file>
+
+<file path=ppt/notesSlides/notesSlide11.xml><?xml version="1.0" encoding="utf-8"?>
+<p:notes xmlns:a="http://schemas.openxmlformats.org/drawingml/2006/main" xmlns:p="http://schemas.openxmlformats.org/presentationml/2006/main" xmlns:r="http://schemas.openxmlformats.org/officeDocument/2006/relationships">
+  <p:cSld>
+    <p:spTree>
+      <p:nvGrpSpPr>
+        <p:cNvPr id="1" name=""/>
+        <p:cNvGrpSpPr/>
+        <p:nvPr/>
+      </p:nvGrpSpPr>
+      <p:grpSpPr>
+        <a:xfrm>
+          <a:off x="0" y="0"/>
+          <a:ext cx="0" cy="0"/>
+          <a:chOff x="0" y="0"/>
+          <a:chExt cx="0" cy="0"/>
+        </a:xfrm>
+      </p:grpSpPr>
+      <p:sp>
+        <p:nvSpPr>
+          <p:cNvPr id="2" name="Slide Image Placeholder 1"/>
+          <p:cNvSpPr>
+            <a:spLocks noGrp="1"/>
+          </p:cNvSpPr>
+          <p:nvPr>
+            <p:ph type="sldImg" idx="2"/>
+          </p:nvPr>
+        </p:nvSpPr>
+        <p:spPr/>
+      </p:sp>
+      <p:sp>
+        <p:nvSpPr>
+          <p:cNvPr id="3" name="Notes Placeholder 2"/>
+          <p:cNvSpPr>
+            <a:spLocks noGrp="1"/>
+          </p:cNvSpPr>
+          <p:nvPr>
+            <p:ph type="body" idx="3" sz="quarter"/>
+          </p:nvPr>
+        </p:nvSpPr>
+        <p:spPr/>
+        <p:txBody>
+          <a:bodyPr/>
+          <a:lstStyle/>
+          <a:p>
+            <a:r>
+              <a:t>Nachfolge-Radar (AB-6) im eigenen Bestand als Transferanker.</a:t>
+            </a:r>
+          </a:p>
+        </p:txBody>
+      </p:sp>
+      <p:sp>
+        <p:nvSpPr>
+          <p:cNvPr id="4" name="Slide Number Placeholder 3"/>
+          <p:cNvSpPr>
+            <a:spLocks noGrp="1"/>
+          </p:cNvSpPr>
+          <p:nvPr>
+            <p:ph type="sldNum" idx="5" sz="quarter"/>
+          </p:nvPr>
+        </p:nvSpPr>
+        <p:spPr/>
+      </p:sp>
+    </p:spTree>
+  </p:cSld>
+  <p:clrMapOvr>
+    <a:masterClrMapping/>
+  </p:clrMapOvr>
+</p:notes>
+</file>
+
 <file path=ppt/notesSlides/notesSlide2.xml><?xml version="1.0" encoding="utf-8"?>
 <p:notes xmlns:a="http://schemas.openxmlformats.org/drawingml/2006/main" xmlns:p="http://schemas.openxmlformats.org/presentationml/2006/main" xmlns:r="http://schemas.openxmlformats.org/officeDocument/2006/relationships">
   <p:cSld>
@@ -581,7 +731,7 @@
           <a:lstStyle/>
           <a:p>
             <a:r>
-              <a:t>Siehe Trainerhandbuch (Sektion 3) für Moderationshinweise, Timing und erwartete Teilnehmerreaktionen.</a:t>
+              <a:t>Impuls: das Lebenswerk auf dem Tisch. Der Hausbankberater ist oft der Erste, der Nachfolge anspricht.</a:t>
             </a:r>
           </a:p>
         </p:txBody>
@@ -651,7 +801,7 @@
           <a:lstStyle/>
           <a:p>
             <a:r>
-              <a:t>Siehe Trainerhandbuch (Sektion 3) für Moderationshinweise, Timing und erwartete Teilnehmerreaktionen.</a:t>
+              <a:t>Anlass und Funktion klären: der Berater liefert eine erste Werteinschätzung, kein testiertes Gutachten.</a:t>
             </a:r>
           </a:p>
         </p:txBody>
@@ -721,37 +871,7 @@
           <a:lstStyle/>
           <a:p>
             <a:r>
-              <a:t>AB-2 Musterlösung (Trainer-Version)</a:t>
-            </a:r>
-          </a:p>
-          <a:p>
-            <a:r>
-              <a:t>Nachhaltiger Netto-Überschuss = 750 × 0,70 = 525 TEUR.</a:t>
-            </a:r>
-          </a:p>
-          <a:p>
-            <a:r>
-              <a:t>Ertragswert (betriebsnotw.) = 525 / 0,099 ≈ 5.303 TEUR; Ertragswert gesamt = 5.303 + 500 ≈ 5.800 TEUR.</a:t>
-            </a:r>
-          </a:p>
-          <a:p>
-            <a:r>
-              <a:t>Enterprise Value (Multiple) = 750 × 6,0 = 4.500 TEUR; Eigenkapitalwert (Multiple) = 4.500 − 700 + 500 = 4.300 TEUR.</a:t>
-            </a:r>
-          </a:p>
-          <a:p>
-            <a:r>
-              <a:t>Wertbandbreite ≈ 4,3 bis 5,8 Mio. EUR, plausibler Verhandlungskorridor um ca. 5,0 Mio. EUR.</a:t>
-            </a:r>
-          </a:p>
-          <a:p>
-            <a:r>
-              <a:t>Kernbefund: Der Ertragswert liegt rund 1,5 Mio. EUR über dem Multiple-Wert. Das ist kein Rechenfehler, sondern Ausdruck dessen, dass der Ertragswert einen theoretischen, personenunabhängig fortgeführten Erfolg unterstellt, während das Marktmultiple die reale Personenabhängigkeit und Transaktionsabschläge einpreist. Genau diese Differenz ist das Gespräch: Eine geordnete, mehrjährige Übergabe mit Earn-out hebt den realisierbaren Preis in Richtung Ertragswert.</a:t>
-            </a:r>
-          </a:p>
-          <a:p>
-            <a:r>
-              <a:t>Trainer-Hinweis: Die Zahlen sind ein Korridor, kein Gutachten. Entscheidend ist, dass die Teilnehmer (a) die Bandbreite begründen und (b) erkennen, dass die Personenabhängigkeit der zentrale, durch eine geordnete Übergabe beeinflussbare Werthebel ist.</a:t>
+              <a:t>Stärken und Grenzen je Verfahren. Für den KMU-Alltag: Ertragswert + Multiple als praktikable Bandbreite.</a:t>
             </a:r>
           </a:p>
         </p:txBody>
@@ -821,7 +941,297 @@
           <a:lstStyle/>
           <a:p>
             <a:r>
-              <a:t>Siehe Trainerhandbuch (Sektion 3) für Moderationshinweise, Timing und erwartete Teilnehmerreaktionen.</a:t>
+              <a:t>Die Korrekturen entscheiden über den nachhaltigen Ertrag – der Kern jeder KMU-Bewertung.</a:t>
+            </a:r>
+          </a:p>
+        </p:txBody>
+      </p:sp>
+      <p:sp>
+        <p:nvSpPr>
+          <p:cNvPr id="4" name="Slide Number Placeholder 3"/>
+          <p:cNvSpPr>
+            <a:spLocks noGrp="1"/>
+          </p:cNvSpPr>
+          <p:nvPr>
+            <p:ph type="sldNum" idx="5" sz="quarter"/>
+          </p:nvPr>
+        </p:nvSpPr>
+        <p:spPr/>
+      </p:sp>
+    </p:spTree>
+  </p:cSld>
+  <p:clrMapOvr>
+    <a:masterClrMapping/>
+  </p:clrMapOvr>
+</p:notes>
+</file>
+
+<file path=ppt/notesSlides/notesSlide6.xml><?xml version="1.0" encoding="utf-8"?>
+<p:notes xmlns:a="http://schemas.openxmlformats.org/drawingml/2006/main" xmlns:p="http://schemas.openxmlformats.org/presentationml/2006/main" xmlns:r="http://schemas.openxmlformats.org/officeDocument/2006/relationships">
+  <p:cSld>
+    <p:spTree>
+      <p:nvGrpSpPr>
+        <p:cNvPr id="1" name=""/>
+        <p:cNvGrpSpPr/>
+        <p:nvPr/>
+      </p:nvGrpSpPr>
+      <p:grpSpPr>
+        <a:xfrm>
+          <a:off x="0" y="0"/>
+          <a:ext cx="0" cy="0"/>
+          <a:chOff x="0" y="0"/>
+          <a:chExt cx="0" cy="0"/>
+        </a:xfrm>
+      </p:grpSpPr>
+      <p:sp>
+        <p:nvSpPr>
+          <p:cNvPr id="2" name="Slide Image Placeholder 1"/>
+          <p:cNvSpPr>
+            <a:spLocks noGrp="1"/>
+          </p:cNvSpPr>
+          <p:nvPr>
+            <p:ph type="sldImg" idx="2"/>
+          </p:nvPr>
+        </p:nvSpPr>
+        <p:spPr/>
+      </p:sp>
+      <p:sp>
+        <p:nvSpPr>
+          <p:cNvPr id="3" name="Notes Placeholder 2"/>
+          <p:cNvSpPr>
+            <a:spLocks noGrp="1"/>
+          </p:cNvSpPr>
+          <p:nvPr>
+            <p:ph type="body" idx="3" sz="quarter"/>
+          </p:nvPr>
+        </p:nvSpPr>
+        <p:spPr/>
+        <p:txBody>
+          <a:bodyPr/>
+          <a:lstStyle/>
+          <a:p>
+            <a:r>
+              <a:t>AB Musterlösung (Trainer-Version)</a:t>
+            </a:r>
+          </a:p>
+          <a:p>
+            <a:r>
+              <a:t>Fall: bereinigtes EBIT 750 TEUR, EBIT-Multiple Zerspanung ~6,0 → Multiple-Wert ~4,5 Mio. EUR; mit Ertragswert eine Bandbreite bilden. Personenabhängigkeit senkt den übertragbaren Wert.</a:t>
+            </a:r>
+          </a:p>
+        </p:txBody>
+      </p:sp>
+      <p:sp>
+        <p:nvSpPr>
+          <p:cNvPr id="4" name="Slide Number Placeholder 3"/>
+          <p:cNvSpPr>
+            <a:spLocks noGrp="1"/>
+          </p:cNvSpPr>
+          <p:nvPr>
+            <p:ph type="sldNum" idx="5" sz="quarter"/>
+          </p:nvPr>
+        </p:nvSpPr>
+        <p:spPr/>
+      </p:sp>
+    </p:spTree>
+  </p:cSld>
+  <p:clrMapOvr>
+    <a:masterClrMapping/>
+  </p:clrMapOvr>
+</p:notes>
+</file>
+
+<file path=ppt/notesSlides/notesSlide7.xml><?xml version="1.0" encoding="utf-8"?>
+<p:notes xmlns:a="http://schemas.openxmlformats.org/drawingml/2006/main" xmlns:p="http://schemas.openxmlformats.org/presentationml/2006/main" xmlns:r="http://schemas.openxmlformats.org/officeDocument/2006/relationships">
+  <p:cSld>
+    <p:spTree>
+      <p:nvGrpSpPr>
+        <p:cNvPr id="1" name=""/>
+        <p:cNvGrpSpPr/>
+        <p:nvPr/>
+      </p:nvGrpSpPr>
+      <p:grpSpPr>
+        <a:xfrm>
+          <a:off x="0" y="0"/>
+          <a:ext cx="0" cy="0"/>
+          <a:chOff x="0" y="0"/>
+          <a:chExt cx="0" cy="0"/>
+        </a:xfrm>
+      </p:grpSpPr>
+      <p:sp>
+        <p:nvSpPr>
+          <p:cNvPr id="2" name="Slide Image Placeholder 1"/>
+          <p:cNvSpPr>
+            <a:spLocks noGrp="1"/>
+          </p:cNvSpPr>
+          <p:nvPr>
+            <p:ph type="sldImg" idx="2"/>
+          </p:nvPr>
+        </p:nvSpPr>
+        <p:spPr/>
+      </p:sp>
+      <p:sp>
+        <p:nvSpPr>
+          <p:cNvPr id="3" name="Notes Placeholder 2"/>
+          <p:cNvSpPr>
+            <a:spLocks noGrp="1"/>
+          </p:cNvSpPr>
+          <p:nvPr>
+            <p:ph type="body" idx="3" sz="quarter"/>
+          </p:nvPr>
+        </p:nvSpPr>
+        <p:spPr/>
+        <p:txBody>
+          <a:bodyPr/>
+          <a:lstStyle/>
+          <a:p>
+            <a:r>
+              <a:t>Interne vs. externe Nachfolge; die emotionale Dimension ist Teil des Prozesses, nicht Beiwerk.</a:t>
+            </a:r>
+          </a:p>
+        </p:txBody>
+      </p:sp>
+      <p:sp>
+        <p:nvSpPr>
+          <p:cNvPr id="4" name="Slide Number Placeholder 3"/>
+          <p:cNvSpPr>
+            <a:spLocks noGrp="1"/>
+          </p:cNvSpPr>
+          <p:nvPr>
+            <p:ph type="sldNum" idx="5" sz="quarter"/>
+          </p:nvPr>
+        </p:nvSpPr>
+        <p:spPr/>
+      </p:sp>
+    </p:spTree>
+  </p:cSld>
+  <p:clrMapOvr>
+    <a:masterClrMapping/>
+  </p:clrMapOvr>
+</p:notes>
+</file>
+
+<file path=ppt/notesSlides/notesSlide8.xml><?xml version="1.0" encoding="utf-8"?>
+<p:notes xmlns:a="http://schemas.openxmlformats.org/drawingml/2006/main" xmlns:p="http://schemas.openxmlformats.org/presentationml/2006/main" xmlns:r="http://schemas.openxmlformats.org/officeDocument/2006/relationships">
+  <p:cSld>
+    <p:spTree>
+      <p:nvGrpSpPr>
+        <p:cNvPr id="1" name=""/>
+        <p:cNvGrpSpPr/>
+        <p:nvPr/>
+      </p:nvGrpSpPr>
+      <p:grpSpPr>
+        <a:xfrm>
+          <a:off x="0" y="0"/>
+          <a:ext cx="0" cy="0"/>
+          <a:chOff x="0" y="0"/>
+          <a:chExt cx="0" cy="0"/>
+        </a:xfrm>
+      </p:grpSpPr>
+      <p:sp>
+        <p:nvSpPr>
+          <p:cNvPr id="2" name="Slide Image Placeholder 1"/>
+          <p:cNvSpPr>
+            <a:spLocks noGrp="1"/>
+          </p:cNvSpPr>
+          <p:nvPr>
+            <p:ph type="sldImg" idx="2"/>
+          </p:nvPr>
+        </p:nvSpPr>
+        <p:spPr/>
+      </p:sp>
+      <p:sp>
+        <p:nvSpPr>
+          <p:cNvPr id="3" name="Notes Placeholder 2"/>
+          <p:cNvSpPr>
+            <a:spLocks noGrp="1"/>
+          </p:cNvSpPr>
+          <p:nvPr>
+            <p:ph type="body" idx="3" sz="quarter"/>
+          </p:nvPr>
+        </p:nvSpPr>
+        <p:spPr/>
+        <p:txBody>
+          <a:bodyPr/>
+          <a:lstStyle/>
+          <a:p>
+            <a:r>
+              <a:t>Kein familieninterner Nachfolger (Tochter Ärztin, Sohn im Ausland) – MBO oder externer Verkauf mit Übergangsphase.</a:t>
+            </a:r>
+          </a:p>
+        </p:txBody>
+      </p:sp>
+      <p:sp>
+        <p:nvSpPr>
+          <p:cNvPr id="4" name="Slide Number Placeholder 3"/>
+          <p:cNvSpPr>
+            <a:spLocks noGrp="1"/>
+          </p:cNvSpPr>
+          <p:nvPr>
+            <p:ph type="sldNum" idx="5" sz="quarter"/>
+          </p:nvPr>
+        </p:nvSpPr>
+        <p:spPr/>
+      </p:sp>
+    </p:spTree>
+  </p:cSld>
+  <p:clrMapOvr>
+    <a:masterClrMapping/>
+  </p:clrMapOvr>
+</p:notes>
+</file>
+
+<file path=ppt/notesSlides/notesSlide9.xml><?xml version="1.0" encoding="utf-8"?>
+<p:notes xmlns:a="http://schemas.openxmlformats.org/drawingml/2006/main" xmlns:p="http://schemas.openxmlformats.org/presentationml/2006/main" xmlns:r="http://schemas.openxmlformats.org/officeDocument/2006/relationships">
+  <p:cSld>
+    <p:spTree>
+      <p:nvGrpSpPr>
+        <p:cNvPr id="1" name=""/>
+        <p:cNvGrpSpPr/>
+        <p:nvPr/>
+      </p:nvGrpSpPr>
+      <p:grpSpPr>
+        <a:xfrm>
+          <a:off x="0" y="0"/>
+          <a:ext cx="0" cy="0"/>
+          <a:chOff x="0" y="0"/>
+          <a:chExt cx="0" cy="0"/>
+        </a:xfrm>
+      </p:grpSpPr>
+      <p:sp>
+        <p:nvSpPr>
+          <p:cNvPr id="2" name="Slide Image Placeholder 1"/>
+          <p:cNvSpPr>
+            <a:spLocks noGrp="1"/>
+          </p:cNvSpPr>
+          <p:nvPr>
+            <p:ph type="sldImg" idx="2"/>
+          </p:nvPr>
+        </p:nvSpPr>
+        <p:spPr/>
+      </p:sp>
+      <p:sp>
+        <p:nvSpPr>
+          <p:cNvPr id="3" name="Notes Placeholder 2"/>
+          <p:cNvSpPr>
+            <a:spLocks noGrp="1"/>
+          </p:cNvSpPr>
+          <p:nvPr>
+            <p:ph type="body" idx="3" sz="quarter"/>
+          </p:nvPr>
+        </p:nvSpPr>
+        <p:spPr/>
+        <p:txBody>
+          <a:bodyPr/>
+          <a:lstStyle/>
+          <a:p>
+            <a:r>
+              <a:t>Zweifaches Rollenspiel + Feedback. Die emotionale Dimension (Loslassen) adressieren, nicht wegargumentieren.</a:t>
+            </a:r>
+          </a:p>
+          <a:p>
+            <a:r>
+              <a:t>Handlungsempfehlungen: bei Inhaber 60+ ohne Nachfolge aktiv ansprechen; bei personenabhängigem Wert mehrjährige Übergabe mit Earn-out vorschlagen.</a:t>
             </a:r>
           </a:p>
         </p:txBody>
@@ -4639,7 +5049,7 @@
                 </a:solidFill>
                 <a:latin typeface="Arial"/>
               </a:rPr>
-              <a:t>Reflexionsfragen</a:t>
+              <a:t>Drei KMU-Korrekturen: das Ergebnis normalisieren</a:t>
             </a:r>
           </a:p>
         </p:txBody>
@@ -4665,6 +5075,25 @@
             <a:spAutoFit/>
           </a:bodyPr>
           <a:lstStyle/>
+          <a:p>
+            <a:pPr marL="177800" indent="-177800">
+              <a:spcBef>
+                <a:spcPts val="600"/>
+              </a:spcBef>
+              <a:spcAft>
+                <a:spcPts val="200"/>
+              </a:spcAft>
+            </a:pPr>
+            <a:r>
+              <a:rPr sz="1200" i="1">
+                <a:solidFill>
+                  <a:srgbClr val="3D5466"/>
+                </a:solidFill>
+                <a:latin typeface="Arial"/>
+              </a:rPr>
+              <a:t>→  Ein mittelständisches Ergebnis muss vor der Bewertung normalisiert werden – sonst bewertet man Verzerrungen.</a:t>
+            </a:r>
+          </a:p>
           <a:p>
             <a:pPr marL="190500" indent="-190500">
               <a:spcBef>
@@ -4681,7 +5110,7 @@
                 </a:solidFill>
                 <a:latin typeface="Arial"/>
               </a:rPr>
-              <a:t>▸  Bei welchem Ihrer Kunden haben Sie das Thema Nachfolge bisher gemieden – und warum?</a:t>
+              <a:t>▸  Kalkulatorischer Unternehmerlohn: marktübliches GF-Gehalt ansetzen.</a:t>
             </a:r>
           </a:p>
           <a:p>
@@ -4700,7 +5129,7 @@
                 </a:solidFill>
                 <a:latin typeface="Arial"/>
               </a:rPr>
-              <a:t>▸  Wie erklären Sie einem stolzen Inhaber, dass sein Betrieb am Markt weniger bringt als der „theoretische" Ertragswert, ohne ihn zu kränken?</a:t>
+              <a:t>▸  Nicht betriebsnotwendiges Vermögen: herausrechnen und separat zum Wert addieren.</a:t>
             </a:r>
           </a:p>
           <a:p>
@@ -4719,9 +5148,614 @@
                 </a:solidFill>
                 <a:latin typeface="Arial"/>
               </a:rPr>
-              <a:t>▸  Welcher Werthebel ist in personenabhängigen Betrieben am wirksamsten – und wie sprechen Sie ihn an?</a:t>
-            </a:r>
-          </a:p>
+              <a:t>▸  Außerordentliche und periodenfremde Effekte bereinigen.</a:t>
+            </a:r>
+          </a:p>
+        </p:txBody>
+      </p:sp>
+      <p:sp>
+        <p:nvSpPr>
+          <p:cNvPr id="9" name="Rectangle 8"/>
+          <p:cNvSpPr/>
+          <p:nvPr/>
+        </p:nvSpPr>
+        <p:spPr>
+          <a:xfrm>
+            <a:off x="0" y="6510528"/>
+            <a:ext cx="12188952" cy="347472"/>
+          </a:xfrm>
+          <a:prstGeom prst="rect">
+            <a:avLst/>
+          </a:prstGeom>
+          <a:solidFill>
+            <a:srgbClr val="0A1937"/>
+          </a:solidFill>
+          <a:ln>
+            <a:noFill/>
+          </a:ln>
+        </p:spPr>
+        <p:style>
+          <a:lnRef idx="1">
+            <a:schemeClr val="accent1"/>
+          </a:lnRef>
+          <a:fillRef idx="3">
+            <a:schemeClr val="accent1"/>
+          </a:fillRef>
+          <a:effectRef idx="2">
+            <a:schemeClr val="accent1"/>
+          </a:effectRef>
+          <a:fontRef idx="minor">
+            <a:schemeClr val="lt1"/>
+          </a:fontRef>
+        </p:style>
+        <p:txBody>
+          <a:bodyPr rtlCol="0" anchor="ctr"/>
+          <a:lstStyle/>
+          <a:p>
+            <a:pPr algn="ctr"/>
+          </a:p>
+        </p:txBody>
+      </p:sp>
+      <p:sp>
+        <p:nvSpPr>
+          <p:cNvPr id="10" name="TextBox 9"/>
+          <p:cNvSpPr txBox="1"/>
+          <p:nvPr/>
+        </p:nvSpPr>
+        <p:spPr>
+          <a:xfrm>
+            <a:off x="685800" y="6583680"/>
+            <a:ext cx="6490411" cy="256032"/>
+          </a:xfrm>
+          <a:prstGeom prst="rect">
+            <a:avLst/>
+          </a:prstGeom>
+          <a:noFill/>
+        </p:spPr>
+        <p:txBody>
+          <a:bodyPr wrap="none">
+            <a:spAutoFit/>
+          </a:bodyPr>
+          <a:lstStyle/>
+          <a:p>
+            <a:pPr algn="l"/>
+            <a:r>
+              <a:rPr sz="700">
+                <a:solidFill>
+                  <a:srgbClr val="A0B4D2"/>
+                </a:solidFill>
+                <a:latin typeface="Consolas"/>
+              </a:rPr>
+              <a:t>FKB Campus  ·  M24</a:t>
+            </a:r>
+          </a:p>
+        </p:txBody>
+      </p:sp>
+    </p:spTree>
+  </p:cSld>
+  <p:clrMapOvr>
+    <a:masterClrMapping/>
+  </p:clrMapOvr>
+</p:sld>
+</file>
+
+<file path=ppt/slides/slide11.xml><?xml version="1.0" encoding="utf-8"?>
+<p:sld xmlns:a="http://schemas.openxmlformats.org/drawingml/2006/main" xmlns:p="http://schemas.openxmlformats.org/presentationml/2006/main" xmlns:r="http://schemas.openxmlformats.org/officeDocument/2006/relationships">
+  <p:cSld>
+    <p:spTree>
+      <p:nvGrpSpPr>
+        <p:cNvPr id="1" name=""/>
+        <p:cNvGrpSpPr/>
+        <p:nvPr/>
+      </p:nvGrpSpPr>
+      <p:grpSpPr/>
+      <p:sp>
+        <p:nvSpPr>
+          <p:cNvPr id="2" name="Rectangle 1"/>
+          <p:cNvSpPr/>
+          <p:nvPr/>
+        </p:nvSpPr>
+        <p:spPr>
+          <a:xfrm>
+            <a:off x="0" y="0"/>
+            <a:ext cx="12188952" cy="6858000"/>
+          </a:xfrm>
+          <a:prstGeom prst="rect">
+            <a:avLst/>
+          </a:prstGeom>
+          <a:solidFill>
+            <a:srgbClr val="1F2C56"/>
+          </a:solidFill>
+          <a:ln>
+            <a:noFill/>
+          </a:ln>
+        </p:spPr>
+        <p:style>
+          <a:lnRef idx="1">
+            <a:schemeClr val="accent1"/>
+          </a:lnRef>
+          <a:fillRef idx="3">
+            <a:schemeClr val="accent1"/>
+          </a:fillRef>
+          <a:effectRef idx="2">
+            <a:schemeClr val="accent1"/>
+          </a:effectRef>
+          <a:fontRef idx="minor">
+            <a:schemeClr val="lt1"/>
+          </a:fontRef>
+        </p:style>
+        <p:txBody>
+          <a:bodyPr rtlCol="0" anchor="ctr"/>
+          <a:lstStyle/>
+          <a:p>
+            <a:pPr algn="ctr"/>
+          </a:p>
+        </p:txBody>
+      </p:sp>
+      <p:sp>
+        <p:nvSpPr>
+          <p:cNvPr id="3" name="TextBox 2"/>
+          <p:cNvSpPr txBox="1"/>
+          <p:nvPr/>
+        </p:nvSpPr>
+        <p:spPr>
+          <a:xfrm>
+            <a:off x="685800" y="2377440"/>
+            <a:ext cx="10817352" cy="365760"/>
+          </a:xfrm>
+          <a:prstGeom prst="rect">
+            <a:avLst/>
+          </a:prstGeom>
+          <a:noFill/>
+        </p:spPr>
+        <p:txBody>
+          <a:bodyPr wrap="none">
+            <a:spAutoFit/>
+          </a:bodyPr>
+          <a:lstStyle/>
+          <a:p>
+            <a:pPr algn="l"/>
+            <a:r>
+              <a:rPr sz="1200">
+                <a:solidFill>
+                  <a:srgbClr val="D9C089"/>
+                </a:solidFill>
+                <a:latin typeface="Consolas"/>
+              </a:rPr>
+              <a:t>10:15–12:30</a:t>
+            </a:r>
+          </a:p>
+        </p:txBody>
+      </p:sp>
+      <p:sp>
+        <p:nvSpPr>
+          <p:cNvPr id="4" name="Rectangle 3"/>
+          <p:cNvSpPr/>
+          <p:nvPr/>
+        </p:nvSpPr>
+        <p:spPr>
+          <a:xfrm>
+            <a:off x="685800" y="2788920"/>
+            <a:ext cx="548640" cy="38100"/>
+          </a:xfrm>
+          <a:prstGeom prst="rect">
+            <a:avLst/>
+          </a:prstGeom>
+          <a:solidFill>
+            <a:srgbClr val="D9C089"/>
+          </a:solidFill>
+          <a:ln>
+            <a:noFill/>
+          </a:ln>
+        </p:spPr>
+        <p:style>
+          <a:lnRef idx="1">
+            <a:schemeClr val="accent1"/>
+          </a:lnRef>
+          <a:fillRef idx="3">
+            <a:schemeClr val="accent1"/>
+          </a:fillRef>
+          <a:effectRef idx="2">
+            <a:schemeClr val="accent1"/>
+          </a:effectRef>
+          <a:fontRef idx="minor">
+            <a:schemeClr val="lt1"/>
+          </a:fontRef>
+        </p:style>
+        <p:txBody>
+          <a:bodyPr rtlCol="0" anchor="ctr"/>
+          <a:lstStyle/>
+          <a:p>
+            <a:pPr algn="ctr"/>
+          </a:p>
+        </p:txBody>
+      </p:sp>
+      <p:sp>
+        <p:nvSpPr>
+          <p:cNvPr id="5" name="TextBox 4"/>
+          <p:cNvSpPr txBox="1"/>
+          <p:nvPr/>
+        </p:nvSpPr>
+        <p:spPr>
+          <a:xfrm>
+            <a:off x="685800" y="3017520"/>
+            <a:ext cx="10817352" cy="1463040"/>
+          </a:xfrm>
+          <a:prstGeom prst="rect">
+            <a:avLst/>
+          </a:prstGeom>
+          <a:noFill/>
+        </p:spPr>
+        <p:txBody>
+          <a:bodyPr wrap="square">
+            <a:spAutoFit/>
+          </a:bodyPr>
+          <a:lstStyle/>
+          <a:p>
+            <a:pPr algn="l"/>
+            <a:r>
+              <a:rPr sz="4000" b="1" i="0">
+                <a:solidFill>
+                  <a:srgbClr val="FFFFFF"/>
+                </a:solidFill>
+                <a:latin typeface="Arial"/>
+              </a:rPr>
+              <a:t>Übung 1 &amp; 2: Wert ermitteln</a:t>
+            </a:r>
+          </a:p>
+        </p:txBody>
+      </p:sp>
+      <p:sp>
+        <p:nvSpPr>
+          <p:cNvPr id="6" name="TextBox 5"/>
+          <p:cNvSpPr txBox="1"/>
+          <p:nvPr/>
+        </p:nvSpPr>
+        <p:spPr>
+          <a:xfrm>
+            <a:off x="685800" y="4480560"/>
+            <a:ext cx="8653881" cy="1280160"/>
+          </a:xfrm>
+          <a:prstGeom prst="rect">
+            <a:avLst/>
+          </a:prstGeom>
+          <a:noFill/>
+        </p:spPr>
+        <p:txBody>
+          <a:bodyPr wrap="square">
+            <a:spAutoFit/>
+          </a:bodyPr>
+          <a:lstStyle/>
+          <a:p>
+            <a:pPr algn="l"/>
+            <a:r>
+              <a:rPr sz="1600" b="0" i="0">
+                <a:solidFill>
+                  <a:srgbClr val="C8D2E6"/>
+                </a:solidFill>
+                <a:latin typeface="Arial"/>
+              </a:rPr>
+              <a:t>KMU-Korrekturen anwenden und eine Wertbandbreite bilden.</a:t>
+            </a:r>
+          </a:p>
+        </p:txBody>
+      </p:sp>
+      <p:sp>
+        <p:nvSpPr>
+          <p:cNvPr id="7" name="TextBox 6"/>
+          <p:cNvSpPr txBox="1"/>
+          <p:nvPr/>
+        </p:nvSpPr>
+        <p:spPr>
+          <a:xfrm>
+            <a:off x="685800" y="6355080"/>
+            <a:ext cx="10817352" cy="274320"/>
+          </a:xfrm>
+          <a:prstGeom prst="rect">
+            <a:avLst/>
+          </a:prstGeom>
+          <a:noFill/>
+        </p:spPr>
+        <p:txBody>
+          <a:bodyPr wrap="none">
+            <a:spAutoFit/>
+          </a:bodyPr>
+          <a:lstStyle/>
+          <a:p>
+            <a:pPr algn="l"/>
+            <a:r>
+              <a:rPr sz="700">
+                <a:solidFill>
+                  <a:srgbClr val="8CA0C3"/>
+                </a:solidFill>
+                <a:latin typeface="Consolas"/>
+              </a:rPr>
+              <a:t>FKB Campus  ·  M24</a:t>
+            </a:r>
+          </a:p>
+        </p:txBody>
+      </p:sp>
+    </p:spTree>
+  </p:cSld>
+  <p:clrMapOvr>
+    <a:masterClrMapping/>
+  </p:clrMapOvr>
+</p:sld>
+</file>
+
+<file path=ppt/slides/slide12.xml><?xml version="1.0" encoding="utf-8"?>
+<p:sld xmlns:a="http://schemas.openxmlformats.org/drawingml/2006/main" xmlns:p="http://schemas.openxmlformats.org/presentationml/2006/main" xmlns:r="http://schemas.openxmlformats.org/officeDocument/2006/relationships">
+  <p:cSld>
+    <p:spTree>
+      <p:nvGrpSpPr>
+        <p:cNvPr id="1" name=""/>
+        <p:cNvGrpSpPr/>
+        <p:nvPr/>
+      </p:nvGrpSpPr>
+      <p:grpSpPr/>
+      <p:sp>
+        <p:nvSpPr>
+          <p:cNvPr id="2" name="Rectangle 1"/>
+          <p:cNvSpPr/>
+          <p:nvPr/>
+        </p:nvSpPr>
+        <p:spPr>
+          <a:xfrm>
+            <a:off x="0" y="0"/>
+            <a:ext cx="12188952" cy="6858000"/>
+          </a:xfrm>
+          <a:prstGeom prst="rect">
+            <a:avLst/>
+          </a:prstGeom>
+          <a:solidFill>
+            <a:srgbClr val="EDEDF3"/>
+          </a:solidFill>
+          <a:ln>
+            <a:noFill/>
+          </a:ln>
+        </p:spPr>
+        <p:style>
+          <a:lnRef idx="1">
+            <a:schemeClr val="accent1"/>
+          </a:lnRef>
+          <a:fillRef idx="3">
+            <a:schemeClr val="accent1"/>
+          </a:fillRef>
+          <a:effectRef idx="2">
+            <a:schemeClr val="accent1"/>
+          </a:effectRef>
+          <a:fontRef idx="minor">
+            <a:schemeClr val="lt1"/>
+          </a:fontRef>
+        </p:style>
+        <p:txBody>
+          <a:bodyPr rtlCol="0" anchor="ctr"/>
+          <a:lstStyle/>
+          <a:p>
+            <a:pPr algn="ctr"/>
+          </a:p>
+        </p:txBody>
+      </p:sp>
+      <p:sp>
+        <p:nvSpPr>
+          <p:cNvPr id="3" name="Rectangle 2"/>
+          <p:cNvSpPr/>
+          <p:nvPr/>
+        </p:nvSpPr>
+        <p:spPr>
+          <a:xfrm>
+            <a:off x="0" y="0"/>
+            <a:ext cx="12188952" cy="50292"/>
+          </a:xfrm>
+          <a:prstGeom prst="rect">
+            <a:avLst/>
+          </a:prstGeom>
+          <a:solidFill>
+            <a:srgbClr val="1F2C56"/>
+          </a:solidFill>
+          <a:ln>
+            <a:noFill/>
+          </a:ln>
+        </p:spPr>
+        <p:style>
+          <a:lnRef idx="1">
+            <a:schemeClr val="accent1"/>
+          </a:lnRef>
+          <a:fillRef idx="3">
+            <a:schemeClr val="accent1"/>
+          </a:fillRef>
+          <a:effectRef idx="2">
+            <a:schemeClr val="accent1"/>
+          </a:effectRef>
+          <a:fontRef idx="minor">
+            <a:schemeClr val="lt1"/>
+          </a:fontRef>
+        </p:style>
+        <p:txBody>
+          <a:bodyPr rtlCol="0" anchor="ctr"/>
+          <a:lstStyle/>
+          <a:p>
+            <a:pPr algn="ctr"/>
+          </a:p>
+        </p:txBody>
+      </p:sp>
+      <p:sp>
+        <p:nvSpPr>
+          <p:cNvPr id="4" name="TextBox 3"/>
+          <p:cNvSpPr txBox="1"/>
+          <p:nvPr/>
+        </p:nvSpPr>
+        <p:spPr>
+          <a:xfrm>
+            <a:off x="685800" y="109728"/>
+            <a:ext cx="10817352" cy="228600"/>
+          </a:xfrm>
+          <a:prstGeom prst="rect">
+            <a:avLst/>
+          </a:prstGeom>
+          <a:noFill/>
+        </p:spPr>
+        <p:txBody>
+          <a:bodyPr wrap="none">
+            <a:spAutoFit/>
+          </a:bodyPr>
+          <a:lstStyle/>
+          <a:p>
+            <a:pPr algn="l"/>
+            <a:r>
+              <a:rPr sz="750">
+                <a:solidFill>
+                  <a:srgbClr val="78808C"/>
+                </a:solidFill>
+                <a:latin typeface="Consolas"/>
+              </a:rPr>
+              <a:t>M24  ·  ARBEITSBLATT</a:t>
+            </a:r>
+          </a:p>
+        </p:txBody>
+      </p:sp>
+      <p:sp>
+        <p:nvSpPr>
+          <p:cNvPr id="5" name="Rectangle 4"/>
+          <p:cNvSpPr/>
+          <p:nvPr/>
+        </p:nvSpPr>
+        <p:spPr>
+          <a:xfrm>
+            <a:off x="0" y="1234440"/>
+            <a:ext cx="12188952" cy="12700"/>
+          </a:xfrm>
+          <a:prstGeom prst="rect">
+            <a:avLst/>
+          </a:prstGeom>
+          <a:solidFill>
+            <a:srgbClr val="D8DFE4"/>
+          </a:solidFill>
+          <a:ln>
+            <a:noFill/>
+          </a:ln>
+        </p:spPr>
+        <p:style>
+          <a:lnRef idx="1">
+            <a:schemeClr val="accent1"/>
+          </a:lnRef>
+          <a:fillRef idx="3">
+            <a:schemeClr val="accent1"/>
+          </a:fillRef>
+          <a:effectRef idx="2">
+            <a:schemeClr val="accent1"/>
+          </a:effectRef>
+          <a:fontRef idx="minor">
+            <a:schemeClr val="lt1"/>
+          </a:fontRef>
+        </p:style>
+        <p:txBody>
+          <a:bodyPr rtlCol="0" anchor="ctr"/>
+          <a:lstStyle/>
+          <a:p>
+            <a:pPr algn="ctr"/>
+          </a:p>
+        </p:txBody>
+      </p:sp>
+      <p:sp>
+        <p:nvSpPr>
+          <p:cNvPr id="6" name="Rectangle 5"/>
+          <p:cNvSpPr/>
+          <p:nvPr/>
+        </p:nvSpPr>
+        <p:spPr>
+          <a:xfrm>
+            <a:off x="685800" y="502920"/>
+            <a:ext cx="36576" cy="658368"/>
+          </a:xfrm>
+          <a:prstGeom prst="rect">
+            <a:avLst/>
+          </a:prstGeom>
+          <a:solidFill>
+            <a:srgbClr val="D9C089"/>
+          </a:solidFill>
+          <a:ln>
+            <a:noFill/>
+          </a:ln>
+        </p:spPr>
+        <p:style>
+          <a:lnRef idx="1">
+            <a:schemeClr val="accent1"/>
+          </a:lnRef>
+          <a:fillRef idx="3">
+            <a:schemeClr val="accent1"/>
+          </a:fillRef>
+          <a:effectRef idx="2">
+            <a:schemeClr val="accent1"/>
+          </a:effectRef>
+          <a:fontRef idx="minor">
+            <a:schemeClr val="lt1"/>
+          </a:fontRef>
+        </p:style>
+        <p:txBody>
+          <a:bodyPr rtlCol="0" anchor="ctr"/>
+          <a:lstStyle/>
+          <a:p>
+            <a:pPr algn="ctr"/>
+          </a:p>
+        </p:txBody>
+      </p:sp>
+      <p:sp>
+        <p:nvSpPr>
+          <p:cNvPr id="7" name="TextBox 6"/>
+          <p:cNvSpPr txBox="1"/>
+          <p:nvPr/>
+        </p:nvSpPr>
+        <p:spPr>
+          <a:xfrm>
+            <a:off x="813816" y="502920"/>
+            <a:ext cx="10634472" cy="685800"/>
+          </a:xfrm>
+          <a:prstGeom prst="rect">
+            <a:avLst/>
+          </a:prstGeom>
+          <a:noFill/>
+        </p:spPr>
+        <p:txBody>
+          <a:bodyPr wrap="square">
+            <a:spAutoFit/>
+          </a:bodyPr>
+          <a:lstStyle/>
+          <a:p>
+            <a:pPr algn="l"/>
+            <a:r>
+              <a:rPr sz="2400" b="1" i="0">
+                <a:solidFill>
+                  <a:srgbClr val="1F2C56"/>
+                </a:solidFill>
+                <a:latin typeface="Arial"/>
+              </a:rPr>
+              <a:t>Wert ermitteln und Bandbreite bilden</a:t>
+            </a:r>
+          </a:p>
+        </p:txBody>
+      </p:sp>
+      <p:sp>
+        <p:nvSpPr>
+          <p:cNvPr id="8" name="TextBox 7"/>
+          <p:cNvSpPr txBox="1"/>
+          <p:nvPr/>
+        </p:nvSpPr>
+        <p:spPr>
+          <a:xfrm>
+            <a:off x="685800" y="1554480"/>
+            <a:ext cx="10817352" cy="3840480"/>
+          </a:xfrm>
+          <a:prstGeom prst="rect">
+            <a:avLst/>
+          </a:prstGeom>
+          <a:noFill/>
+        </p:spPr>
+        <p:txBody>
+          <a:bodyPr wrap="square">
+            <a:spAutoFit/>
+          </a:bodyPr>
+          <a:lstStyle/>
           <a:p>
             <a:pPr marL="190500" indent="-190500">
               <a:spcBef>
@@ -4732,13 +5766,2780 @@
               </a:spcAft>
             </a:pPr>
             <a:r>
+              <a:rPr sz="1400">
+                <a:solidFill>
+                  <a:srgbClr val="3D5466"/>
+                </a:solidFill>
+                <a:latin typeface="Arial"/>
+              </a:rPr>
+              <a:t>▸  Arbeiten Sie die KMU-Korrekturen für die Präzisionstechnik Musterregion heraus (AB-1).</a:t>
+            </a:r>
+          </a:p>
+          <a:p>
+            <a:pPr marL="190500" indent="-190500">
+              <a:spcBef>
+                <a:spcPts val="400"/>
+              </a:spcBef>
+              <a:spcAft>
+                <a:spcPts val="200"/>
+              </a:spcAft>
+            </a:pPr>
+            <a:r>
+              <a:rPr sz="1400">
+                <a:solidFill>
+                  <a:srgbClr val="3D5466"/>
+                </a:solidFill>
+                <a:latin typeface="Arial"/>
+              </a:rPr>
+              <a:t>▸  Ermitteln Sie den Wert mit Ertragswert und Multiple und bilden Sie eine Bandbreite (AB-2).</a:t>
+            </a:r>
+          </a:p>
+          <a:p>
+            <a:pPr marL="190500" indent="-190500">
+              <a:spcBef>
+                <a:spcPts val="400"/>
+              </a:spcBef>
+              <a:spcAft>
+                <a:spcPts val="200"/>
+              </a:spcAft>
+            </a:pPr>
+            <a:r>
+              <a:rPr sz="1400">
+                <a:solidFill>
+                  <a:srgbClr val="3D5466"/>
+                </a:solidFill>
+                <a:latin typeface="Arial"/>
+              </a:rPr>
+              <a:t>▸  Formulieren Sie die Bandbreite so, wie Sie sie dem Inhaber kommunizieren würden.</a:t>
+            </a:r>
+          </a:p>
+        </p:txBody>
+      </p:sp>
+      <p:sp>
+        <p:nvSpPr>
+          <p:cNvPr id="9" name="Rectangle 8"/>
+          <p:cNvSpPr/>
+          <p:nvPr/>
+        </p:nvSpPr>
+        <p:spPr>
+          <a:xfrm>
+            <a:off x="685800" y="5486400"/>
+            <a:ext cx="10817352" cy="640080"/>
+          </a:xfrm>
+          <a:prstGeom prst="rect">
+            <a:avLst/>
+          </a:prstGeom>
+          <a:solidFill>
+            <a:srgbClr val="1F2C56"/>
+          </a:solidFill>
+          <a:ln>
+            <a:noFill/>
+          </a:ln>
+        </p:spPr>
+        <p:style>
+          <a:lnRef idx="1">
+            <a:schemeClr val="accent1"/>
+          </a:lnRef>
+          <a:fillRef idx="3">
+            <a:schemeClr val="accent1"/>
+          </a:fillRef>
+          <a:effectRef idx="2">
+            <a:schemeClr val="accent1"/>
+          </a:effectRef>
+          <a:fontRef idx="minor">
+            <a:schemeClr val="lt1"/>
+          </a:fontRef>
+        </p:style>
+        <p:txBody>
+          <a:bodyPr rtlCol="0" anchor="ctr"/>
+          <a:lstStyle/>
+          <a:p>
+            <a:pPr algn="ctr"/>
+          </a:p>
+        </p:txBody>
+      </p:sp>
+      <p:sp>
+        <p:nvSpPr>
+          <p:cNvPr id="10" name="TextBox 9"/>
+          <p:cNvSpPr txBox="1"/>
+          <p:nvPr/>
+        </p:nvSpPr>
+        <p:spPr>
+          <a:xfrm>
+            <a:off x="868680" y="5596128"/>
+            <a:ext cx="10451592" cy="457200"/>
+          </a:xfrm>
+          <a:prstGeom prst="rect">
+            <a:avLst/>
+          </a:prstGeom>
+          <a:noFill/>
+        </p:spPr>
+        <p:txBody>
+          <a:bodyPr wrap="square">
+            <a:spAutoFit/>
+          </a:bodyPr>
+          <a:lstStyle/>
+          <a:p>
+            <a:pPr algn="l"/>
+            <a:r>
+              <a:rPr sz="1300" b="1" i="0">
+                <a:solidFill>
+                  <a:srgbClr val="FFFFFF"/>
+                </a:solidFill>
+                <a:latin typeface="Arial"/>
+              </a:rPr>
+              <a:t>→  Bearbeitung im Teilnehmer-Workbook (Arbeitsblatt mit Ausfüllfeldern)</a:t>
+            </a:r>
+          </a:p>
+        </p:txBody>
+      </p:sp>
+      <p:sp>
+        <p:nvSpPr>
+          <p:cNvPr id="11" name="Rectangle 10"/>
+          <p:cNvSpPr/>
+          <p:nvPr/>
+        </p:nvSpPr>
+        <p:spPr>
+          <a:xfrm>
+            <a:off x="0" y="6510528"/>
+            <a:ext cx="12188952" cy="347472"/>
+          </a:xfrm>
+          <a:prstGeom prst="rect">
+            <a:avLst/>
+          </a:prstGeom>
+          <a:solidFill>
+            <a:srgbClr val="0A1937"/>
+          </a:solidFill>
+          <a:ln>
+            <a:noFill/>
+          </a:ln>
+        </p:spPr>
+        <p:style>
+          <a:lnRef idx="1">
+            <a:schemeClr val="accent1"/>
+          </a:lnRef>
+          <a:fillRef idx="3">
+            <a:schemeClr val="accent1"/>
+          </a:fillRef>
+          <a:effectRef idx="2">
+            <a:schemeClr val="accent1"/>
+          </a:effectRef>
+          <a:fontRef idx="minor">
+            <a:schemeClr val="lt1"/>
+          </a:fontRef>
+        </p:style>
+        <p:txBody>
+          <a:bodyPr rtlCol="0" anchor="ctr"/>
+          <a:lstStyle/>
+          <a:p>
+            <a:pPr algn="ctr"/>
+          </a:p>
+        </p:txBody>
+      </p:sp>
+      <p:sp>
+        <p:nvSpPr>
+          <p:cNvPr id="12" name="TextBox 11"/>
+          <p:cNvSpPr txBox="1"/>
+          <p:nvPr/>
+        </p:nvSpPr>
+        <p:spPr>
+          <a:xfrm>
+            <a:off x="685800" y="6583680"/>
+            <a:ext cx="6490411" cy="256032"/>
+          </a:xfrm>
+          <a:prstGeom prst="rect">
+            <a:avLst/>
+          </a:prstGeom>
+          <a:noFill/>
+        </p:spPr>
+        <p:txBody>
+          <a:bodyPr wrap="none">
+            <a:spAutoFit/>
+          </a:bodyPr>
+          <a:lstStyle/>
+          <a:p>
+            <a:pPr algn="l"/>
+            <a:r>
+              <a:rPr sz="700">
+                <a:solidFill>
+                  <a:srgbClr val="A0B4D2"/>
+                </a:solidFill>
+                <a:latin typeface="Consolas"/>
+              </a:rPr>
+              <a:t>FKB Campus  ·  M24</a:t>
+            </a:r>
+          </a:p>
+        </p:txBody>
+      </p:sp>
+    </p:spTree>
+  </p:cSld>
+  <p:clrMapOvr>
+    <a:masterClrMapping/>
+  </p:clrMapOvr>
+</p:sld>
+</file>
+
+<file path=ppt/slides/slide13.xml><?xml version="1.0" encoding="utf-8"?>
+<p:sld xmlns:a="http://schemas.openxmlformats.org/drawingml/2006/main" xmlns:p="http://schemas.openxmlformats.org/presentationml/2006/main" xmlns:r="http://schemas.openxmlformats.org/officeDocument/2006/relationships">
+  <p:cSld>
+    <p:spTree>
+      <p:nvGrpSpPr>
+        <p:cNvPr id="1" name=""/>
+        <p:cNvGrpSpPr/>
+        <p:nvPr/>
+      </p:nvGrpSpPr>
+      <p:grpSpPr/>
+      <p:sp>
+        <p:nvSpPr>
+          <p:cNvPr id="2" name="Rectangle 1"/>
+          <p:cNvSpPr/>
+          <p:nvPr/>
+        </p:nvSpPr>
+        <p:spPr>
+          <a:xfrm>
+            <a:off x="0" y="0"/>
+            <a:ext cx="12188952" cy="6858000"/>
+          </a:xfrm>
+          <a:prstGeom prst="rect">
+            <a:avLst/>
+          </a:prstGeom>
+          <a:solidFill>
+            <a:srgbClr val="1F2C56"/>
+          </a:solidFill>
+          <a:ln>
+            <a:noFill/>
+          </a:ln>
+        </p:spPr>
+        <p:style>
+          <a:lnRef idx="1">
+            <a:schemeClr val="accent1"/>
+          </a:lnRef>
+          <a:fillRef idx="3">
+            <a:schemeClr val="accent1"/>
+          </a:fillRef>
+          <a:effectRef idx="2">
+            <a:schemeClr val="accent1"/>
+          </a:effectRef>
+          <a:fontRef idx="minor">
+            <a:schemeClr val="lt1"/>
+          </a:fontRef>
+        </p:style>
+        <p:txBody>
+          <a:bodyPr rtlCol="0" anchor="ctr"/>
+          <a:lstStyle/>
+          <a:p>
+            <a:pPr algn="ctr"/>
+          </a:p>
+        </p:txBody>
+      </p:sp>
+      <p:sp>
+        <p:nvSpPr>
+          <p:cNvPr id="3" name="TextBox 2"/>
+          <p:cNvSpPr txBox="1"/>
+          <p:nvPr/>
+        </p:nvSpPr>
+        <p:spPr>
+          <a:xfrm>
+            <a:off x="685800" y="2377440"/>
+            <a:ext cx="10817352" cy="365760"/>
+          </a:xfrm>
+          <a:prstGeom prst="rect">
+            <a:avLst/>
+          </a:prstGeom>
+          <a:noFill/>
+        </p:spPr>
+        <p:txBody>
+          <a:bodyPr wrap="none">
+            <a:spAutoFit/>
+          </a:bodyPr>
+          <a:lstStyle/>
+          <a:p>
+            <a:pPr algn="l"/>
+            <a:r>
+              <a:rPr sz="1200">
+                <a:solidFill>
+                  <a:srgbClr val="D9C089"/>
+                </a:solidFill>
+                <a:latin typeface="Consolas"/>
+              </a:rPr>
+              <a:t>13:30–15:00</a:t>
+            </a:r>
+          </a:p>
+        </p:txBody>
+      </p:sp>
+      <p:sp>
+        <p:nvSpPr>
+          <p:cNvPr id="4" name="Rectangle 3"/>
+          <p:cNvSpPr/>
+          <p:nvPr/>
+        </p:nvSpPr>
+        <p:spPr>
+          <a:xfrm>
+            <a:off x="685800" y="2788920"/>
+            <a:ext cx="548640" cy="38100"/>
+          </a:xfrm>
+          <a:prstGeom prst="rect">
+            <a:avLst/>
+          </a:prstGeom>
+          <a:solidFill>
+            <a:srgbClr val="D9C089"/>
+          </a:solidFill>
+          <a:ln>
+            <a:noFill/>
+          </a:ln>
+        </p:spPr>
+        <p:style>
+          <a:lnRef idx="1">
+            <a:schemeClr val="accent1"/>
+          </a:lnRef>
+          <a:fillRef idx="3">
+            <a:schemeClr val="accent1"/>
+          </a:fillRef>
+          <a:effectRef idx="2">
+            <a:schemeClr val="accent1"/>
+          </a:effectRef>
+          <a:fontRef idx="minor">
+            <a:schemeClr val="lt1"/>
+          </a:fontRef>
+        </p:style>
+        <p:txBody>
+          <a:bodyPr rtlCol="0" anchor="ctr"/>
+          <a:lstStyle/>
+          <a:p>
+            <a:pPr algn="ctr"/>
+          </a:p>
+        </p:txBody>
+      </p:sp>
+      <p:sp>
+        <p:nvSpPr>
+          <p:cNvPr id="5" name="TextBox 4"/>
+          <p:cNvSpPr txBox="1"/>
+          <p:nvPr/>
+        </p:nvSpPr>
+        <p:spPr>
+          <a:xfrm>
+            <a:off x="685800" y="3017520"/>
+            <a:ext cx="10817352" cy="1463040"/>
+          </a:xfrm>
+          <a:prstGeom prst="rect">
+            <a:avLst/>
+          </a:prstGeom>
+          <a:noFill/>
+        </p:spPr>
+        <p:txBody>
+          <a:bodyPr wrap="square">
+            <a:spAutoFit/>
+          </a:bodyPr>
+          <a:lstStyle/>
+          <a:p>
+            <a:pPr algn="l"/>
+            <a:r>
+              <a:rPr sz="4000" b="1" i="0">
+                <a:solidFill>
+                  <a:srgbClr val="FFFFFF"/>
+                </a:solidFill>
+                <a:latin typeface="Arial"/>
+              </a:rPr>
+              <a:t>Input 2 &amp; Übung 3: Übergabe</a:t>
+            </a:r>
+          </a:p>
+        </p:txBody>
+      </p:sp>
+      <p:sp>
+        <p:nvSpPr>
+          <p:cNvPr id="6" name="TextBox 5"/>
+          <p:cNvSpPr txBox="1"/>
+          <p:nvPr/>
+        </p:nvSpPr>
+        <p:spPr>
+          <a:xfrm>
+            <a:off x="685800" y="4480560"/>
+            <a:ext cx="8653881" cy="1280160"/>
+          </a:xfrm>
+          <a:prstGeom prst="rect">
+            <a:avLst/>
+          </a:prstGeom>
+          <a:noFill/>
+        </p:spPr>
+        <p:txBody>
+          <a:bodyPr wrap="square">
+            <a:spAutoFit/>
+          </a:bodyPr>
+          <a:lstStyle/>
+          <a:p>
+            <a:pPr algn="l"/>
+            <a:r>
+              <a:rPr sz="1600" b="0" i="0">
+                <a:solidFill>
+                  <a:srgbClr val="C8D2E6"/>
+                </a:solidFill>
+                <a:latin typeface="Arial"/>
+              </a:rPr>
+              <a:t>Den Verkaufs- und Übergabeprozess kennen und Optionen abwägen.</a:t>
+            </a:r>
+          </a:p>
+        </p:txBody>
+      </p:sp>
+      <p:sp>
+        <p:nvSpPr>
+          <p:cNvPr id="7" name="TextBox 6"/>
+          <p:cNvSpPr txBox="1"/>
+          <p:nvPr/>
+        </p:nvSpPr>
+        <p:spPr>
+          <a:xfrm>
+            <a:off x="685800" y="6355080"/>
+            <a:ext cx="10817352" cy="274320"/>
+          </a:xfrm>
+          <a:prstGeom prst="rect">
+            <a:avLst/>
+          </a:prstGeom>
+          <a:noFill/>
+        </p:spPr>
+        <p:txBody>
+          <a:bodyPr wrap="none">
+            <a:spAutoFit/>
+          </a:bodyPr>
+          <a:lstStyle/>
+          <a:p>
+            <a:pPr algn="l"/>
+            <a:r>
+              <a:rPr sz="700">
+                <a:solidFill>
+                  <a:srgbClr val="8CA0C3"/>
+                </a:solidFill>
+                <a:latin typeface="Consolas"/>
+              </a:rPr>
+              <a:t>FKB Campus  ·  M24</a:t>
+            </a:r>
+          </a:p>
+        </p:txBody>
+      </p:sp>
+    </p:spTree>
+  </p:cSld>
+  <p:clrMapOvr>
+    <a:masterClrMapping/>
+  </p:clrMapOvr>
+</p:sld>
+</file>
+
+<file path=ppt/slides/slide14.xml><?xml version="1.0" encoding="utf-8"?>
+<p:sld xmlns:a="http://schemas.openxmlformats.org/drawingml/2006/main" xmlns:p="http://schemas.openxmlformats.org/presentationml/2006/main" xmlns:r="http://schemas.openxmlformats.org/officeDocument/2006/relationships">
+  <p:cSld>
+    <p:spTree>
+      <p:nvGrpSpPr>
+        <p:cNvPr id="1" name=""/>
+        <p:cNvGrpSpPr/>
+        <p:nvPr/>
+      </p:nvGrpSpPr>
+      <p:grpSpPr/>
+      <p:sp>
+        <p:nvSpPr>
+          <p:cNvPr id="2" name="Rectangle 1"/>
+          <p:cNvSpPr/>
+          <p:nvPr/>
+        </p:nvSpPr>
+        <p:spPr>
+          <a:xfrm>
+            <a:off x="0" y="0"/>
+            <a:ext cx="12188952" cy="6858000"/>
+          </a:xfrm>
+          <a:prstGeom prst="rect">
+            <a:avLst/>
+          </a:prstGeom>
+          <a:solidFill>
+            <a:srgbClr val="EDEDF3"/>
+          </a:solidFill>
+          <a:ln>
+            <a:noFill/>
+          </a:ln>
+        </p:spPr>
+        <p:style>
+          <a:lnRef idx="1">
+            <a:schemeClr val="accent1"/>
+          </a:lnRef>
+          <a:fillRef idx="3">
+            <a:schemeClr val="accent1"/>
+          </a:fillRef>
+          <a:effectRef idx="2">
+            <a:schemeClr val="accent1"/>
+          </a:effectRef>
+          <a:fontRef idx="minor">
+            <a:schemeClr val="lt1"/>
+          </a:fontRef>
+        </p:style>
+        <p:txBody>
+          <a:bodyPr rtlCol="0" anchor="ctr"/>
+          <a:lstStyle/>
+          <a:p>
+            <a:pPr algn="ctr"/>
+          </a:p>
+        </p:txBody>
+      </p:sp>
+      <p:sp>
+        <p:nvSpPr>
+          <p:cNvPr id="3" name="Rectangle 2"/>
+          <p:cNvSpPr/>
+          <p:nvPr/>
+        </p:nvSpPr>
+        <p:spPr>
+          <a:xfrm>
+            <a:off x="0" y="0"/>
+            <a:ext cx="12188952" cy="50292"/>
+          </a:xfrm>
+          <a:prstGeom prst="rect">
+            <a:avLst/>
+          </a:prstGeom>
+          <a:solidFill>
+            <a:srgbClr val="1F2C56"/>
+          </a:solidFill>
+          <a:ln>
+            <a:noFill/>
+          </a:ln>
+        </p:spPr>
+        <p:style>
+          <a:lnRef idx="1">
+            <a:schemeClr val="accent1"/>
+          </a:lnRef>
+          <a:fillRef idx="3">
+            <a:schemeClr val="accent1"/>
+          </a:fillRef>
+          <a:effectRef idx="2">
+            <a:schemeClr val="accent1"/>
+          </a:effectRef>
+          <a:fontRef idx="minor">
+            <a:schemeClr val="lt1"/>
+          </a:fontRef>
+        </p:style>
+        <p:txBody>
+          <a:bodyPr rtlCol="0" anchor="ctr"/>
+          <a:lstStyle/>
+          <a:p>
+            <a:pPr algn="ctr"/>
+          </a:p>
+        </p:txBody>
+      </p:sp>
+      <p:sp>
+        <p:nvSpPr>
+          <p:cNvPr id="4" name="TextBox 3"/>
+          <p:cNvSpPr txBox="1"/>
+          <p:nvPr/>
+        </p:nvSpPr>
+        <p:spPr>
+          <a:xfrm>
+            <a:off x="685800" y="109728"/>
+            <a:ext cx="10817352" cy="228600"/>
+          </a:xfrm>
+          <a:prstGeom prst="rect">
+            <a:avLst/>
+          </a:prstGeom>
+          <a:noFill/>
+        </p:spPr>
+        <p:txBody>
+          <a:bodyPr wrap="none">
+            <a:spAutoFit/>
+          </a:bodyPr>
+          <a:lstStyle/>
+          <a:p>
+            <a:pPr algn="l"/>
+            <a:r>
+              <a:rPr sz="750">
+                <a:solidFill>
+                  <a:srgbClr val="78808C"/>
+                </a:solidFill>
+                <a:latin typeface="Consolas"/>
+              </a:rPr>
+              <a:t>M24  ·  INHALT</a:t>
+            </a:r>
+          </a:p>
+        </p:txBody>
+      </p:sp>
+      <p:sp>
+        <p:nvSpPr>
+          <p:cNvPr id="5" name="Rectangle 4"/>
+          <p:cNvSpPr/>
+          <p:nvPr/>
+        </p:nvSpPr>
+        <p:spPr>
+          <a:xfrm>
+            <a:off x="0" y="1234440"/>
+            <a:ext cx="12188952" cy="12700"/>
+          </a:xfrm>
+          <a:prstGeom prst="rect">
+            <a:avLst/>
+          </a:prstGeom>
+          <a:solidFill>
+            <a:srgbClr val="D8DFE4"/>
+          </a:solidFill>
+          <a:ln>
+            <a:noFill/>
+          </a:ln>
+        </p:spPr>
+        <p:style>
+          <a:lnRef idx="1">
+            <a:schemeClr val="accent1"/>
+          </a:lnRef>
+          <a:fillRef idx="3">
+            <a:schemeClr val="accent1"/>
+          </a:fillRef>
+          <a:effectRef idx="2">
+            <a:schemeClr val="accent1"/>
+          </a:effectRef>
+          <a:fontRef idx="minor">
+            <a:schemeClr val="lt1"/>
+          </a:fontRef>
+        </p:style>
+        <p:txBody>
+          <a:bodyPr rtlCol="0" anchor="ctr"/>
+          <a:lstStyle/>
+          <a:p>
+            <a:pPr algn="ctr"/>
+          </a:p>
+        </p:txBody>
+      </p:sp>
+      <p:sp>
+        <p:nvSpPr>
+          <p:cNvPr id="6" name="Rectangle 5"/>
+          <p:cNvSpPr/>
+          <p:nvPr/>
+        </p:nvSpPr>
+        <p:spPr>
+          <a:xfrm>
+            <a:off x="685800" y="502920"/>
+            <a:ext cx="36576" cy="658368"/>
+          </a:xfrm>
+          <a:prstGeom prst="rect">
+            <a:avLst/>
+          </a:prstGeom>
+          <a:solidFill>
+            <a:srgbClr val="D9C089"/>
+          </a:solidFill>
+          <a:ln>
+            <a:noFill/>
+          </a:ln>
+        </p:spPr>
+        <p:style>
+          <a:lnRef idx="1">
+            <a:schemeClr val="accent1"/>
+          </a:lnRef>
+          <a:fillRef idx="3">
+            <a:schemeClr val="accent1"/>
+          </a:fillRef>
+          <a:effectRef idx="2">
+            <a:schemeClr val="accent1"/>
+          </a:effectRef>
+          <a:fontRef idx="minor">
+            <a:schemeClr val="lt1"/>
+          </a:fontRef>
+        </p:style>
+        <p:txBody>
+          <a:bodyPr rtlCol="0" anchor="ctr"/>
+          <a:lstStyle/>
+          <a:p>
+            <a:pPr algn="ctr"/>
+          </a:p>
+        </p:txBody>
+      </p:sp>
+      <p:sp>
+        <p:nvSpPr>
+          <p:cNvPr id="7" name="TextBox 6"/>
+          <p:cNvSpPr txBox="1"/>
+          <p:nvPr/>
+        </p:nvSpPr>
+        <p:spPr>
+          <a:xfrm>
+            <a:off x="813816" y="502920"/>
+            <a:ext cx="10634472" cy="685800"/>
+          </a:xfrm>
+          <a:prstGeom prst="rect">
+            <a:avLst/>
+          </a:prstGeom>
+          <a:noFill/>
+        </p:spPr>
+        <p:txBody>
+          <a:bodyPr wrap="square">
+            <a:spAutoFit/>
+          </a:bodyPr>
+          <a:lstStyle/>
+          <a:p>
+            <a:pPr algn="l"/>
+            <a:r>
+              <a:rPr sz="2400" b="1" i="0">
+                <a:solidFill>
+                  <a:srgbClr val="1F2C56"/>
+                </a:solidFill>
+                <a:latin typeface="Arial"/>
+              </a:rPr>
+              <a:t>Verkaufs- und Übergabeprozess</a:t>
+            </a:r>
+          </a:p>
+        </p:txBody>
+      </p:sp>
+      <p:sp>
+        <p:nvSpPr>
+          <p:cNvPr id="8" name="TextBox 7"/>
+          <p:cNvSpPr txBox="1"/>
+          <p:nvPr/>
+        </p:nvSpPr>
+        <p:spPr>
+          <a:xfrm>
+            <a:off x="685800" y="1417320"/>
+            <a:ext cx="10817352" cy="4892040"/>
+          </a:xfrm>
+          <a:prstGeom prst="rect">
+            <a:avLst/>
+          </a:prstGeom>
+          <a:noFill/>
+        </p:spPr>
+        <p:txBody>
+          <a:bodyPr wrap="square" anchor="ctr">
+            <a:spAutoFit/>
+          </a:bodyPr>
+          <a:lstStyle/>
+          <a:p>
+            <a:pPr marL="177800" indent="-177800">
+              <a:spcBef>
+                <a:spcPts val="600"/>
+              </a:spcBef>
+              <a:spcAft>
+                <a:spcPts val="200"/>
+              </a:spcAft>
+            </a:pPr>
+            <a:r>
+              <a:rPr sz="1200" i="1">
+                <a:solidFill>
+                  <a:srgbClr val="3D5466"/>
+                </a:solidFill>
+                <a:latin typeface="Arial"/>
+              </a:rPr>
+              <a:t>→  Der Wert entsteht nicht im Gutachten, sondern in einer geordneten, mehrjährigen Übergabe.</a:t>
+            </a:r>
+          </a:p>
+          <a:p>
+            <a:pPr marL="190500" indent="-190500">
+              <a:spcBef>
+                <a:spcPts val="400"/>
+              </a:spcBef>
+              <a:spcAft>
+                <a:spcPts val="200"/>
+              </a:spcAft>
+            </a:pPr>
+            <a:r>
               <a:rPr sz="1300">
                 <a:solidFill>
                   <a:srgbClr val="3D5466"/>
                 </a:solidFill>
                 <a:latin typeface="Arial"/>
               </a:rPr>
-              <a:t>▸  An welcher Stelle endet Ihre Rolle als Berater und beginnt die des Verbundpartners (DZ Bank M&amp;A, Steuerberater)?</a:t>
+              <a:t>▸  Optionen: familienintern, MBO/MBI, externer Verkauf, Stiftung.</a:t>
+            </a:r>
+          </a:p>
+          <a:p>
+            <a:pPr marL="190500" indent="-190500">
+              <a:spcBef>
+                <a:spcPts val="400"/>
+              </a:spcBef>
+              <a:spcAft>
+                <a:spcPts val="200"/>
+              </a:spcAft>
+            </a:pPr>
+            <a:r>
+              <a:rPr sz="1300">
+                <a:solidFill>
+                  <a:srgbClr val="3D5466"/>
+                </a:solidFill>
+                <a:latin typeface="Arial"/>
+              </a:rPr>
+              <a:t>▸  Der Prozess läuft in Phasen; Verbundpartner (DZ BANK, Steuerberater, Notar) früh einbinden.</a:t>
+            </a:r>
+          </a:p>
+        </p:txBody>
+      </p:sp>
+      <p:sp>
+        <p:nvSpPr>
+          <p:cNvPr id="9" name="Rectangle 8"/>
+          <p:cNvSpPr/>
+          <p:nvPr/>
+        </p:nvSpPr>
+        <p:spPr>
+          <a:xfrm>
+            <a:off x="0" y="6510528"/>
+            <a:ext cx="12188952" cy="347472"/>
+          </a:xfrm>
+          <a:prstGeom prst="rect">
+            <a:avLst/>
+          </a:prstGeom>
+          <a:solidFill>
+            <a:srgbClr val="0A1937"/>
+          </a:solidFill>
+          <a:ln>
+            <a:noFill/>
+          </a:ln>
+        </p:spPr>
+        <p:style>
+          <a:lnRef idx="1">
+            <a:schemeClr val="accent1"/>
+          </a:lnRef>
+          <a:fillRef idx="3">
+            <a:schemeClr val="accent1"/>
+          </a:fillRef>
+          <a:effectRef idx="2">
+            <a:schemeClr val="accent1"/>
+          </a:effectRef>
+          <a:fontRef idx="minor">
+            <a:schemeClr val="lt1"/>
+          </a:fontRef>
+        </p:style>
+        <p:txBody>
+          <a:bodyPr rtlCol="0" anchor="ctr"/>
+          <a:lstStyle/>
+          <a:p>
+            <a:pPr algn="ctr"/>
+          </a:p>
+        </p:txBody>
+      </p:sp>
+      <p:sp>
+        <p:nvSpPr>
+          <p:cNvPr id="10" name="TextBox 9"/>
+          <p:cNvSpPr txBox="1"/>
+          <p:nvPr/>
+        </p:nvSpPr>
+        <p:spPr>
+          <a:xfrm>
+            <a:off x="685800" y="6583680"/>
+            <a:ext cx="6490411" cy="256032"/>
+          </a:xfrm>
+          <a:prstGeom prst="rect">
+            <a:avLst/>
+          </a:prstGeom>
+          <a:noFill/>
+        </p:spPr>
+        <p:txBody>
+          <a:bodyPr wrap="none">
+            <a:spAutoFit/>
+          </a:bodyPr>
+          <a:lstStyle/>
+          <a:p>
+            <a:pPr algn="l"/>
+            <a:r>
+              <a:rPr sz="700">
+                <a:solidFill>
+                  <a:srgbClr val="A0B4D2"/>
+                </a:solidFill>
+                <a:latin typeface="Consolas"/>
+              </a:rPr>
+              <a:t>FKB Campus  ·  M24</a:t>
+            </a:r>
+          </a:p>
+        </p:txBody>
+      </p:sp>
+    </p:spTree>
+  </p:cSld>
+  <p:clrMapOvr>
+    <a:masterClrMapping/>
+  </p:clrMapOvr>
+</p:sld>
+</file>
+
+<file path=ppt/slides/slide15.xml><?xml version="1.0" encoding="utf-8"?>
+<p:sld xmlns:a="http://schemas.openxmlformats.org/drawingml/2006/main" xmlns:p="http://schemas.openxmlformats.org/presentationml/2006/main" xmlns:r="http://schemas.openxmlformats.org/officeDocument/2006/relationships">
+  <p:cSld>
+    <p:spTree>
+      <p:nvGrpSpPr>
+        <p:cNvPr id="1" name=""/>
+        <p:cNvGrpSpPr/>
+        <p:nvPr/>
+      </p:nvGrpSpPr>
+      <p:grpSpPr/>
+      <p:sp>
+        <p:nvSpPr>
+          <p:cNvPr id="2" name="Rectangle 1"/>
+          <p:cNvSpPr/>
+          <p:nvPr/>
+        </p:nvSpPr>
+        <p:spPr>
+          <a:xfrm>
+            <a:off x="0" y="0"/>
+            <a:ext cx="12188952" cy="6858000"/>
+          </a:xfrm>
+          <a:prstGeom prst="rect">
+            <a:avLst/>
+          </a:prstGeom>
+          <a:solidFill>
+            <a:srgbClr val="EDEDF3"/>
+          </a:solidFill>
+          <a:ln>
+            <a:noFill/>
+          </a:ln>
+        </p:spPr>
+        <p:style>
+          <a:lnRef idx="1">
+            <a:schemeClr val="accent1"/>
+          </a:lnRef>
+          <a:fillRef idx="3">
+            <a:schemeClr val="accent1"/>
+          </a:fillRef>
+          <a:effectRef idx="2">
+            <a:schemeClr val="accent1"/>
+          </a:effectRef>
+          <a:fontRef idx="minor">
+            <a:schemeClr val="lt1"/>
+          </a:fontRef>
+        </p:style>
+        <p:txBody>
+          <a:bodyPr rtlCol="0" anchor="ctr"/>
+          <a:lstStyle/>
+          <a:p>
+            <a:pPr algn="ctr"/>
+          </a:p>
+        </p:txBody>
+      </p:sp>
+      <p:sp>
+        <p:nvSpPr>
+          <p:cNvPr id="3" name="Rectangle 2"/>
+          <p:cNvSpPr/>
+          <p:nvPr/>
+        </p:nvSpPr>
+        <p:spPr>
+          <a:xfrm>
+            <a:off x="0" y="0"/>
+            <a:ext cx="12188952" cy="50292"/>
+          </a:xfrm>
+          <a:prstGeom prst="rect">
+            <a:avLst/>
+          </a:prstGeom>
+          <a:solidFill>
+            <a:srgbClr val="1F2C56"/>
+          </a:solidFill>
+          <a:ln>
+            <a:noFill/>
+          </a:ln>
+        </p:spPr>
+        <p:style>
+          <a:lnRef idx="1">
+            <a:schemeClr val="accent1"/>
+          </a:lnRef>
+          <a:fillRef idx="3">
+            <a:schemeClr val="accent1"/>
+          </a:fillRef>
+          <a:effectRef idx="2">
+            <a:schemeClr val="accent1"/>
+          </a:effectRef>
+          <a:fontRef idx="minor">
+            <a:schemeClr val="lt1"/>
+          </a:fontRef>
+        </p:style>
+        <p:txBody>
+          <a:bodyPr rtlCol="0" anchor="ctr"/>
+          <a:lstStyle/>
+          <a:p>
+            <a:pPr algn="ctr"/>
+          </a:p>
+        </p:txBody>
+      </p:sp>
+      <p:sp>
+        <p:nvSpPr>
+          <p:cNvPr id="4" name="TextBox 3"/>
+          <p:cNvSpPr txBox="1"/>
+          <p:nvPr/>
+        </p:nvSpPr>
+        <p:spPr>
+          <a:xfrm>
+            <a:off x="685800" y="109728"/>
+            <a:ext cx="10817352" cy="228600"/>
+          </a:xfrm>
+          <a:prstGeom prst="rect">
+            <a:avLst/>
+          </a:prstGeom>
+          <a:noFill/>
+        </p:spPr>
+        <p:txBody>
+          <a:bodyPr wrap="none">
+            <a:spAutoFit/>
+          </a:bodyPr>
+          <a:lstStyle/>
+          <a:p>
+            <a:pPr algn="l"/>
+            <a:r>
+              <a:rPr sz="750">
+                <a:solidFill>
+                  <a:srgbClr val="78808C"/>
+                </a:solidFill>
+                <a:latin typeface="Consolas"/>
+              </a:rPr>
+              <a:t>M24  ·  ARBEITSBLATT</a:t>
+            </a:r>
+          </a:p>
+        </p:txBody>
+      </p:sp>
+      <p:sp>
+        <p:nvSpPr>
+          <p:cNvPr id="5" name="Rectangle 4"/>
+          <p:cNvSpPr/>
+          <p:nvPr/>
+        </p:nvSpPr>
+        <p:spPr>
+          <a:xfrm>
+            <a:off x="0" y="1234440"/>
+            <a:ext cx="12188952" cy="12700"/>
+          </a:xfrm>
+          <a:prstGeom prst="rect">
+            <a:avLst/>
+          </a:prstGeom>
+          <a:solidFill>
+            <a:srgbClr val="D8DFE4"/>
+          </a:solidFill>
+          <a:ln>
+            <a:noFill/>
+          </a:ln>
+        </p:spPr>
+        <p:style>
+          <a:lnRef idx="1">
+            <a:schemeClr val="accent1"/>
+          </a:lnRef>
+          <a:fillRef idx="3">
+            <a:schemeClr val="accent1"/>
+          </a:fillRef>
+          <a:effectRef idx="2">
+            <a:schemeClr val="accent1"/>
+          </a:effectRef>
+          <a:fontRef idx="minor">
+            <a:schemeClr val="lt1"/>
+          </a:fontRef>
+        </p:style>
+        <p:txBody>
+          <a:bodyPr rtlCol="0" anchor="ctr"/>
+          <a:lstStyle/>
+          <a:p>
+            <a:pPr algn="ctr"/>
+          </a:p>
+        </p:txBody>
+      </p:sp>
+      <p:sp>
+        <p:nvSpPr>
+          <p:cNvPr id="6" name="Rectangle 5"/>
+          <p:cNvSpPr/>
+          <p:nvPr/>
+        </p:nvSpPr>
+        <p:spPr>
+          <a:xfrm>
+            <a:off x="685800" y="502920"/>
+            <a:ext cx="36576" cy="658368"/>
+          </a:xfrm>
+          <a:prstGeom prst="rect">
+            <a:avLst/>
+          </a:prstGeom>
+          <a:solidFill>
+            <a:srgbClr val="D9C089"/>
+          </a:solidFill>
+          <a:ln>
+            <a:noFill/>
+          </a:ln>
+        </p:spPr>
+        <p:style>
+          <a:lnRef idx="1">
+            <a:schemeClr val="accent1"/>
+          </a:lnRef>
+          <a:fillRef idx="3">
+            <a:schemeClr val="accent1"/>
+          </a:fillRef>
+          <a:effectRef idx="2">
+            <a:schemeClr val="accent1"/>
+          </a:effectRef>
+          <a:fontRef idx="minor">
+            <a:schemeClr val="lt1"/>
+          </a:fontRef>
+        </p:style>
+        <p:txBody>
+          <a:bodyPr rtlCol="0" anchor="ctr"/>
+          <a:lstStyle/>
+          <a:p>
+            <a:pPr algn="ctr"/>
+          </a:p>
+        </p:txBody>
+      </p:sp>
+      <p:sp>
+        <p:nvSpPr>
+          <p:cNvPr id="7" name="TextBox 6"/>
+          <p:cNvSpPr txBox="1"/>
+          <p:nvPr/>
+        </p:nvSpPr>
+        <p:spPr>
+          <a:xfrm>
+            <a:off x="813816" y="502920"/>
+            <a:ext cx="10634472" cy="685800"/>
+          </a:xfrm>
+          <a:prstGeom prst="rect">
+            <a:avLst/>
+          </a:prstGeom>
+          <a:noFill/>
+        </p:spPr>
+        <p:txBody>
+          <a:bodyPr wrap="square">
+            <a:spAutoFit/>
+          </a:bodyPr>
+          <a:lstStyle/>
+          <a:p>
+            <a:pPr algn="l"/>
+            <a:r>
+              <a:rPr sz="2400" b="1" i="0">
+                <a:solidFill>
+                  <a:srgbClr val="1F2C56"/>
+                </a:solidFill>
+                <a:latin typeface="Arial"/>
+              </a:rPr>
+              <a:t>Übergabeoptionen abwägen</a:t>
+            </a:r>
+          </a:p>
+        </p:txBody>
+      </p:sp>
+      <p:sp>
+        <p:nvSpPr>
+          <p:cNvPr id="8" name="TextBox 7"/>
+          <p:cNvSpPr txBox="1"/>
+          <p:nvPr/>
+        </p:nvSpPr>
+        <p:spPr>
+          <a:xfrm>
+            <a:off x="685800" y="1554480"/>
+            <a:ext cx="10817352" cy="3840480"/>
+          </a:xfrm>
+          <a:prstGeom prst="rect">
+            <a:avLst/>
+          </a:prstGeom>
+          <a:noFill/>
+        </p:spPr>
+        <p:txBody>
+          <a:bodyPr wrap="square">
+            <a:spAutoFit/>
+          </a:bodyPr>
+          <a:lstStyle/>
+          <a:p>
+            <a:pPr marL="190500" indent="-190500">
+              <a:spcBef>
+                <a:spcPts val="400"/>
+              </a:spcBef>
+              <a:spcAft>
+                <a:spcPts val="200"/>
+              </a:spcAft>
+            </a:pPr>
+            <a:r>
+              <a:rPr sz="1400">
+                <a:solidFill>
+                  <a:srgbClr val="3D5466"/>
+                </a:solidFill>
+                <a:latin typeface="Arial"/>
+              </a:rPr>
+              <a:t>▸  Wägen Sie die Übergabeoptionen für den Fall ab (AB-3).</a:t>
+            </a:r>
+          </a:p>
+          <a:p>
+            <a:pPr marL="190500" indent="-190500">
+              <a:spcBef>
+                <a:spcPts val="400"/>
+              </a:spcBef>
+              <a:spcAft>
+                <a:spcPts val="200"/>
+              </a:spcAft>
+            </a:pPr>
+            <a:r>
+              <a:rPr sz="1400">
+                <a:solidFill>
+                  <a:srgbClr val="3D5466"/>
+                </a:solidFill>
+                <a:latin typeface="Arial"/>
+              </a:rPr>
+              <a:t>▸  Begründen Sie eine Empfehlung mit Blick auf Wert, Zeit und Personenabhängigkeit.</a:t>
+            </a:r>
+          </a:p>
+          <a:p>
+            <a:pPr marL="190500" indent="-190500">
+              <a:spcBef>
+                <a:spcPts val="400"/>
+              </a:spcBef>
+              <a:spcAft>
+                <a:spcPts val="200"/>
+              </a:spcAft>
+            </a:pPr>
+            <a:r>
+              <a:rPr sz="1400">
+                <a:solidFill>
+                  <a:srgbClr val="3D5466"/>
+                </a:solidFill>
+                <a:latin typeface="Arial"/>
+              </a:rPr>
+              <a:t>▸  Zeigen Sie den Werthebel der mehrjährigen Übergabe (Earn-out, Einarbeitung) auf.</a:t>
+            </a:r>
+          </a:p>
+        </p:txBody>
+      </p:sp>
+      <p:sp>
+        <p:nvSpPr>
+          <p:cNvPr id="9" name="Rectangle 8"/>
+          <p:cNvSpPr/>
+          <p:nvPr/>
+        </p:nvSpPr>
+        <p:spPr>
+          <a:xfrm>
+            <a:off x="685800" y="5486400"/>
+            <a:ext cx="10817352" cy="640080"/>
+          </a:xfrm>
+          <a:prstGeom prst="rect">
+            <a:avLst/>
+          </a:prstGeom>
+          <a:solidFill>
+            <a:srgbClr val="1F2C56"/>
+          </a:solidFill>
+          <a:ln>
+            <a:noFill/>
+          </a:ln>
+        </p:spPr>
+        <p:style>
+          <a:lnRef idx="1">
+            <a:schemeClr val="accent1"/>
+          </a:lnRef>
+          <a:fillRef idx="3">
+            <a:schemeClr val="accent1"/>
+          </a:fillRef>
+          <a:effectRef idx="2">
+            <a:schemeClr val="accent1"/>
+          </a:effectRef>
+          <a:fontRef idx="minor">
+            <a:schemeClr val="lt1"/>
+          </a:fontRef>
+        </p:style>
+        <p:txBody>
+          <a:bodyPr rtlCol="0" anchor="ctr"/>
+          <a:lstStyle/>
+          <a:p>
+            <a:pPr algn="ctr"/>
+          </a:p>
+        </p:txBody>
+      </p:sp>
+      <p:sp>
+        <p:nvSpPr>
+          <p:cNvPr id="10" name="TextBox 9"/>
+          <p:cNvSpPr txBox="1"/>
+          <p:nvPr/>
+        </p:nvSpPr>
+        <p:spPr>
+          <a:xfrm>
+            <a:off x="868680" y="5596128"/>
+            <a:ext cx="10451592" cy="457200"/>
+          </a:xfrm>
+          <a:prstGeom prst="rect">
+            <a:avLst/>
+          </a:prstGeom>
+          <a:noFill/>
+        </p:spPr>
+        <p:txBody>
+          <a:bodyPr wrap="square">
+            <a:spAutoFit/>
+          </a:bodyPr>
+          <a:lstStyle/>
+          <a:p>
+            <a:pPr algn="l"/>
+            <a:r>
+              <a:rPr sz="1300" b="1" i="0">
+                <a:solidFill>
+                  <a:srgbClr val="FFFFFF"/>
+                </a:solidFill>
+                <a:latin typeface="Arial"/>
+              </a:rPr>
+              <a:t>→  Bearbeitung im Teilnehmer-Workbook (Arbeitsblatt mit Ausfüllfeldern)</a:t>
+            </a:r>
+          </a:p>
+        </p:txBody>
+      </p:sp>
+      <p:sp>
+        <p:nvSpPr>
+          <p:cNvPr id="11" name="Rectangle 10"/>
+          <p:cNvSpPr/>
+          <p:nvPr/>
+        </p:nvSpPr>
+        <p:spPr>
+          <a:xfrm>
+            <a:off x="0" y="6510528"/>
+            <a:ext cx="12188952" cy="347472"/>
+          </a:xfrm>
+          <a:prstGeom prst="rect">
+            <a:avLst/>
+          </a:prstGeom>
+          <a:solidFill>
+            <a:srgbClr val="0A1937"/>
+          </a:solidFill>
+          <a:ln>
+            <a:noFill/>
+          </a:ln>
+        </p:spPr>
+        <p:style>
+          <a:lnRef idx="1">
+            <a:schemeClr val="accent1"/>
+          </a:lnRef>
+          <a:fillRef idx="3">
+            <a:schemeClr val="accent1"/>
+          </a:fillRef>
+          <a:effectRef idx="2">
+            <a:schemeClr val="accent1"/>
+          </a:effectRef>
+          <a:fontRef idx="minor">
+            <a:schemeClr val="lt1"/>
+          </a:fontRef>
+        </p:style>
+        <p:txBody>
+          <a:bodyPr rtlCol="0" anchor="ctr"/>
+          <a:lstStyle/>
+          <a:p>
+            <a:pPr algn="ctr"/>
+          </a:p>
+        </p:txBody>
+      </p:sp>
+      <p:sp>
+        <p:nvSpPr>
+          <p:cNvPr id="12" name="TextBox 11"/>
+          <p:cNvSpPr txBox="1"/>
+          <p:nvPr/>
+        </p:nvSpPr>
+        <p:spPr>
+          <a:xfrm>
+            <a:off x="685800" y="6583680"/>
+            <a:ext cx="6490411" cy="256032"/>
+          </a:xfrm>
+          <a:prstGeom prst="rect">
+            <a:avLst/>
+          </a:prstGeom>
+          <a:noFill/>
+        </p:spPr>
+        <p:txBody>
+          <a:bodyPr wrap="none">
+            <a:spAutoFit/>
+          </a:bodyPr>
+          <a:lstStyle/>
+          <a:p>
+            <a:pPr algn="l"/>
+            <a:r>
+              <a:rPr sz="700">
+                <a:solidFill>
+                  <a:srgbClr val="A0B4D2"/>
+                </a:solidFill>
+                <a:latin typeface="Consolas"/>
+              </a:rPr>
+              <a:t>FKB Campus  ·  M24</a:t>
+            </a:r>
+          </a:p>
+        </p:txBody>
+      </p:sp>
+    </p:spTree>
+  </p:cSld>
+  <p:clrMapOvr>
+    <a:masterClrMapping/>
+  </p:clrMapOvr>
+</p:sld>
+</file>
+
+<file path=ppt/slides/slide16.xml><?xml version="1.0" encoding="utf-8"?>
+<p:sld xmlns:a="http://schemas.openxmlformats.org/drawingml/2006/main" xmlns:p="http://schemas.openxmlformats.org/presentationml/2006/main" xmlns:r="http://schemas.openxmlformats.org/officeDocument/2006/relationships">
+  <p:cSld>
+    <p:spTree>
+      <p:nvGrpSpPr>
+        <p:cNvPr id="1" name=""/>
+        <p:cNvGrpSpPr/>
+        <p:nvPr/>
+      </p:nvGrpSpPr>
+      <p:grpSpPr/>
+      <p:sp>
+        <p:nvSpPr>
+          <p:cNvPr id="2" name="Rectangle 1"/>
+          <p:cNvSpPr/>
+          <p:nvPr/>
+        </p:nvSpPr>
+        <p:spPr>
+          <a:xfrm>
+            <a:off x="0" y="0"/>
+            <a:ext cx="12188952" cy="6858000"/>
+          </a:xfrm>
+          <a:prstGeom prst="rect">
+            <a:avLst/>
+          </a:prstGeom>
+          <a:solidFill>
+            <a:srgbClr val="1F2C56"/>
+          </a:solidFill>
+          <a:ln>
+            <a:noFill/>
+          </a:ln>
+        </p:spPr>
+        <p:style>
+          <a:lnRef idx="1">
+            <a:schemeClr val="accent1"/>
+          </a:lnRef>
+          <a:fillRef idx="3">
+            <a:schemeClr val="accent1"/>
+          </a:fillRef>
+          <a:effectRef idx="2">
+            <a:schemeClr val="accent1"/>
+          </a:effectRef>
+          <a:fontRef idx="minor">
+            <a:schemeClr val="lt1"/>
+          </a:fontRef>
+        </p:style>
+        <p:txBody>
+          <a:bodyPr rtlCol="0" anchor="ctr"/>
+          <a:lstStyle/>
+          <a:p>
+            <a:pPr algn="ctr"/>
+          </a:p>
+        </p:txBody>
+      </p:sp>
+      <p:sp>
+        <p:nvSpPr>
+          <p:cNvPr id="3" name="TextBox 2"/>
+          <p:cNvSpPr txBox="1"/>
+          <p:nvPr/>
+        </p:nvSpPr>
+        <p:spPr>
+          <a:xfrm>
+            <a:off x="685800" y="2377440"/>
+            <a:ext cx="10817352" cy="365760"/>
+          </a:xfrm>
+          <a:prstGeom prst="rect">
+            <a:avLst/>
+          </a:prstGeom>
+          <a:noFill/>
+        </p:spPr>
+        <p:txBody>
+          <a:bodyPr wrap="none">
+            <a:spAutoFit/>
+          </a:bodyPr>
+          <a:lstStyle/>
+          <a:p>
+            <a:pPr algn="l"/>
+            <a:r>
+              <a:rPr sz="1200">
+                <a:solidFill>
+                  <a:srgbClr val="D9C089"/>
+                </a:solidFill>
+                <a:latin typeface="Consolas"/>
+              </a:rPr>
+              <a:t>15:15–16:40</a:t>
+            </a:r>
+          </a:p>
+        </p:txBody>
+      </p:sp>
+      <p:sp>
+        <p:nvSpPr>
+          <p:cNvPr id="4" name="Rectangle 3"/>
+          <p:cNvSpPr/>
+          <p:nvPr/>
+        </p:nvSpPr>
+        <p:spPr>
+          <a:xfrm>
+            <a:off x="685800" y="2788920"/>
+            <a:ext cx="548640" cy="38100"/>
+          </a:xfrm>
+          <a:prstGeom prst="rect">
+            <a:avLst/>
+          </a:prstGeom>
+          <a:solidFill>
+            <a:srgbClr val="D9C089"/>
+          </a:solidFill>
+          <a:ln>
+            <a:noFill/>
+          </a:ln>
+        </p:spPr>
+        <p:style>
+          <a:lnRef idx="1">
+            <a:schemeClr val="accent1"/>
+          </a:lnRef>
+          <a:fillRef idx="3">
+            <a:schemeClr val="accent1"/>
+          </a:fillRef>
+          <a:effectRef idx="2">
+            <a:schemeClr val="accent1"/>
+          </a:effectRef>
+          <a:fontRef idx="minor">
+            <a:schemeClr val="lt1"/>
+          </a:fontRef>
+        </p:style>
+        <p:txBody>
+          <a:bodyPr rtlCol="0" anchor="ctr"/>
+          <a:lstStyle/>
+          <a:p>
+            <a:pPr algn="ctr"/>
+          </a:p>
+        </p:txBody>
+      </p:sp>
+      <p:sp>
+        <p:nvSpPr>
+          <p:cNvPr id="5" name="TextBox 4"/>
+          <p:cNvSpPr txBox="1"/>
+          <p:nvPr/>
+        </p:nvSpPr>
+        <p:spPr>
+          <a:xfrm>
+            <a:off x="685800" y="3017520"/>
+            <a:ext cx="10817352" cy="1463040"/>
+          </a:xfrm>
+          <a:prstGeom prst="rect">
+            <a:avLst/>
+          </a:prstGeom>
+          <a:noFill/>
+        </p:spPr>
+        <p:txBody>
+          <a:bodyPr wrap="square">
+            <a:spAutoFit/>
+          </a:bodyPr>
+          <a:lstStyle/>
+          <a:p>
+            <a:pPr algn="l"/>
+            <a:r>
+              <a:rPr sz="4000" b="1" i="0">
+                <a:solidFill>
+                  <a:srgbClr val="FFFFFF"/>
+                </a:solidFill>
+                <a:latin typeface="Arial"/>
+              </a:rPr>
+              <a:t>Übung 4: Übergabedialog</a:t>
+            </a:r>
+          </a:p>
+        </p:txBody>
+      </p:sp>
+      <p:sp>
+        <p:nvSpPr>
+          <p:cNvPr id="6" name="TextBox 5"/>
+          <p:cNvSpPr txBox="1"/>
+          <p:nvPr/>
+        </p:nvSpPr>
+        <p:spPr>
+          <a:xfrm>
+            <a:off x="685800" y="4480560"/>
+            <a:ext cx="8653881" cy="1280160"/>
+          </a:xfrm>
+          <a:prstGeom prst="rect">
+            <a:avLst/>
+          </a:prstGeom>
+          <a:noFill/>
+        </p:spPr>
+        <p:txBody>
+          <a:bodyPr wrap="square">
+            <a:spAutoFit/>
+          </a:bodyPr>
+          <a:lstStyle/>
+          <a:p>
+            <a:pPr algn="l"/>
+            <a:r>
+              <a:rPr sz="1600" b="0" i="0">
+                <a:solidFill>
+                  <a:srgbClr val="C8D2E6"/>
+                </a:solidFill>
+                <a:latin typeface="Arial"/>
+              </a:rPr>
+              <a:t>Den Wert kommunizieren und die emotionale Dimension halten.</a:t>
+            </a:r>
+          </a:p>
+        </p:txBody>
+      </p:sp>
+      <p:sp>
+        <p:nvSpPr>
+          <p:cNvPr id="7" name="TextBox 6"/>
+          <p:cNvSpPr txBox="1"/>
+          <p:nvPr/>
+        </p:nvSpPr>
+        <p:spPr>
+          <a:xfrm>
+            <a:off x="685800" y="6355080"/>
+            <a:ext cx="10817352" cy="274320"/>
+          </a:xfrm>
+          <a:prstGeom prst="rect">
+            <a:avLst/>
+          </a:prstGeom>
+          <a:noFill/>
+        </p:spPr>
+        <p:txBody>
+          <a:bodyPr wrap="none">
+            <a:spAutoFit/>
+          </a:bodyPr>
+          <a:lstStyle/>
+          <a:p>
+            <a:pPr algn="l"/>
+            <a:r>
+              <a:rPr sz="700">
+                <a:solidFill>
+                  <a:srgbClr val="8CA0C3"/>
+                </a:solidFill>
+                <a:latin typeface="Consolas"/>
+              </a:rPr>
+              <a:t>FKB Campus  ·  M24</a:t>
+            </a:r>
+          </a:p>
+        </p:txBody>
+      </p:sp>
+    </p:spTree>
+  </p:cSld>
+  <p:clrMapOvr>
+    <a:masterClrMapping/>
+  </p:clrMapOvr>
+</p:sld>
+</file>
+
+<file path=ppt/slides/slide17.xml><?xml version="1.0" encoding="utf-8"?>
+<p:sld xmlns:a="http://schemas.openxmlformats.org/drawingml/2006/main" xmlns:p="http://schemas.openxmlformats.org/presentationml/2006/main" xmlns:r="http://schemas.openxmlformats.org/officeDocument/2006/relationships">
+  <p:cSld>
+    <p:spTree>
+      <p:nvGrpSpPr>
+        <p:cNvPr id="1" name=""/>
+        <p:cNvGrpSpPr/>
+        <p:nvPr/>
+      </p:nvGrpSpPr>
+      <p:grpSpPr/>
+      <p:sp>
+        <p:nvSpPr>
+          <p:cNvPr id="2" name="Rectangle 1"/>
+          <p:cNvSpPr/>
+          <p:nvPr/>
+        </p:nvSpPr>
+        <p:spPr>
+          <a:xfrm>
+            <a:off x="0" y="0"/>
+            <a:ext cx="12188952" cy="6858000"/>
+          </a:xfrm>
+          <a:prstGeom prst="rect">
+            <a:avLst/>
+          </a:prstGeom>
+          <a:solidFill>
+            <a:srgbClr val="EDEDF3"/>
+          </a:solidFill>
+          <a:ln>
+            <a:noFill/>
+          </a:ln>
+        </p:spPr>
+        <p:style>
+          <a:lnRef idx="1">
+            <a:schemeClr val="accent1"/>
+          </a:lnRef>
+          <a:fillRef idx="3">
+            <a:schemeClr val="accent1"/>
+          </a:fillRef>
+          <a:effectRef idx="2">
+            <a:schemeClr val="accent1"/>
+          </a:effectRef>
+          <a:fontRef idx="minor">
+            <a:schemeClr val="lt1"/>
+          </a:fontRef>
+        </p:style>
+        <p:txBody>
+          <a:bodyPr rtlCol="0" anchor="ctr"/>
+          <a:lstStyle/>
+          <a:p>
+            <a:pPr algn="ctr"/>
+          </a:p>
+        </p:txBody>
+      </p:sp>
+      <p:sp>
+        <p:nvSpPr>
+          <p:cNvPr id="3" name="Rectangle 2"/>
+          <p:cNvSpPr/>
+          <p:nvPr/>
+        </p:nvSpPr>
+        <p:spPr>
+          <a:xfrm>
+            <a:off x="0" y="0"/>
+            <a:ext cx="12188952" cy="50292"/>
+          </a:xfrm>
+          <a:prstGeom prst="rect">
+            <a:avLst/>
+          </a:prstGeom>
+          <a:solidFill>
+            <a:srgbClr val="1F2C56"/>
+          </a:solidFill>
+          <a:ln>
+            <a:noFill/>
+          </a:ln>
+        </p:spPr>
+        <p:style>
+          <a:lnRef idx="1">
+            <a:schemeClr val="accent1"/>
+          </a:lnRef>
+          <a:fillRef idx="3">
+            <a:schemeClr val="accent1"/>
+          </a:fillRef>
+          <a:effectRef idx="2">
+            <a:schemeClr val="accent1"/>
+          </a:effectRef>
+          <a:fontRef idx="minor">
+            <a:schemeClr val="lt1"/>
+          </a:fontRef>
+        </p:style>
+        <p:txBody>
+          <a:bodyPr rtlCol="0" anchor="ctr"/>
+          <a:lstStyle/>
+          <a:p>
+            <a:pPr algn="ctr"/>
+          </a:p>
+        </p:txBody>
+      </p:sp>
+      <p:sp>
+        <p:nvSpPr>
+          <p:cNvPr id="4" name="TextBox 3"/>
+          <p:cNvSpPr txBox="1"/>
+          <p:nvPr/>
+        </p:nvSpPr>
+        <p:spPr>
+          <a:xfrm>
+            <a:off x="685800" y="109728"/>
+            <a:ext cx="10817352" cy="228600"/>
+          </a:xfrm>
+          <a:prstGeom prst="rect">
+            <a:avLst/>
+          </a:prstGeom>
+          <a:noFill/>
+        </p:spPr>
+        <p:txBody>
+          <a:bodyPr wrap="none">
+            <a:spAutoFit/>
+          </a:bodyPr>
+          <a:lstStyle/>
+          <a:p>
+            <a:pPr algn="l"/>
+            <a:r>
+              <a:rPr sz="750">
+                <a:solidFill>
+                  <a:srgbClr val="78808C"/>
+                </a:solidFill>
+                <a:latin typeface="Consolas"/>
+              </a:rPr>
+              <a:t>M24  ·  ARBEITSBLATT</a:t>
+            </a:r>
+          </a:p>
+        </p:txBody>
+      </p:sp>
+      <p:sp>
+        <p:nvSpPr>
+          <p:cNvPr id="5" name="Rectangle 4"/>
+          <p:cNvSpPr/>
+          <p:nvPr/>
+        </p:nvSpPr>
+        <p:spPr>
+          <a:xfrm>
+            <a:off x="0" y="1234440"/>
+            <a:ext cx="12188952" cy="12700"/>
+          </a:xfrm>
+          <a:prstGeom prst="rect">
+            <a:avLst/>
+          </a:prstGeom>
+          <a:solidFill>
+            <a:srgbClr val="D8DFE4"/>
+          </a:solidFill>
+          <a:ln>
+            <a:noFill/>
+          </a:ln>
+        </p:spPr>
+        <p:style>
+          <a:lnRef idx="1">
+            <a:schemeClr val="accent1"/>
+          </a:lnRef>
+          <a:fillRef idx="3">
+            <a:schemeClr val="accent1"/>
+          </a:fillRef>
+          <a:effectRef idx="2">
+            <a:schemeClr val="accent1"/>
+          </a:effectRef>
+          <a:fontRef idx="minor">
+            <a:schemeClr val="lt1"/>
+          </a:fontRef>
+        </p:style>
+        <p:txBody>
+          <a:bodyPr rtlCol="0" anchor="ctr"/>
+          <a:lstStyle/>
+          <a:p>
+            <a:pPr algn="ctr"/>
+          </a:p>
+        </p:txBody>
+      </p:sp>
+      <p:sp>
+        <p:nvSpPr>
+          <p:cNvPr id="6" name="Rectangle 5"/>
+          <p:cNvSpPr/>
+          <p:nvPr/>
+        </p:nvSpPr>
+        <p:spPr>
+          <a:xfrm>
+            <a:off x="685800" y="502920"/>
+            <a:ext cx="36576" cy="658368"/>
+          </a:xfrm>
+          <a:prstGeom prst="rect">
+            <a:avLst/>
+          </a:prstGeom>
+          <a:solidFill>
+            <a:srgbClr val="D9C089"/>
+          </a:solidFill>
+          <a:ln>
+            <a:noFill/>
+          </a:ln>
+        </p:spPr>
+        <p:style>
+          <a:lnRef idx="1">
+            <a:schemeClr val="accent1"/>
+          </a:lnRef>
+          <a:fillRef idx="3">
+            <a:schemeClr val="accent1"/>
+          </a:fillRef>
+          <a:effectRef idx="2">
+            <a:schemeClr val="accent1"/>
+          </a:effectRef>
+          <a:fontRef idx="minor">
+            <a:schemeClr val="lt1"/>
+          </a:fontRef>
+        </p:style>
+        <p:txBody>
+          <a:bodyPr rtlCol="0" anchor="ctr"/>
+          <a:lstStyle/>
+          <a:p>
+            <a:pPr algn="ctr"/>
+          </a:p>
+        </p:txBody>
+      </p:sp>
+      <p:sp>
+        <p:nvSpPr>
+          <p:cNvPr id="7" name="TextBox 6"/>
+          <p:cNvSpPr txBox="1"/>
+          <p:nvPr/>
+        </p:nvSpPr>
+        <p:spPr>
+          <a:xfrm>
+            <a:off x="813816" y="502920"/>
+            <a:ext cx="10634472" cy="685800"/>
+          </a:xfrm>
+          <a:prstGeom prst="rect">
+            <a:avLst/>
+          </a:prstGeom>
+          <a:noFill/>
+        </p:spPr>
+        <p:txBody>
+          <a:bodyPr wrap="square">
+            <a:spAutoFit/>
+          </a:bodyPr>
+          <a:lstStyle/>
+          <a:p>
+            <a:pPr algn="l"/>
+            <a:r>
+              <a:rPr sz="2400" b="1" i="0">
+                <a:solidFill>
+                  <a:srgbClr val="1F2C56"/>
+                </a:solidFill>
+                <a:latin typeface="Arial"/>
+              </a:rPr>
+              <a:t>Den Wert kommunizieren – Übergabedialog</a:t>
+            </a:r>
+          </a:p>
+        </p:txBody>
+      </p:sp>
+      <p:sp>
+        <p:nvSpPr>
+          <p:cNvPr id="8" name="TextBox 7"/>
+          <p:cNvSpPr txBox="1"/>
+          <p:nvPr/>
+        </p:nvSpPr>
+        <p:spPr>
+          <a:xfrm>
+            <a:off x="685800" y="1554480"/>
+            <a:ext cx="10817352" cy="3840480"/>
+          </a:xfrm>
+          <a:prstGeom prst="rect">
+            <a:avLst/>
+          </a:prstGeom>
+          <a:noFill/>
+        </p:spPr>
+        <p:txBody>
+          <a:bodyPr wrap="square">
+            <a:spAutoFit/>
+          </a:bodyPr>
+          <a:lstStyle/>
+          <a:p>
+            <a:pPr marL="190500" indent="-190500">
+              <a:spcBef>
+                <a:spcPts val="400"/>
+              </a:spcBef>
+              <a:spcAft>
+                <a:spcPts val="200"/>
+              </a:spcAft>
+            </a:pPr>
+            <a:r>
+              <a:rPr sz="1400">
+                <a:solidFill>
+                  <a:srgbClr val="3D5466"/>
+                </a:solidFill>
+                <a:latin typeface="Arial"/>
+              </a:rPr>
+              <a:t>▸  Führen Sie den Übergabedialog im Rollenspiel (AB-4, Rollenkarten).</a:t>
+            </a:r>
+          </a:p>
+          <a:p>
+            <a:pPr marL="190500" indent="-190500">
+              <a:spcBef>
+                <a:spcPts val="400"/>
+              </a:spcBef>
+              <a:spcAft>
+                <a:spcPts val="200"/>
+              </a:spcAft>
+            </a:pPr>
+            <a:r>
+              <a:rPr sz="1400">
+                <a:solidFill>
+                  <a:srgbClr val="3D5466"/>
+                </a:solidFill>
+                <a:latin typeface="Arial"/>
+              </a:rPr>
+              <a:t>▸  Kommunizieren Sie die Wertbandbreite ehrlich – ohne Scheingenauigkeit.</a:t>
+            </a:r>
+          </a:p>
+          <a:p>
+            <a:pPr marL="190500" indent="-190500">
+              <a:spcBef>
+                <a:spcPts val="400"/>
+              </a:spcBef>
+              <a:spcAft>
+                <a:spcPts val="200"/>
+              </a:spcAft>
+            </a:pPr>
+            <a:r>
+              <a:rPr sz="1400">
+                <a:solidFill>
+                  <a:srgbClr val="3D5466"/>
+                </a:solidFill>
+                <a:latin typeface="Arial"/>
+              </a:rPr>
+              <a:t>▸  Nutzen Sie den Beobachtungsbogen für strukturiertes Feedback (AB-5).</a:t>
+            </a:r>
+          </a:p>
+        </p:txBody>
+      </p:sp>
+      <p:sp>
+        <p:nvSpPr>
+          <p:cNvPr id="9" name="Rectangle 8"/>
+          <p:cNvSpPr/>
+          <p:nvPr/>
+        </p:nvSpPr>
+        <p:spPr>
+          <a:xfrm>
+            <a:off x="685800" y="5486400"/>
+            <a:ext cx="10817352" cy="640080"/>
+          </a:xfrm>
+          <a:prstGeom prst="rect">
+            <a:avLst/>
+          </a:prstGeom>
+          <a:solidFill>
+            <a:srgbClr val="1F2C56"/>
+          </a:solidFill>
+          <a:ln>
+            <a:noFill/>
+          </a:ln>
+        </p:spPr>
+        <p:style>
+          <a:lnRef idx="1">
+            <a:schemeClr val="accent1"/>
+          </a:lnRef>
+          <a:fillRef idx="3">
+            <a:schemeClr val="accent1"/>
+          </a:fillRef>
+          <a:effectRef idx="2">
+            <a:schemeClr val="accent1"/>
+          </a:effectRef>
+          <a:fontRef idx="minor">
+            <a:schemeClr val="lt1"/>
+          </a:fontRef>
+        </p:style>
+        <p:txBody>
+          <a:bodyPr rtlCol="0" anchor="ctr"/>
+          <a:lstStyle/>
+          <a:p>
+            <a:pPr algn="ctr"/>
+          </a:p>
+        </p:txBody>
+      </p:sp>
+      <p:sp>
+        <p:nvSpPr>
+          <p:cNvPr id="10" name="TextBox 9"/>
+          <p:cNvSpPr txBox="1"/>
+          <p:nvPr/>
+        </p:nvSpPr>
+        <p:spPr>
+          <a:xfrm>
+            <a:off x="868680" y="5596128"/>
+            <a:ext cx="10451592" cy="457200"/>
+          </a:xfrm>
+          <a:prstGeom prst="rect">
+            <a:avLst/>
+          </a:prstGeom>
+          <a:noFill/>
+        </p:spPr>
+        <p:txBody>
+          <a:bodyPr wrap="square">
+            <a:spAutoFit/>
+          </a:bodyPr>
+          <a:lstStyle/>
+          <a:p>
+            <a:pPr algn="l"/>
+            <a:r>
+              <a:rPr sz="1300" b="1" i="0">
+                <a:solidFill>
+                  <a:srgbClr val="FFFFFF"/>
+                </a:solidFill>
+                <a:latin typeface="Arial"/>
+              </a:rPr>
+              <a:t>→  Bearbeitung im Teilnehmer-Workbook (Arbeitsblatt mit Ausfüllfeldern)</a:t>
+            </a:r>
+          </a:p>
+        </p:txBody>
+      </p:sp>
+      <p:sp>
+        <p:nvSpPr>
+          <p:cNvPr id="11" name="Rectangle 10"/>
+          <p:cNvSpPr/>
+          <p:nvPr/>
+        </p:nvSpPr>
+        <p:spPr>
+          <a:xfrm>
+            <a:off x="0" y="6510528"/>
+            <a:ext cx="12188952" cy="347472"/>
+          </a:xfrm>
+          <a:prstGeom prst="rect">
+            <a:avLst/>
+          </a:prstGeom>
+          <a:solidFill>
+            <a:srgbClr val="0A1937"/>
+          </a:solidFill>
+          <a:ln>
+            <a:noFill/>
+          </a:ln>
+        </p:spPr>
+        <p:style>
+          <a:lnRef idx="1">
+            <a:schemeClr val="accent1"/>
+          </a:lnRef>
+          <a:fillRef idx="3">
+            <a:schemeClr val="accent1"/>
+          </a:fillRef>
+          <a:effectRef idx="2">
+            <a:schemeClr val="accent1"/>
+          </a:effectRef>
+          <a:fontRef idx="minor">
+            <a:schemeClr val="lt1"/>
+          </a:fontRef>
+        </p:style>
+        <p:txBody>
+          <a:bodyPr rtlCol="0" anchor="ctr"/>
+          <a:lstStyle/>
+          <a:p>
+            <a:pPr algn="ctr"/>
+          </a:p>
+        </p:txBody>
+      </p:sp>
+      <p:sp>
+        <p:nvSpPr>
+          <p:cNvPr id="12" name="TextBox 11"/>
+          <p:cNvSpPr txBox="1"/>
+          <p:nvPr/>
+        </p:nvSpPr>
+        <p:spPr>
+          <a:xfrm>
+            <a:off x="685800" y="6583680"/>
+            <a:ext cx="6490411" cy="256032"/>
+          </a:xfrm>
+          <a:prstGeom prst="rect">
+            <a:avLst/>
+          </a:prstGeom>
+          <a:noFill/>
+        </p:spPr>
+        <p:txBody>
+          <a:bodyPr wrap="none">
+            <a:spAutoFit/>
+          </a:bodyPr>
+          <a:lstStyle/>
+          <a:p>
+            <a:pPr algn="l"/>
+            <a:r>
+              <a:rPr sz="700">
+                <a:solidFill>
+                  <a:srgbClr val="A0B4D2"/>
+                </a:solidFill>
+                <a:latin typeface="Consolas"/>
+              </a:rPr>
+              <a:t>FKB Campus  ·  M24</a:t>
+            </a:r>
+          </a:p>
+        </p:txBody>
+      </p:sp>
+    </p:spTree>
+  </p:cSld>
+  <p:clrMapOvr>
+    <a:masterClrMapping/>
+  </p:clrMapOvr>
+</p:sld>
+</file>
+
+<file path=ppt/slides/slide18.xml><?xml version="1.0" encoding="utf-8"?>
+<p:sld xmlns:a="http://schemas.openxmlformats.org/drawingml/2006/main" xmlns:p="http://schemas.openxmlformats.org/presentationml/2006/main" xmlns:r="http://schemas.openxmlformats.org/officeDocument/2006/relationships">
+  <p:cSld>
+    <p:spTree>
+      <p:nvGrpSpPr>
+        <p:cNvPr id="1" name=""/>
+        <p:cNvGrpSpPr/>
+        <p:nvPr/>
+      </p:nvGrpSpPr>
+      <p:grpSpPr/>
+      <p:sp>
+        <p:nvSpPr>
+          <p:cNvPr id="2" name="Rectangle 1"/>
+          <p:cNvSpPr/>
+          <p:nvPr/>
+        </p:nvSpPr>
+        <p:spPr>
+          <a:xfrm>
+            <a:off x="0" y="0"/>
+            <a:ext cx="12188952" cy="6858000"/>
+          </a:xfrm>
+          <a:prstGeom prst="rect">
+            <a:avLst/>
+          </a:prstGeom>
+          <a:solidFill>
+            <a:srgbClr val="FFFFFF"/>
+          </a:solidFill>
+          <a:ln>
+            <a:noFill/>
+          </a:ln>
+        </p:spPr>
+        <p:style>
+          <a:lnRef idx="1">
+            <a:schemeClr val="accent1"/>
+          </a:lnRef>
+          <a:fillRef idx="3">
+            <a:schemeClr val="accent1"/>
+          </a:fillRef>
+          <a:effectRef idx="2">
+            <a:schemeClr val="accent1"/>
+          </a:effectRef>
+          <a:fontRef idx="minor">
+            <a:schemeClr val="lt1"/>
+          </a:fontRef>
+        </p:style>
+        <p:txBody>
+          <a:bodyPr rtlCol="0" anchor="ctr"/>
+          <a:lstStyle/>
+          <a:p>
+            <a:pPr algn="ctr"/>
+          </a:p>
+        </p:txBody>
+      </p:sp>
+      <p:sp>
+        <p:nvSpPr>
+          <p:cNvPr id="3" name="Rectangle 2"/>
+          <p:cNvSpPr/>
+          <p:nvPr/>
+        </p:nvSpPr>
+        <p:spPr>
+          <a:xfrm>
+            <a:off x="0" y="0"/>
+            <a:ext cx="12188952" cy="50292"/>
+          </a:xfrm>
+          <a:prstGeom prst="rect">
+            <a:avLst/>
+          </a:prstGeom>
+          <a:solidFill>
+            <a:srgbClr val="1F2C56"/>
+          </a:solidFill>
+          <a:ln>
+            <a:noFill/>
+          </a:ln>
+        </p:spPr>
+        <p:style>
+          <a:lnRef idx="1">
+            <a:schemeClr val="accent1"/>
+          </a:lnRef>
+          <a:fillRef idx="3">
+            <a:schemeClr val="accent1"/>
+          </a:fillRef>
+          <a:effectRef idx="2">
+            <a:schemeClr val="accent1"/>
+          </a:effectRef>
+          <a:fontRef idx="minor">
+            <a:schemeClr val="lt1"/>
+          </a:fontRef>
+        </p:style>
+        <p:txBody>
+          <a:bodyPr rtlCol="0" anchor="ctr"/>
+          <a:lstStyle/>
+          <a:p>
+            <a:pPr algn="ctr"/>
+          </a:p>
+        </p:txBody>
+      </p:sp>
+      <p:sp>
+        <p:nvSpPr>
+          <p:cNvPr id="4" name="TextBox 3"/>
+          <p:cNvSpPr txBox="1"/>
+          <p:nvPr/>
+        </p:nvSpPr>
+        <p:spPr>
+          <a:xfrm>
+            <a:off x="685800" y="109728"/>
+            <a:ext cx="10817352" cy="228600"/>
+          </a:xfrm>
+          <a:prstGeom prst="rect">
+            <a:avLst/>
+          </a:prstGeom>
+          <a:noFill/>
+        </p:spPr>
+        <p:txBody>
+          <a:bodyPr wrap="none">
+            <a:spAutoFit/>
+          </a:bodyPr>
+          <a:lstStyle/>
+          <a:p>
+            <a:pPr algn="l"/>
+            <a:r>
+              <a:rPr sz="750">
+                <a:solidFill>
+                  <a:srgbClr val="78808C"/>
+                </a:solidFill>
+                <a:latin typeface="Consolas"/>
+              </a:rPr>
+              <a:t>M24  ·  SCHAUBILD</a:t>
+            </a:r>
+          </a:p>
+        </p:txBody>
+      </p:sp>
+      <p:sp>
+        <p:nvSpPr>
+          <p:cNvPr id="5" name="TextBox 4"/>
+          <p:cNvSpPr txBox="1"/>
+          <p:nvPr/>
+        </p:nvSpPr>
+        <p:spPr>
+          <a:xfrm>
+            <a:off x="685800" y="502920"/>
+            <a:ext cx="10817352" cy="594360"/>
+          </a:xfrm>
+          <a:prstGeom prst="rect">
+            <a:avLst/>
+          </a:prstGeom>
+          <a:noFill/>
+        </p:spPr>
+        <p:txBody>
+          <a:bodyPr wrap="square">
+            <a:spAutoFit/>
+          </a:bodyPr>
+          <a:lstStyle/>
+          <a:p>
+            <a:pPr algn="l"/>
+            <a:r>
+              <a:rPr sz="2000" b="1" i="0">
+                <a:solidFill>
+                  <a:srgbClr val="1F2C56"/>
+                </a:solidFill>
+                <a:latin typeface="Arial"/>
+              </a:rPr>
+              <a:t>Handlungsempfehlung: Nachfolge- und Bewertungssignale</a:t>
+            </a:r>
+          </a:p>
+        </p:txBody>
+      </p:sp>
+      <p:sp>
+        <p:nvSpPr>
+          <p:cNvPr id="6" name="Rectangle 5"/>
+          <p:cNvSpPr/>
+          <p:nvPr/>
+        </p:nvSpPr>
+        <p:spPr>
+          <a:xfrm>
+            <a:off x="685800" y="1143000"/>
+            <a:ext cx="10817352" cy="25400"/>
+          </a:xfrm>
+          <a:prstGeom prst="rect">
+            <a:avLst/>
+          </a:prstGeom>
+          <a:solidFill>
+            <a:srgbClr val="D9C089"/>
+          </a:solidFill>
+          <a:ln>
+            <a:noFill/>
+          </a:ln>
+        </p:spPr>
+        <p:style>
+          <a:lnRef idx="1">
+            <a:schemeClr val="accent1"/>
+          </a:lnRef>
+          <a:fillRef idx="3">
+            <a:schemeClr val="accent1"/>
+          </a:fillRef>
+          <a:effectRef idx="2">
+            <a:schemeClr val="accent1"/>
+          </a:effectRef>
+          <a:fontRef idx="minor">
+            <a:schemeClr val="lt1"/>
+          </a:fontRef>
+        </p:style>
+        <p:txBody>
+          <a:bodyPr rtlCol="0" anchor="ctr"/>
+          <a:lstStyle/>
+          <a:p>
+            <a:pPr algn="ctr"/>
+          </a:p>
+        </p:txBody>
+      </p:sp>
+      <p:pic>
+        <p:nvPicPr>
+          <p:cNvPr id="7" name="Picture 6" descr="image.png"/>
+          <p:cNvPicPr>
+            <a:picLocks noChangeAspect="1"/>
+          </p:cNvPicPr>
+          <p:nvPr/>
+        </p:nvPicPr>
+        <p:blipFill>
+          <a:blip r:embed="rId2"/>
+          <a:stretch>
+            <a:fillRect/>
+          </a:stretch>
+        </p:blipFill>
+        <p:spPr>
+          <a:xfrm>
+            <a:off x="2303489" y="1325880"/>
+            <a:ext cx="7581973" cy="4937760"/>
+          </a:xfrm>
+          <a:prstGeom prst="rect">
+            <a:avLst/>
+          </a:prstGeom>
+        </p:spPr>
+      </p:pic>
+      <p:sp>
+        <p:nvSpPr>
+          <p:cNvPr id="8" name="Rectangle 7"/>
+          <p:cNvSpPr/>
+          <p:nvPr/>
+        </p:nvSpPr>
+        <p:spPr>
+          <a:xfrm>
+            <a:off x="0" y="6510528"/>
+            <a:ext cx="12188952" cy="347472"/>
+          </a:xfrm>
+          <a:prstGeom prst="rect">
+            <a:avLst/>
+          </a:prstGeom>
+          <a:solidFill>
+            <a:srgbClr val="0A1937"/>
+          </a:solidFill>
+          <a:ln>
+            <a:noFill/>
+          </a:ln>
+        </p:spPr>
+        <p:style>
+          <a:lnRef idx="1">
+            <a:schemeClr val="accent1"/>
+          </a:lnRef>
+          <a:fillRef idx="3">
+            <a:schemeClr val="accent1"/>
+          </a:fillRef>
+          <a:effectRef idx="2">
+            <a:schemeClr val="accent1"/>
+          </a:effectRef>
+          <a:fontRef idx="minor">
+            <a:schemeClr val="lt1"/>
+          </a:fontRef>
+        </p:style>
+        <p:txBody>
+          <a:bodyPr rtlCol="0" anchor="ctr"/>
+          <a:lstStyle/>
+          <a:p>
+            <a:pPr algn="ctr"/>
+          </a:p>
+        </p:txBody>
+      </p:sp>
+      <p:sp>
+        <p:nvSpPr>
+          <p:cNvPr id="9" name="TextBox 8"/>
+          <p:cNvSpPr txBox="1"/>
+          <p:nvPr/>
+        </p:nvSpPr>
+        <p:spPr>
+          <a:xfrm>
+            <a:off x="685800" y="6583680"/>
+            <a:ext cx="6490411" cy="256032"/>
+          </a:xfrm>
+          <a:prstGeom prst="rect">
+            <a:avLst/>
+          </a:prstGeom>
+          <a:noFill/>
+        </p:spPr>
+        <p:txBody>
+          <a:bodyPr wrap="none">
+            <a:spAutoFit/>
+          </a:bodyPr>
+          <a:lstStyle/>
+          <a:p>
+            <a:pPr algn="l"/>
+            <a:r>
+              <a:rPr sz="700">
+                <a:solidFill>
+                  <a:srgbClr val="A0B4D2"/>
+                </a:solidFill>
+                <a:latin typeface="Consolas"/>
+              </a:rPr>
+              <a:t>FKB Campus  ·  M24</a:t>
+            </a:r>
+          </a:p>
+        </p:txBody>
+      </p:sp>
+      <p:sp>
+        <p:nvSpPr>
+          <p:cNvPr id="10" name="TextBox 9"/>
+          <p:cNvSpPr txBox="1"/>
+          <p:nvPr/>
+        </p:nvSpPr>
+        <p:spPr>
+          <a:xfrm>
+            <a:off x="7176211" y="6583680"/>
+            <a:ext cx="4326940" cy="256032"/>
+          </a:xfrm>
+          <a:prstGeom prst="rect">
+            <a:avLst/>
+          </a:prstGeom>
+          <a:noFill/>
+        </p:spPr>
+        <p:txBody>
+          <a:bodyPr wrap="none">
+            <a:spAutoFit/>
+          </a:bodyPr>
+          <a:lstStyle/>
+          <a:p>
+            <a:pPr algn="r"/>
+            <a:r>
+              <a:rPr sz="700">
+                <a:solidFill>
+                  <a:srgbClr val="A0B4D2"/>
+                </a:solidFill>
+                <a:latin typeface="Consolas"/>
+              </a:rPr>
+              <a:t>Schaubild</a:t>
+            </a:r>
+          </a:p>
+        </p:txBody>
+      </p:sp>
+    </p:spTree>
+  </p:cSld>
+  <p:clrMapOvr>
+    <a:masterClrMapping/>
+  </p:clrMapOvr>
+</p:sld>
+</file>
+
+<file path=ppt/slides/slide19.xml><?xml version="1.0" encoding="utf-8"?>
+<p:sld xmlns:a="http://schemas.openxmlformats.org/drawingml/2006/main" xmlns:p="http://schemas.openxmlformats.org/presentationml/2006/main" xmlns:r="http://schemas.openxmlformats.org/officeDocument/2006/relationships">
+  <p:cSld>
+    <p:spTree>
+      <p:nvGrpSpPr>
+        <p:cNvPr id="1" name=""/>
+        <p:cNvGrpSpPr/>
+        <p:nvPr/>
+      </p:nvGrpSpPr>
+      <p:grpSpPr/>
+      <p:sp>
+        <p:nvSpPr>
+          <p:cNvPr id="2" name="Rectangle 1"/>
+          <p:cNvSpPr/>
+          <p:nvPr/>
+        </p:nvSpPr>
+        <p:spPr>
+          <a:xfrm>
+            <a:off x="0" y="0"/>
+            <a:ext cx="12188952" cy="6858000"/>
+          </a:xfrm>
+          <a:prstGeom prst="rect">
+            <a:avLst/>
+          </a:prstGeom>
+          <a:solidFill>
+            <a:srgbClr val="EDEDF3"/>
+          </a:solidFill>
+          <a:ln>
+            <a:noFill/>
+          </a:ln>
+        </p:spPr>
+        <p:style>
+          <a:lnRef idx="1">
+            <a:schemeClr val="accent1"/>
+          </a:lnRef>
+          <a:fillRef idx="3">
+            <a:schemeClr val="accent1"/>
+          </a:fillRef>
+          <a:effectRef idx="2">
+            <a:schemeClr val="accent1"/>
+          </a:effectRef>
+          <a:fontRef idx="minor">
+            <a:schemeClr val="lt1"/>
+          </a:fontRef>
+        </p:style>
+        <p:txBody>
+          <a:bodyPr rtlCol="0" anchor="ctr"/>
+          <a:lstStyle/>
+          <a:p>
+            <a:pPr algn="ctr"/>
+          </a:p>
+        </p:txBody>
+      </p:sp>
+      <p:sp>
+        <p:nvSpPr>
+          <p:cNvPr id="3" name="Rectangle 2"/>
+          <p:cNvSpPr/>
+          <p:nvPr/>
+        </p:nvSpPr>
+        <p:spPr>
+          <a:xfrm>
+            <a:off x="0" y="0"/>
+            <a:ext cx="12188952" cy="50292"/>
+          </a:xfrm>
+          <a:prstGeom prst="rect">
+            <a:avLst/>
+          </a:prstGeom>
+          <a:solidFill>
+            <a:srgbClr val="1F2C56"/>
+          </a:solidFill>
+          <a:ln>
+            <a:noFill/>
+          </a:ln>
+        </p:spPr>
+        <p:style>
+          <a:lnRef idx="1">
+            <a:schemeClr val="accent1"/>
+          </a:lnRef>
+          <a:fillRef idx="3">
+            <a:schemeClr val="accent1"/>
+          </a:fillRef>
+          <a:effectRef idx="2">
+            <a:schemeClr val="accent1"/>
+          </a:effectRef>
+          <a:fontRef idx="minor">
+            <a:schemeClr val="lt1"/>
+          </a:fontRef>
+        </p:style>
+        <p:txBody>
+          <a:bodyPr rtlCol="0" anchor="ctr"/>
+          <a:lstStyle/>
+          <a:p>
+            <a:pPr algn="ctr"/>
+          </a:p>
+        </p:txBody>
+      </p:sp>
+      <p:sp>
+        <p:nvSpPr>
+          <p:cNvPr id="4" name="TextBox 3"/>
+          <p:cNvSpPr txBox="1"/>
+          <p:nvPr/>
+        </p:nvSpPr>
+        <p:spPr>
+          <a:xfrm>
+            <a:off x="685800" y="109728"/>
+            <a:ext cx="10817352" cy="228600"/>
+          </a:xfrm>
+          <a:prstGeom prst="rect">
+            <a:avLst/>
+          </a:prstGeom>
+          <a:noFill/>
+        </p:spPr>
+        <p:txBody>
+          <a:bodyPr wrap="none">
+            <a:spAutoFit/>
+          </a:bodyPr>
+          <a:lstStyle/>
+          <a:p>
+            <a:pPr algn="l"/>
+            <a:r>
+              <a:rPr sz="750">
+                <a:solidFill>
+                  <a:srgbClr val="78808C"/>
+                </a:solidFill>
+                <a:latin typeface="Consolas"/>
+              </a:rPr>
+              <a:t>M24  ·  INHALT</a:t>
+            </a:r>
+          </a:p>
+        </p:txBody>
+      </p:sp>
+      <p:sp>
+        <p:nvSpPr>
+          <p:cNvPr id="5" name="Rectangle 4"/>
+          <p:cNvSpPr/>
+          <p:nvPr/>
+        </p:nvSpPr>
+        <p:spPr>
+          <a:xfrm>
+            <a:off x="0" y="1234440"/>
+            <a:ext cx="12188952" cy="12700"/>
+          </a:xfrm>
+          <a:prstGeom prst="rect">
+            <a:avLst/>
+          </a:prstGeom>
+          <a:solidFill>
+            <a:srgbClr val="D8DFE4"/>
+          </a:solidFill>
+          <a:ln>
+            <a:noFill/>
+          </a:ln>
+        </p:spPr>
+        <p:style>
+          <a:lnRef idx="1">
+            <a:schemeClr val="accent1"/>
+          </a:lnRef>
+          <a:fillRef idx="3">
+            <a:schemeClr val="accent1"/>
+          </a:fillRef>
+          <a:effectRef idx="2">
+            <a:schemeClr val="accent1"/>
+          </a:effectRef>
+          <a:fontRef idx="minor">
+            <a:schemeClr val="lt1"/>
+          </a:fontRef>
+        </p:style>
+        <p:txBody>
+          <a:bodyPr rtlCol="0" anchor="ctr"/>
+          <a:lstStyle/>
+          <a:p>
+            <a:pPr algn="ctr"/>
+          </a:p>
+        </p:txBody>
+      </p:sp>
+      <p:sp>
+        <p:nvSpPr>
+          <p:cNvPr id="6" name="Rectangle 5"/>
+          <p:cNvSpPr/>
+          <p:nvPr/>
+        </p:nvSpPr>
+        <p:spPr>
+          <a:xfrm>
+            <a:off x="685800" y="502920"/>
+            <a:ext cx="36576" cy="658368"/>
+          </a:xfrm>
+          <a:prstGeom prst="rect">
+            <a:avLst/>
+          </a:prstGeom>
+          <a:solidFill>
+            <a:srgbClr val="D9C089"/>
+          </a:solidFill>
+          <a:ln>
+            <a:noFill/>
+          </a:ln>
+        </p:spPr>
+        <p:style>
+          <a:lnRef idx="1">
+            <a:schemeClr val="accent1"/>
+          </a:lnRef>
+          <a:fillRef idx="3">
+            <a:schemeClr val="accent1"/>
+          </a:fillRef>
+          <a:effectRef idx="2">
+            <a:schemeClr val="accent1"/>
+          </a:effectRef>
+          <a:fontRef idx="minor">
+            <a:schemeClr val="lt1"/>
+          </a:fontRef>
+        </p:style>
+        <p:txBody>
+          <a:bodyPr rtlCol="0" anchor="ctr"/>
+          <a:lstStyle/>
+          <a:p>
+            <a:pPr algn="ctr"/>
+          </a:p>
+        </p:txBody>
+      </p:sp>
+      <p:sp>
+        <p:nvSpPr>
+          <p:cNvPr id="7" name="TextBox 6"/>
+          <p:cNvSpPr txBox="1"/>
+          <p:nvPr/>
+        </p:nvSpPr>
+        <p:spPr>
+          <a:xfrm>
+            <a:off x="813816" y="502920"/>
+            <a:ext cx="10634472" cy="685800"/>
+          </a:xfrm>
+          <a:prstGeom prst="rect">
+            <a:avLst/>
+          </a:prstGeom>
+          <a:noFill/>
+        </p:spPr>
+        <p:txBody>
+          <a:bodyPr wrap="square">
+            <a:spAutoFit/>
+          </a:bodyPr>
+          <a:lstStyle/>
+          <a:p>
+            <a:pPr algn="l"/>
+            <a:r>
+              <a:rPr sz="2400" b="1" i="0">
+                <a:solidFill>
+                  <a:srgbClr val="1F2C56"/>
+                </a:solidFill>
+                <a:latin typeface="Arial"/>
+              </a:rPr>
+              <a:t>Prinzip dieses Moduls</a:t>
+            </a:r>
+          </a:p>
+        </p:txBody>
+      </p:sp>
+      <p:sp>
+        <p:nvSpPr>
+          <p:cNvPr id="8" name="TextBox 7"/>
+          <p:cNvSpPr txBox="1"/>
+          <p:nvPr/>
+        </p:nvSpPr>
+        <p:spPr>
+          <a:xfrm>
+            <a:off x="685800" y="1417320"/>
+            <a:ext cx="10817352" cy="4892040"/>
+          </a:xfrm>
+          <a:prstGeom prst="rect">
+            <a:avLst/>
+          </a:prstGeom>
+          <a:noFill/>
+        </p:spPr>
+        <p:txBody>
+          <a:bodyPr wrap="square" anchor="ctr">
+            <a:spAutoFit/>
+          </a:bodyPr>
+          <a:lstStyle/>
+          <a:p>
+            <a:pPr marL="177800" indent="-177800">
+              <a:spcBef>
+                <a:spcPts val="600"/>
+              </a:spcBef>
+              <a:spcAft>
+                <a:spcPts val="200"/>
+              </a:spcAft>
+            </a:pPr>
+            <a:r>
+              <a:rPr sz="1200" i="1">
+                <a:solidFill>
+                  <a:srgbClr val="3D5466"/>
+                </a:solidFill>
+                <a:latin typeface="Arial"/>
+              </a:rPr>
+              <a:t>→  Kommuniziere eine Bandbreite, keine Scheingenauigkeit.</a:t>
+            </a:r>
+          </a:p>
+          <a:p>
+            <a:pPr marL="190500" indent="-190500">
+              <a:spcBef>
+                <a:spcPts val="400"/>
+              </a:spcBef>
+              <a:spcAft>
+                <a:spcPts val="200"/>
+              </a:spcAft>
+            </a:pPr>
+            <a:r>
+              <a:rPr sz="1300">
+                <a:solidFill>
+                  <a:srgbClr val="3D5466"/>
+                </a:solidFill>
+                <a:latin typeface="Arial"/>
+              </a:rPr>
+              <a:t>▸  Ein Unternehmenswert ist ein Urteil, kein Messwert – Ehrlichkeit über die Spanne schafft mehr Vertrauen als falsche Präzision.</a:t>
             </a:r>
           </a:p>
         </p:txBody>
@@ -5195,6 +8996,424 @@
 </p:sld>
 </file>
 
+<file path=ppt/slides/slide20.xml><?xml version="1.0" encoding="utf-8"?>
+<p:sld xmlns:a="http://schemas.openxmlformats.org/drawingml/2006/main" xmlns:p="http://schemas.openxmlformats.org/presentationml/2006/main" xmlns:r="http://schemas.openxmlformats.org/officeDocument/2006/relationships">
+  <p:cSld>
+    <p:spTree>
+      <p:nvGrpSpPr>
+        <p:cNvPr id="1" name=""/>
+        <p:cNvGrpSpPr/>
+        <p:nvPr/>
+      </p:nvGrpSpPr>
+      <p:grpSpPr/>
+      <p:sp>
+        <p:nvSpPr>
+          <p:cNvPr id="2" name="Rectangle 1"/>
+          <p:cNvSpPr/>
+          <p:nvPr/>
+        </p:nvSpPr>
+        <p:spPr>
+          <a:xfrm>
+            <a:off x="0" y="0"/>
+            <a:ext cx="12188952" cy="6858000"/>
+          </a:xfrm>
+          <a:prstGeom prst="rect">
+            <a:avLst/>
+          </a:prstGeom>
+          <a:solidFill>
+            <a:srgbClr val="EDEDF3"/>
+          </a:solidFill>
+          <a:ln>
+            <a:noFill/>
+          </a:ln>
+        </p:spPr>
+        <p:style>
+          <a:lnRef idx="1">
+            <a:schemeClr val="accent1"/>
+          </a:lnRef>
+          <a:fillRef idx="3">
+            <a:schemeClr val="accent1"/>
+          </a:fillRef>
+          <a:effectRef idx="2">
+            <a:schemeClr val="accent1"/>
+          </a:effectRef>
+          <a:fontRef idx="minor">
+            <a:schemeClr val="lt1"/>
+          </a:fontRef>
+        </p:style>
+        <p:txBody>
+          <a:bodyPr rtlCol="0" anchor="ctr"/>
+          <a:lstStyle/>
+          <a:p>
+            <a:pPr algn="ctr"/>
+          </a:p>
+        </p:txBody>
+      </p:sp>
+      <p:sp>
+        <p:nvSpPr>
+          <p:cNvPr id="3" name="Rectangle 2"/>
+          <p:cNvSpPr/>
+          <p:nvPr/>
+        </p:nvSpPr>
+        <p:spPr>
+          <a:xfrm>
+            <a:off x="0" y="0"/>
+            <a:ext cx="12188952" cy="50292"/>
+          </a:xfrm>
+          <a:prstGeom prst="rect">
+            <a:avLst/>
+          </a:prstGeom>
+          <a:solidFill>
+            <a:srgbClr val="1F2C56"/>
+          </a:solidFill>
+          <a:ln>
+            <a:noFill/>
+          </a:ln>
+        </p:spPr>
+        <p:style>
+          <a:lnRef idx="1">
+            <a:schemeClr val="accent1"/>
+          </a:lnRef>
+          <a:fillRef idx="3">
+            <a:schemeClr val="accent1"/>
+          </a:fillRef>
+          <a:effectRef idx="2">
+            <a:schemeClr val="accent1"/>
+          </a:effectRef>
+          <a:fontRef idx="minor">
+            <a:schemeClr val="lt1"/>
+          </a:fontRef>
+        </p:style>
+        <p:txBody>
+          <a:bodyPr rtlCol="0" anchor="ctr"/>
+          <a:lstStyle/>
+          <a:p>
+            <a:pPr algn="ctr"/>
+          </a:p>
+        </p:txBody>
+      </p:sp>
+      <p:sp>
+        <p:nvSpPr>
+          <p:cNvPr id="4" name="TextBox 3"/>
+          <p:cNvSpPr txBox="1"/>
+          <p:nvPr/>
+        </p:nvSpPr>
+        <p:spPr>
+          <a:xfrm>
+            <a:off x="685800" y="109728"/>
+            <a:ext cx="10817352" cy="228600"/>
+          </a:xfrm>
+          <a:prstGeom prst="rect">
+            <a:avLst/>
+          </a:prstGeom>
+          <a:noFill/>
+        </p:spPr>
+        <p:txBody>
+          <a:bodyPr wrap="none">
+            <a:spAutoFit/>
+          </a:bodyPr>
+          <a:lstStyle/>
+          <a:p>
+            <a:pPr algn="l"/>
+            <a:r>
+              <a:rPr sz="750">
+                <a:solidFill>
+                  <a:srgbClr val="78808C"/>
+                </a:solidFill>
+                <a:latin typeface="Consolas"/>
+              </a:rPr>
+              <a:t>M24  ·  INHALT</a:t>
+            </a:r>
+          </a:p>
+        </p:txBody>
+      </p:sp>
+      <p:sp>
+        <p:nvSpPr>
+          <p:cNvPr id="5" name="Rectangle 4"/>
+          <p:cNvSpPr/>
+          <p:nvPr/>
+        </p:nvSpPr>
+        <p:spPr>
+          <a:xfrm>
+            <a:off x="0" y="1234440"/>
+            <a:ext cx="12188952" cy="12700"/>
+          </a:xfrm>
+          <a:prstGeom prst="rect">
+            <a:avLst/>
+          </a:prstGeom>
+          <a:solidFill>
+            <a:srgbClr val="D8DFE4"/>
+          </a:solidFill>
+          <a:ln>
+            <a:noFill/>
+          </a:ln>
+        </p:spPr>
+        <p:style>
+          <a:lnRef idx="1">
+            <a:schemeClr val="accent1"/>
+          </a:lnRef>
+          <a:fillRef idx="3">
+            <a:schemeClr val="accent1"/>
+          </a:fillRef>
+          <a:effectRef idx="2">
+            <a:schemeClr val="accent1"/>
+          </a:effectRef>
+          <a:fontRef idx="minor">
+            <a:schemeClr val="lt1"/>
+          </a:fontRef>
+        </p:style>
+        <p:txBody>
+          <a:bodyPr rtlCol="0" anchor="ctr"/>
+          <a:lstStyle/>
+          <a:p>
+            <a:pPr algn="ctr"/>
+          </a:p>
+        </p:txBody>
+      </p:sp>
+      <p:sp>
+        <p:nvSpPr>
+          <p:cNvPr id="6" name="Rectangle 5"/>
+          <p:cNvSpPr/>
+          <p:nvPr/>
+        </p:nvSpPr>
+        <p:spPr>
+          <a:xfrm>
+            <a:off x="685800" y="502920"/>
+            <a:ext cx="36576" cy="658368"/>
+          </a:xfrm>
+          <a:prstGeom prst="rect">
+            <a:avLst/>
+          </a:prstGeom>
+          <a:solidFill>
+            <a:srgbClr val="D9C089"/>
+          </a:solidFill>
+          <a:ln>
+            <a:noFill/>
+          </a:ln>
+        </p:spPr>
+        <p:style>
+          <a:lnRef idx="1">
+            <a:schemeClr val="accent1"/>
+          </a:lnRef>
+          <a:fillRef idx="3">
+            <a:schemeClr val="accent1"/>
+          </a:fillRef>
+          <a:effectRef idx="2">
+            <a:schemeClr val="accent1"/>
+          </a:effectRef>
+          <a:fontRef idx="minor">
+            <a:schemeClr val="lt1"/>
+          </a:fontRef>
+        </p:style>
+        <p:txBody>
+          <a:bodyPr rtlCol="0" anchor="ctr"/>
+          <a:lstStyle/>
+          <a:p>
+            <a:pPr algn="ctr"/>
+          </a:p>
+        </p:txBody>
+      </p:sp>
+      <p:sp>
+        <p:nvSpPr>
+          <p:cNvPr id="7" name="TextBox 6"/>
+          <p:cNvSpPr txBox="1"/>
+          <p:nvPr/>
+        </p:nvSpPr>
+        <p:spPr>
+          <a:xfrm>
+            <a:off x="813816" y="502920"/>
+            <a:ext cx="10634472" cy="685800"/>
+          </a:xfrm>
+          <a:prstGeom prst="rect">
+            <a:avLst/>
+          </a:prstGeom>
+          <a:noFill/>
+        </p:spPr>
+        <p:txBody>
+          <a:bodyPr wrap="square">
+            <a:spAutoFit/>
+          </a:bodyPr>
+          <a:lstStyle/>
+          <a:p>
+            <a:pPr algn="l"/>
+            <a:r>
+              <a:rPr sz="2400" b="1" i="0">
+                <a:solidFill>
+                  <a:srgbClr val="1F2C56"/>
+                </a:solidFill>
+                <a:latin typeface="Arial"/>
+              </a:rPr>
+              <a:t>Reflexion und Selbstcheck</a:t>
+            </a:r>
+          </a:p>
+        </p:txBody>
+      </p:sp>
+      <p:sp>
+        <p:nvSpPr>
+          <p:cNvPr id="8" name="TextBox 7"/>
+          <p:cNvSpPr txBox="1"/>
+          <p:nvPr/>
+        </p:nvSpPr>
+        <p:spPr>
+          <a:xfrm>
+            <a:off x="685800" y="1417320"/>
+            <a:ext cx="10817352" cy="4892040"/>
+          </a:xfrm>
+          <a:prstGeom prst="rect">
+            <a:avLst/>
+          </a:prstGeom>
+          <a:noFill/>
+        </p:spPr>
+        <p:txBody>
+          <a:bodyPr wrap="square" anchor="ctr">
+            <a:spAutoFit/>
+          </a:bodyPr>
+          <a:lstStyle/>
+          <a:p>
+            <a:pPr marL="190500" indent="-190500">
+              <a:spcBef>
+                <a:spcPts val="400"/>
+              </a:spcBef>
+              <a:spcAft>
+                <a:spcPts val="200"/>
+              </a:spcAft>
+            </a:pPr>
+            <a:r>
+              <a:rPr sz="1300">
+                <a:solidFill>
+                  <a:srgbClr val="3D5466"/>
+                </a:solidFill>
+                <a:latin typeface="Arial"/>
+              </a:rPr>
+              <a:t>▸  Welcher Inhaber 60+ in Ihrem Bestand hat die Nachfolge noch nicht geklärt?</a:t>
+            </a:r>
+          </a:p>
+          <a:p>
+            <a:pPr marL="190500" indent="-190500">
+              <a:spcBef>
+                <a:spcPts val="400"/>
+              </a:spcBef>
+              <a:spcAft>
+                <a:spcPts val="200"/>
+              </a:spcAft>
+            </a:pPr>
+            <a:r>
+              <a:rPr sz="1300">
+                <a:solidFill>
+                  <a:srgbClr val="3D5466"/>
+                </a:solidFill>
+                <a:latin typeface="Arial"/>
+              </a:rPr>
+              <a:t>▸  Wie kommunizieren Sie eine Wertbandbreite, ohne in Scheingenauigkeit zu verfallen?</a:t>
+            </a:r>
+          </a:p>
+          <a:p>
+            <a:pPr marL="190500" indent="-190500">
+              <a:spcBef>
+                <a:spcPts val="400"/>
+              </a:spcBef>
+              <a:spcAft>
+                <a:spcPts val="200"/>
+              </a:spcAft>
+            </a:pPr>
+            <a:r>
+              <a:rPr sz="1300">
+                <a:solidFill>
+                  <a:srgbClr val="3D5466"/>
+                </a:solidFill>
+                <a:latin typeface="Arial"/>
+              </a:rPr>
+              <a:t>▸  Bei welchem Unternehmen senkt die Personenabhängigkeit den übertragbaren Wert am stärksten?</a:t>
+            </a:r>
+          </a:p>
+        </p:txBody>
+      </p:sp>
+      <p:sp>
+        <p:nvSpPr>
+          <p:cNvPr id="9" name="Rectangle 8"/>
+          <p:cNvSpPr/>
+          <p:nvPr/>
+        </p:nvSpPr>
+        <p:spPr>
+          <a:xfrm>
+            <a:off x="0" y="6510528"/>
+            <a:ext cx="12188952" cy="347472"/>
+          </a:xfrm>
+          <a:prstGeom prst="rect">
+            <a:avLst/>
+          </a:prstGeom>
+          <a:solidFill>
+            <a:srgbClr val="0A1937"/>
+          </a:solidFill>
+          <a:ln>
+            <a:noFill/>
+          </a:ln>
+        </p:spPr>
+        <p:style>
+          <a:lnRef idx="1">
+            <a:schemeClr val="accent1"/>
+          </a:lnRef>
+          <a:fillRef idx="3">
+            <a:schemeClr val="accent1"/>
+          </a:fillRef>
+          <a:effectRef idx="2">
+            <a:schemeClr val="accent1"/>
+          </a:effectRef>
+          <a:fontRef idx="minor">
+            <a:schemeClr val="lt1"/>
+          </a:fontRef>
+        </p:style>
+        <p:txBody>
+          <a:bodyPr rtlCol="0" anchor="ctr"/>
+          <a:lstStyle/>
+          <a:p>
+            <a:pPr algn="ctr"/>
+          </a:p>
+        </p:txBody>
+      </p:sp>
+      <p:sp>
+        <p:nvSpPr>
+          <p:cNvPr id="10" name="TextBox 9"/>
+          <p:cNvSpPr txBox="1"/>
+          <p:nvPr/>
+        </p:nvSpPr>
+        <p:spPr>
+          <a:xfrm>
+            <a:off x="685800" y="6583680"/>
+            <a:ext cx="6490411" cy="256032"/>
+          </a:xfrm>
+          <a:prstGeom prst="rect">
+            <a:avLst/>
+          </a:prstGeom>
+          <a:noFill/>
+        </p:spPr>
+        <p:txBody>
+          <a:bodyPr wrap="none">
+            <a:spAutoFit/>
+          </a:bodyPr>
+          <a:lstStyle/>
+          <a:p>
+            <a:pPr algn="l"/>
+            <a:r>
+              <a:rPr sz="700">
+                <a:solidFill>
+                  <a:srgbClr val="A0B4D2"/>
+                </a:solidFill>
+                <a:latin typeface="Consolas"/>
+              </a:rPr>
+              <a:t>FKB Campus  ·  M24</a:t>
+            </a:r>
+          </a:p>
+        </p:txBody>
+      </p:sp>
+    </p:spTree>
+  </p:cSld>
+  <p:clrMapOvr>
+    <a:masterClrMapping/>
+  </p:clrMapOvr>
+</p:sld>
+</file>
+
 <file path=ppt/slides/slide3.xml><?xml version="1.0" encoding="utf-8"?>
 <p:sld xmlns:a="http://schemas.openxmlformats.org/drawingml/2006/main" xmlns:p="http://schemas.openxmlformats.org/presentationml/2006/main" xmlns:r="http://schemas.openxmlformats.org/officeDocument/2006/relationships">
   <p:cSld>
@@ -6331,7 +10550,7 @@
             <a:avLst/>
           </a:prstGeom>
           <a:solidFill>
-            <a:srgbClr val="EDEDF3"/>
+            <a:srgbClr val="1F2C56"/>
           </a:solidFill>
           <a:ln>
             <a:noFill/>
@@ -6361,57 +10580,14 @@
       </p:sp>
       <p:sp>
         <p:nvSpPr>
-          <p:cNvPr id="3" name="Rectangle 2"/>
-          <p:cNvSpPr/>
-          <p:nvPr/>
-        </p:nvSpPr>
-        <p:spPr>
-          <a:xfrm>
-            <a:off x="0" y="0"/>
-            <a:ext cx="12188952" cy="50292"/>
-          </a:xfrm>
-          <a:prstGeom prst="rect">
-            <a:avLst/>
-          </a:prstGeom>
-          <a:solidFill>
-            <a:srgbClr val="1F2C56"/>
-          </a:solidFill>
-          <a:ln>
-            <a:noFill/>
-          </a:ln>
-        </p:spPr>
-        <p:style>
-          <a:lnRef idx="1">
-            <a:schemeClr val="accent1"/>
-          </a:lnRef>
-          <a:fillRef idx="3">
-            <a:schemeClr val="accent1"/>
-          </a:fillRef>
-          <a:effectRef idx="2">
-            <a:schemeClr val="accent1"/>
-          </a:effectRef>
-          <a:fontRef idx="minor">
-            <a:schemeClr val="lt1"/>
-          </a:fontRef>
-        </p:style>
-        <p:txBody>
-          <a:bodyPr rtlCol="0" anchor="ctr"/>
-          <a:lstStyle/>
-          <a:p>
-            <a:pPr algn="ctr"/>
-          </a:p>
-        </p:txBody>
-      </p:sp>
-      <p:sp>
-        <p:nvSpPr>
-          <p:cNvPr id="4" name="TextBox 3"/>
+          <p:cNvPr id="3" name="TextBox 2"/>
           <p:cNvSpPr txBox="1"/>
           <p:nvPr/>
         </p:nvSpPr>
         <p:spPr>
           <a:xfrm>
-            <a:off x="685800" y="109728"/>
-            <a:ext cx="10817352" cy="228600"/>
+            <a:off x="685800" y="2377440"/>
+            <a:ext cx="10817352" cy="365760"/>
           </a:xfrm>
           <a:prstGeom prst="rect">
             <a:avLst/>
@@ -6426,70 +10602,27 @@
           <a:p>
             <a:pPr algn="l"/>
             <a:r>
-              <a:rPr sz="750">
-                <a:solidFill>
-                  <a:srgbClr val="78808C"/>
+              <a:rPr sz="1200">
+                <a:solidFill>
+                  <a:srgbClr val="D9C089"/>
                 </a:solidFill>
                 <a:latin typeface="Consolas"/>
               </a:rPr>
-              <a:t>M24  ·  INHALT</a:t>
-            </a:r>
-          </a:p>
-        </p:txBody>
-      </p:sp>
-      <p:sp>
-        <p:nvSpPr>
-          <p:cNvPr id="5" name="Rectangle 4"/>
+              <a:t>09:00–09:20</a:t>
+            </a:r>
+          </a:p>
+        </p:txBody>
+      </p:sp>
+      <p:sp>
+        <p:nvSpPr>
+          <p:cNvPr id="4" name="Rectangle 3"/>
           <p:cNvSpPr/>
           <p:nvPr/>
         </p:nvSpPr>
         <p:spPr>
           <a:xfrm>
-            <a:off x="0" y="1234440"/>
-            <a:ext cx="12188952" cy="12700"/>
-          </a:xfrm>
-          <a:prstGeom prst="rect">
-            <a:avLst/>
-          </a:prstGeom>
-          <a:solidFill>
-            <a:srgbClr val="D8DFE4"/>
-          </a:solidFill>
-          <a:ln>
-            <a:noFill/>
-          </a:ln>
-        </p:spPr>
-        <p:style>
-          <a:lnRef idx="1">
-            <a:schemeClr val="accent1"/>
-          </a:lnRef>
-          <a:fillRef idx="3">
-            <a:schemeClr val="accent1"/>
-          </a:fillRef>
-          <a:effectRef idx="2">
-            <a:schemeClr val="accent1"/>
-          </a:effectRef>
-          <a:fontRef idx="minor">
-            <a:schemeClr val="lt1"/>
-          </a:fontRef>
-        </p:style>
-        <p:txBody>
-          <a:bodyPr rtlCol="0" anchor="ctr"/>
-          <a:lstStyle/>
-          <a:p>
-            <a:pPr algn="ctr"/>
-          </a:p>
-        </p:txBody>
-      </p:sp>
-      <p:sp>
-        <p:nvSpPr>
-          <p:cNvPr id="6" name="Rectangle 5"/>
-          <p:cNvSpPr/>
-          <p:nvPr/>
-        </p:nvSpPr>
-        <p:spPr>
-          <a:xfrm>
-            <a:off x="685800" y="502920"/>
-            <a:ext cx="36576" cy="658368"/>
+            <a:off x="685800" y="2788920"/>
+            <a:ext cx="548640" cy="38100"/>
           </a:xfrm>
           <a:prstGeom prst="rect">
             <a:avLst/>
@@ -6525,14 +10658,14 @@
       </p:sp>
       <p:sp>
         <p:nvSpPr>
-          <p:cNvPr id="7" name="TextBox 6"/>
+          <p:cNvPr id="5" name="TextBox 4"/>
           <p:cNvSpPr txBox="1"/>
           <p:nvPr/>
         </p:nvSpPr>
         <p:spPr>
           <a:xfrm>
-            <a:off x="813816" y="502920"/>
-            <a:ext cx="10634472" cy="685800"/>
+            <a:off x="685800" y="3017520"/>
+            <a:ext cx="10817352" cy="1463040"/>
           </a:xfrm>
           <a:prstGeom prst="rect">
             <a:avLst/>
@@ -6547,27 +10680,27 @@
           <a:p>
             <a:pPr algn="l"/>
             <a:r>
-              <a:rPr sz="2400" b="1" i="0">
-                <a:solidFill>
-                  <a:srgbClr val="1F2C56"/>
+              <a:rPr sz="4000" b="1" i="0">
+                <a:solidFill>
+                  <a:srgbClr val="FFFFFF"/>
                 </a:solidFill>
                 <a:latin typeface="Arial"/>
               </a:rPr>
-              <a:t>Theorie-Input: Die drei Verfahrensfamilien der Unternehmensbewertung</a:t>
-            </a:r>
-          </a:p>
-        </p:txBody>
-      </p:sp>
-      <p:sp>
-        <p:nvSpPr>
-          <p:cNvPr id="8" name="TextBox 7"/>
+              <a:t>Einstieg</a:t>
+            </a:r>
+          </a:p>
+        </p:txBody>
+      </p:sp>
+      <p:sp>
+        <p:nvSpPr>
+          <p:cNvPr id="6" name="TextBox 5"/>
           <p:cNvSpPr txBox="1"/>
           <p:nvPr/>
         </p:nvSpPr>
         <p:spPr>
           <a:xfrm>
-            <a:off x="685800" y="1417320"/>
-            <a:ext cx="10817352" cy="4892040"/>
+            <a:off x="685800" y="4480560"/>
+            <a:ext cx="8653881" cy="1280160"/>
           </a:xfrm>
           <a:prstGeom prst="rect">
             <a:avLst/>
@@ -6580,193 +10713,29 @@
           </a:bodyPr>
           <a:lstStyle/>
           <a:p>
-            <a:pPr>
-              <a:spcBef>
-                <a:spcPts val="1000"/>
-              </a:spcBef>
-              <a:spcAft>
-                <a:spcPts val="200"/>
-              </a:spcAft>
-            </a:pPr>
-            <a:r>
-              <a:rPr sz="800" b="1">
-                <a:solidFill>
-                  <a:srgbClr val="78808C"/>
-                </a:solidFill>
-                <a:latin typeface="Consolas"/>
-              </a:rPr>
-              <a:t>DIE DREI VERFAHRENSFAMILIEN</a:t>
-            </a:r>
-          </a:p>
-          <a:p>
-            <a:pPr marL="177800" indent="-177800">
-              <a:spcBef>
-                <a:spcPts val="600"/>
-              </a:spcBef>
-              <a:spcAft>
-                <a:spcPts val="200"/>
-              </a:spcAft>
-            </a:pPr>
-            <a:r>
-              <a:rPr sz="1200" i="1">
-                <a:solidFill>
-                  <a:srgbClr val="3D5466"/>
+            <a:pPr algn="l"/>
+            <a:r>
+              <a:rPr sz="1600" b="0" i="0">
+                <a:solidFill>
+                  <a:srgbClr val="C8D2E6"/>
                 </a:solidFill>
                 <a:latin typeface="Arial"/>
               </a:rPr>
-              <a:t>→  Begriff: Earn-out</a:t>
-            </a:r>
-          </a:p>
-          <a:p>
-            <a:pPr>
-              <a:spcBef>
-                <a:spcPts val="1000"/>
-              </a:spcBef>
-              <a:spcAft>
-                <a:spcPts val="200"/>
-              </a:spcAft>
-            </a:pPr>
-            <a:r>
-              <a:rPr sz="800" b="1">
-                <a:solidFill>
-                  <a:srgbClr val="78808C"/>
-                </a:solidFill>
-                <a:latin typeface="Consolas"/>
-              </a:rPr>
-              <a:t>DIE DREI KMU-KORREKTUREN</a:t>
-            </a:r>
-          </a:p>
-          <a:p>
-            <a:pPr marL="190500" indent="-190500">
-              <a:spcBef>
-                <a:spcPts val="400"/>
-              </a:spcBef>
-              <a:spcAft>
-                <a:spcPts val="200"/>
-              </a:spcAft>
-            </a:pPr>
-            <a:r>
-              <a:rPr sz="1300">
-                <a:solidFill>
-                  <a:srgbClr val="3D5466"/>
-                </a:solidFill>
-                <a:latin typeface="Arial"/>
-              </a:rPr>
-              <a:t>▸  Bevor ein mittelständisches Ergebnis bewertet werden kann, muss es normalisiert werden. Drei Korrekturen sind fast immer nötig:</a:t>
-            </a:r>
-          </a:p>
-          <a:p>
-            <a:pPr marL="190500" indent="-190500">
-              <a:spcBef>
-                <a:spcPts val="400"/>
-              </a:spcBef>
-              <a:spcAft>
-                <a:spcPts val="200"/>
-              </a:spcAft>
-            </a:pPr>
-            <a:r>
-              <a:rPr sz="1300">
-                <a:solidFill>
-                  <a:srgbClr val="3D5466"/>
-                </a:solidFill>
-                <a:latin typeface="Arial"/>
-              </a:rPr>
-              <a:t>▸  Kalkulatorischer Unternehmerlohn: Der Gesellschafter-Geschäftsführer entnimmt häufig zu wenig oder zu viel. Für die Bewertung wird ein marktüblicher Geschäftsführergehalt angesetzt – sonst wird der nachhaltige Ertrag verzerrt.</a:t>
-            </a:r>
-          </a:p>
-          <a:p>
-            <a:pPr marL="190500" indent="-190500">
-              <a:spcBef>
-                <a:spcPts val="400"/>
-              </a:spcBef>
-              <a:spcAft>
-                <a:spcPts val="200"/>
-              </a:spcAft>
-            </a:pPr>
-            <a:r>
-              <a:rPr sz="1300">
-                <a:solidFill>
-                  <a:srgbClr val="3D5466"/>
-                </a:solidFill>
-                <a:latin typeface="Arial"/>
-              </a:rPr>
-              <a:t>▸  Nicht betriebsnotwendiges Vermögen: Das private Grundstück, die Überliquidität oder die Oldtimer-Sammlung gehören nicht zum operativen Ertrag. Sie werden aus dem Ergebnis herausgerechnet und separat zum Wert addiert.</a:t>
-            </a:r>
-          </a:p>
-          <a:p>
-            <a:pPr marL="190500" indent="-190500">
-              <a:spcBef>
-                <a:spcPts val="400"/>
-              </a:spcBef>
-              <a:spcAft>
-                <a:spcPts val="200"/>
-              </a:spcAft>
-            </a:pPr>
-            <a:r>
-              <a:rPr sz="1300">
-                <a:solidFill>
-                  <a:srgbClr val="3D5466"/>
-                </a:solidFill>
-                <a:latin typeface="Arial"/>
-              </a:rPr>
-              <a:t>▸  Personenabhängigkeit: Hängt der Erfolg am Inhaber (Kundenbeziehungen, Know-how), sinkt der übertragbare Wert. Diese Korrektur fließt in den Risikozuschlag des Kapitalisierungszinses ein – und ist zugleich das heikelste Gesprächsthema.</a:t>
-            </a:r>
-          </a:p>
-        </p:txBody>
-      </p:sp>
-      <p:sp>
-        <p:nvSpPr>
-          <p:cNvPr id="9" name="Rectangle 8"/>
-          <p:cNvSpPr/>
-          <p:nvPr/>
-        </p:nvSpPr>
-        <p:spPr>
-          <a:xfrm>
-            <a:off x="0" y="6510528"/>
-            <a:ext cx="12188952" cy="347472"/>
-          </a:xfrm>
-          <a:prstGeom prst="rect">
-            <a:avLst/>
-          </a:prstGeom>
-          <a:solidFill>
-            <a:srgbClr val="0A1937"/>
-          </a:solidFill>
-          <a:ln>
-            <a:noFill/>
-          </a:ln>
-        </p:spPr>
-        <p:style>
-          <a:lnRef idx="1">
-            <a:schemeClr val="accent1"/>
-          </a:lnRef>
-          <a:fillRef idx="3">
-            <a:schemeClr val="accent1"/>
-          </a:fillRef>
-          <a:effectRef idx="2">
-            <a:schemeClr val="accent1"/>
-          </a:effectRef>
-          <a:fontRef idx="minor">
-            <a:schemeClr val="lt1"/>
-          </a:fontRef>
-        </p:style>
-        <p:txBody>
-          <a:bodyPr rtlCol="0" anchor="ctr"/>
-          <a:lstStyle/>
-          <a:p>
-            <a:pPr algn="ctr"/>
-          </a:p>
-        </p:txBody>
-      </p:sp>
-      <p:sp>
-        <p:nvSpPr>
-          <p:cNvPr id="10" name="TextBox 9"/>
+              <a:t>Warum Nachfolge und Bewertung Chefsache der Bank sind.</a:t>
+            </a:r>
+          </a:p>
+        </p:txBody>
+      </p:sp>
+      <p:sp>
+        <p:nvSpPr>
+          <p:cNvPr id="7" name="TextBox 6"/>
           <p:cNvSpPr txBox="1"/>
           <p:nvPr/>
         </p:nvSpPr>
         <p:spPr>
           <a:xfrm>
-            <a:off x="685800" y="6583680"/>
-            <a:ext cx="6490411" cy="256032"/>
+            <a:off x="685800" y="6355080"/>
+            <a:ext cx="10817352" cy="274320"/>
           </a:xfrm>
           <a:prstGeom prst="rect">
             <a:avLst/>
@@ -6783,7 +10752,7 @@
             <a:r>
               <a:rPr sz="700">
                 <a:solidFill>
-                  <a:srgbClr val="A0B4D2"/>
+                  <a:srgbClr val="8CA0C3"/>
                 </a:solidFill>
                 <a:latin typeface="Consolas"/>
               </a:rPr>
@@ -6825,7 +10794,7 @@
             <a:avLst/>
           </a:prstGeom>
           <a:solidFill>
-            <a:srgbClr val="FFFFFF"/>
+            <a:srgbClr val="EDEDF3"/>
           </a:solidFill>
           <a:ln>
             <a:noFill/>
@@ -6926,43 +10895,51 @@
                 </a:solidFill>
                 <a:latin typeface="Consolas"/>
               </a:rPr>
-              <a:t>M24  ·  SCHAUBILD</a:t>
-            </a:r>
-          </a:p>
-        </p:txBody>
-      </p:sp>
-      <p:sp>
-        <p:nvSpPr>
-          <p:cNvPr id="5" name="TextBox 4"/>
-          <p:cNvSpPr txBox="1"/>
-          <p:nvPr/>
-        </p:nvSpPr>
-        <p:spPr>
-          <a:xfrm>
-            <a:off x="685800" y="502920"/>
-            <a:ext cx="10817352" cy="594360"/>
-          </a:xfrm>
-          <a:prstGeom prst="rect">
-            <a:avLst/>
-          </a:prstGeom>
-          <a:noFill/>
-        </p:spPr>
-        <p:txBody>
-          <a:bodyPr wrap="square">
-            <a:spAutoFit/>
-          </a:bodyPr>
-          <a:lstStyle/>
-          <a:p>
-            <a:pPr algn="l"/>
-            <a:r>
-              <a:rPr sz="2000" b="1" i="0">
-                <a:solidFill>
-                  <a:srgbClr val="1F2C56"/>
-                </a:solidFill>
-                <a:latin typeface="Arial"/>
-              </a:rPr>
-              <a:t>Die drei Verfahrensfamilien der Unternehmensbewertung und ih</a:t>
-            </a:r>
+              <a:t>M24  ·  INHALT</a:t>
+            </a:r>
+          </a:p>
+        </p:txBody>
+      </p:sp>
+      <p:sp>
+        <p:nvSpPr>
+          <p:cNvPr id="5" name="Rectangle 4"/>
+          <p:cNvSpPr/>
+          <p:nvPr/>
+        </p:nvSpPr>
+        <p:spPr>
+          <a:xfrm>
+            <a:off x="0" y="1234440"/>
+            <a:ext cx="12188952" cy="12700"/>
+          </a:xfrm>
+          <a:prstGeom prst="rect">
+            <a:avLst/>
+          </a:prstGeom>
+          <a:solidFill>
+            <a:srgbClr val="D8DFE4"/>
+          </a:solidFill>
+          <a:ln>
+            <a:noFill/>
+          </a:ln>
+        </p:spPr>
+        <p:style>
+          <a:lnRef idx="1">
+            <a:schemeClr val="accent1"/>
+          </a:lnRef>
+          <a:fillRef idx="3">
+            <a:schemeClr val="accent1"/>
+          </a:fillRef>
+          <a:effectRef idx="2">
+            <a:schemeClr val="accent1"/>
+          </a:effectRef>
+          <a:fontRef idx="minor">
+            <a:schemeClr val="lt1"/>
+          </a:fontRef>
+        </p:style>
+        <p:txBody>
+          <a:bodyPr rtlCol="0" anchor="ctr"/>
+          <a:lstStyle/>
+          <a:p>
+            <a:pPr algn="ctr"/>
           </a:p>
         </p:txBody>
       </p:sp>
@@ -6974,8 +10951,8 @@
         </p:nvSpPr>
         <p:spPr>
           <a:xfrm>
-            <a:off x="685800" y="1143000"/>
-            <a:ext cx="10817352" cy="25400"/>
+            <a:off x="685800" y="502920"/>
+            <a:ext cx="36576" cy="658368"/>
           </a:xfrm>
           <a:prstGeom prst="rect">
             <a:avLst/>
@@ -7009,33 +10986,124 @@
           </a:p>
         </p:txBody>
       </p:sp>
-      <p:pic>
-        <p:nvPicPr>
-          <p:cNvPr id="7" name="Picture 6" descr="image.png"/>
-          <p:cNvPicPr>
-            <a:picLocks noChangeAspect="1"/>
-          </p:cNvPicPr>
-          <p:nvPr/>
-        </p:nvPicPr>
-        <p:blipFill>
-          <a:blip r:embed="rId2"/>
-          <a:stretch>
-            <a:fillRect/>
-          </a:stretch>
-        </p:blipFill>
-        <p:spPr>
-          <a:xfrm>
-            <a:off x="2303489" y="1325880"/>
-            <a:ext cx="7581973" cy="4937760"/>
-          </a:xfrm>
-          <a:prstGeom prst="rect">
-            <a:avLst/>
-          </a:prstGeom>
-        </p:spPr>
-      </p:pic>
-      <p:sp>
-        <p:nvSpPr>
-          <p:cNvPr id="8" name="Rectangle 7"/>
+      <p:sp>
+        <p:nvSpPr>
+          <p:cNvPr id="7" name="TextBox 6"/>
+          <p:cNvSpPr txBox="1"/>
+          <p:nvPr/>
+        </p:nvSpPr>
+        <p:spPr>
+          <a:xfrm>
+            <a:off x="813816" y="502920"/>
+            <a:ext cx="10634472" cy="685800"/>
+          </a:xfrm>
+          <a:prstGeom prst="rect">
+            <a:avLst/>
+          </a:prstGeom>
+          <a:noFill/>
+        </p:spPr>
+        <p:txBody>
+          <a:bodyPr wrap="square">
+            <a:spAutoFit/>
+          </a:bodyPr>
+          <a:lstStyle/>
+          <a:p>
+            <a:pPr algn="l"/>
+            <a:r>
+              <a:rPr sz="2400" b="1" i="0">
+                <a:solidFill>
+                  <a:srgbClr val="1F2C56"/>
+                </a:solidFill>
+                <a:latin typeface="Arial"/>
+              </a:rPr>
+              <a:t>Ein Unternehmenswert ist ein Urteil, kein Messwert</a:t>
+            </a:r>
+          </a:p>
+        </p:txBody>
+      </p:sp>
+      <p:sp>
+        <p:nvSpPr>
+          <p:cNvPr id="8" name="TextBox 7"/>
+          <p:cNvSpPr txBox="1"/>
+          <p:nvPr/>
+        </p:nvSpPr>
+        <p:spPr>
+          <a:xfrm>
+            <a:off x="685800" y="1417320"/>
+            <a:ext cx="10817352" cy="4892040"/>
+          </a:xfrm>
+          <a:prstGeom prst="rect">
+            <a:avLst/>
+          </a:prstGeom>
+          <a:noFill/>
+        </p:spPr>
+        <p:txBody>
+          <a:bodyPr wrap="square" anchor="ctr">
+            <a:spAutoFit/>
+          </a:bodyPr>
+          <a:lstStyle/>
+          <a:p>
+            <a:pPr marL="177800" indent="-177800">
+              <a:spcBef>
+                <a:spcPts val="600"/>
+              </a:spcBef>
+              <a:spcAft>
+                <a:spcPts val="200"/>
+              </a:spcAft>
+            </a:pPr>
+            <a:r>
+              <a:rPr sz="1200" i="1">
+                <a:solidFill>
+                  <a:srgbClr val="3D5466"/>
+                </a:solidFill>
+                <a:latin typeface="Arial"/>
+              </a:rPr>
+              <a:t>→  Kommuniziere eine Bandbreite, keine Scheingenauigkeit – Ehrlichkeit über die Spanne schafft mehr Vertrauen als falsche Präzision.</a:t>
+            </a:r>
+          </a:p>
+          <a:p>
+            <a:pPr marL="190500" indent="-190500">
+              <a:spcBef>
+                <a:spcPts val="400"/>
+              </a:spcBef>
+              <a:spcAft>
+                <a:spcPts val="200"/>
+              </a:spcAft>
+            </a:pPr>
+            <a:r>
+              <a:rPr sz="1300">
+                <a:solidFill>
+                  <a:srgbClr val="3D5466"/>
+                </a:solidFill>
+                <a:latin typeface="Arial"/>
+              </a:rPr>
+              <a:t>▸  Der Berater muss Bewertung verstehen, um Orientierung zu geben – nicht, um ein Gutachten zu erstellen.</a:t>
+            </a:r>
+          </a:p>
+          <a:p>
+            <a:pPr marL="190500" indent="-190500">
+              <a:spcBef>
+                <a:spcPts val="400"/>
+              </a:spcBef>
+              <a:spcAft>
+                <a:spcPts val="200"/>
+              </a:spcAft>
+            </a:pPr>
+            <a:r>
+              <a:rPr sz="1300">
+                <a:solidFill>
+                  <a:srgbClr val="3D5466"/>
+                </a:solidFill>
+                <a:latin typeface="Arial"/>
+              </a:rPr>
+              <a:t>▸  Der Orientierungswert ist Gesprächsgrundlage, nicht Verhandlungsergebnis.</a:t>
+            </a:r>
+          </a:p>
+        </p:txBody>
+      </p:sp>
+      <p:sp>
+        <p:nvSpPr>
+          <p:cNvPr id="9" name="Rectangle 8"/>
           <p:cNvSpPr/>
           <p:nvPr/>
         </p:nvSpPr>
@@ -7078,7 +11146,7 @@
       </p:sp>
       <p:sp>
         <p:nvSpPr>
-          <p:cNvPr id="9" name="TextBox 8"/>
+          <p:cNvPr id="10" name="TextBox 9"/>
           <p:cNvSpPr txBox="1"/>
           <p:nvPr/>
         </p:nvSpPr>
@@ -7107,41 +11175,6 @@
                 <a:latin typeface="Consolas"/>
               </a:rPr>
               <a:t>FKB Campus  ·  M24</a:t>
-            </a:r>
-          </a:p>
-        </p:txBody>
-      </p:sp>
-      <p:sp>
-        <p:nvSpPr>
-          <p:cNvPr id="10" name="TextBox 9"/>
-          <p:cNvSpPr txBox="1"/>
-          <p:nvPr/>
-        </p:nvSpPr>
-        <p:spPr>
-          <a:xfrm>
-            <a:off x="7176211" y="6583680"/>
-            <a:ext cx="4326940" cy="256032"/>
-          </a:xfrm>
-          <a:prstGeom prst="rect">
-            <a:avLst/>
-          </a:prstGeom>
-          <a:noFill/>
-        </p:spPr>
-        <p:txBody>
-          <a:bodyPr wrap="none">
-            <a:spAutoFit/>
-          </a:bodyPr>
-          <a:lstStyle/>
-          <a:p>
-            <a:pPr algn="r"/>
-            <a:r>
-              <a:rPr sz="700">
-                <a:solidFill>
-                  <a:srgbClr val="A0B4D2"/>
-                </a:solidFill>
-                <a:latin typeface="Consolas"/>
-              </a:rPr>
-              <a:t>Schaubild</a:t>
             </a:r>
           </a:p>
         </p:txBody>
@@ -7179,7 +11212,7 @@
             <a:avLst/>
           </a:prstGeom>
           <a:solidFill>
-            <a:srgbClr val="EDEDF3"/>
+            <a:srgbClr val="1F2C56"/>
           </a:solidFill>
           <a:ln>
             <a:noFill/>
@@ -7209,57 +11242,14 @@
       </p:sp>
       <p:sp>
         <p:nvSpPr>
-          <p:cNvPr id="3" name="Rectangle 2"/>
-          <p:cNvSpPr/>
-          <p:nvPr/>
-        </p:nvSpPr>
-        <p:spPr>
-          <a:xfrm>
-            <a:off x="0" y="0"/>
-            <a:ext cx="12188952" cy="50292"/>
-          </a:xfrm>
-          <a:prstGeom prst="rect">
-            <a:avLst/>
-          </a:prstGeom>
-          <a:solidFill>
-            <a:srgbClr val="1F2C56"/>
-          </a:solidFill>
-          <a:ln>
-            <a:noFill/>
-          </a:ln>
-        </p:spPr>
-        <p:style>
-          <a:lnRef idx="1">
-            <a:schemeClr val="accent1"/>
-          </a:lnRef>
-          <a:fillRef idx="3">
-            <a:schemeClr val="accent1"/>
-          </a:fillRef>
-          <a:effectRef idx="2">
-            <a:schemeClr val="accent1"/>
-          </a:effectRef>
-          <a:fontRef idx="minor">
-            <a:schemeClr val="lt1"/>
-          </a:fontRef>
-        </p:style>
-        <p:txBody>
-          <a:bodyPr rtlCol="0" anchor="ctr"/>
-          <a:lstStyle/>
-          <a:p>
-            <a:pPr algn="ctr"/>
-          </a:p>
-        </p:txBody>
-      </p:sp>
-      <p:sp>
-        <p:nvSpPr>
-          <p:cNvPr id="4" name="TextBox 3"/>
+          <p:cNvPr id="3" name="TextBox 2"/>
           <p:cNvSpPr txBox="1"/>
           <p:nvPr/>
         </p:nvSpPr>
         <p:spPr>
           <a:xfrm>
-            <a:off x="685800" y="109728"/>
-            <a:ext cx="10817352" cy="228600"/>
+            <a:off x="685800" y="2377440"/>
+            <a:ext cx="10817352" cy="365760"/>
           </a:xfrm>
           <a:prstGeom prst="rect">
             <a:avLst/>
@@ -7274,70 +11264,27 @@
           <a:p>
             <a:pPr algn="l"/>
             <a:r>
-              <a:rPr sz="750">
-                <a:solidFill>
-                  <a:srgbClr val="78808C"/>
+              <a:rPr sz="1200">
+                <a:solidFill>
+                  <a:srgbClr val="D9C089"/>
                 </a:solidFill>
                 <a:latin typeface="Consolas"/>
               </a:rPr>
-              <a:t>M24  ·  INHALT</a:t>
-            </a:r>
-          </a:p>
-        </p:txBody>
-      </p:sp>
-      <p:sp>
-        <p:nvSpPr>
-          <p:cNvPr id="5" name="Rectangle 4"/>
+              <a:t>09:20–10:15</a:t>
+            </a:r>
+          </a:p>
+        </p:txBody>
+      </p:sp>
+      <p:sp>
+        <p:nvSpPr>
+          <p:cNvPr id="4" name="Rectangle 3"/>
           <p:cNvSpPr/>
           <p:nvPr/>
         </p:nvSpPr>
         <p:spPr>
           <a:xfrm>
-            <a:off x="0" y="1234440"/>
-            <a:ext cx="12188952" cy="12700"/>
-          </a:xfrm>
-          <a:prstGeom prst="rect">
-            <a:avLst/>
-          </a:prstGeom>
-          <a:solidFill>
-            <a:srgbClr val="D8DFE4"/>
-          </a:solidFill>
-          <a:ln>
-            <a:noFill/>
-          </a:ln>
-        </p:spPr>
-        <p:style>
-          <a:lnRef idx="1">
-            <a:schemeClr val="accent1"/>
-          </a:lnRef>
-          <a:fillRef idx="3">
-            <a:schemeClr val="accent1"/>
-          </a:fillRef>
-          <a:effectRef idx="2">
-            <a:schemeClr val="accent1"/>
-          </a:effectRef>
-          <a:fontRef idx="minor">
-            <a:schemeClr val="lt1"/>
-          </a:fontRef>
-        </p:style>
-        <p:txBody>
-          <a:bodyPr rtlCol="0" anchor="ctr"/>
-          <a:lstStyle/>
-          <a:p>
-            <a:pPr algn="ctr"/>
-          </a:p>
-        </p:txBody>
-      </p:sp>
-      <p:sp>
-        <p:nvSpPr>
-          <p:cNvPr id="6" name="Rectangle 5"/>
-          <p:cNvSpPr/>
-          <p:nvPr/>
-        </p:nvSpPr>
-        <p:spPr>
-          <a:xfrm>
-            <a:off x="685800" y="502920"/>
-            <a:ext cx="36576" cy="658368"/>
+            <a:off x="685800" y="2788920"/>
+            <a:ext cx="548640" cy="38100"/>
           </a:xfrm>
           <a:prstGeom prst="rect">
             <a:avLst/>
@@ -7373,14 +11320,14 @@
       </p:sp>
       <p:sp>
         <p:nvSpPr>
-          <p:cNvPr id="7" name="TextBox 6"/>
+          <p:cNvPr id="5" name="TextBox 4"/>
           <p:cNvSpPr txBox="1"/>
           <p:nvPr/>
         </p:nvSpPr>
         <p:spPr>
           <a:xfrm>
-            <a:off x="813816" y="502920"/>
-            <a:ext cx="10634472" cy="685800"/>
+            <a:off x="685800" y="3017520"/>
+            <a:ext cx="10817352" cy="1463040"/>
           </a:xfrm>
           <a:prstGeom prst="rect">
             <a:avLst/>
@@ -7395,27 +11342,27 @@
           <a:p>
             <a:pPr algn="l"/>
             <a:r>
-              <a:rPr sz="2400" b="1" i="0">
-                <a:solidFill>
-                  <a:srgbClr val="1F2C56"/>
+              <a:rPr sz="4000" b="1" i="0">
+                <a:solidFill>
+                  <a:srgbClr val="FFFFFF"/>
                 </a:solidFill>
                 <a:latin typeface="Arial"/>
               </a:rPr>
-              <a:t>Theorie-Input: Verkaufs- und Übergabeprozess</a:t>
-            </a:r>
-          </a:p>
-        </p:txBody>
-      </p:sp>
-      <p:sp>
-        <p:nvSpPr>
-          <p:cNvPr id="8" name="TextBox 7"/>
+              <a:t>Input 1: Bewertungsverfahren</a:t>
+            </a:r>
+          </a:p>
+        </p:txBody>
+      </p:sp>
+      <p:sp>
+        <p:nvSpPr>
+          <p:cNvPr id="6" name="TextBox 5"/>
           <p:cNvSpPr txBox="1"/>
           <p:nvPr/>
         </p:nvSpPr>
         <p:spPr>
           <a:xfrm>
-            <a:off x="685800" y="1417320"/>
-            <a:ext cx="10817352" cy="4892040"/>
+            <a:off x="685800" y="4480560"/>
+            <a:ext cx="8653881" cy="1280160"/>
           </a:xfrm>
           <a:prstGeom prst="rect">
             <a:avLst/>
@@ -7423,66 +11370,34 @@
           <a:noFill/>
         </p:spPr>
         <p:txBody>
-          <a:bodyPr wrap="square" anchor="ctr">
+          <a:bodyPr wrap="square">
             <a:spAutoFit/>
           </a:bodyPr>
           <a:lstStyle/>
-          <a:p/>
-        </p:txBody>
-      </p:sp>
-      <p:sp>
-        <p:nvSpPr>
-          <p:cNvPr id="9" name="Rectangle 8"/>
-          <p:cNvSpPr/>
-          <p:nvPr/>
-        </p:nvSpPr>
-        <p:spPr>
-          <a:xfrm>
-            <a:off x="0" y="6510528"/>
-            <a:ext cx="12188952" cy="347472"/>
-          </a:xfrm>
-          <a:prstGeom prst="rect">
-            <a:avLst/>
-          </a:prstGeom>
-          <a:solidFill>
-            <a:srgbClr val="0A1937"/>
-          </a:solidFill>
-          <a:ln>
-            <a:noFill/>
-          </a:ln>
-        </p:spPr>
-        <p:style>
-          <a:lnRef idx="1">
-            <a:schemeClr val="accent1"/>
-          </a:lnRef>
-          <a:fillRef idx="3">
-            <a:schemeClr val="accent1"/>
-          </a:fillRef>
-          <a:effectRef idx="2">
-            <a:schemeClr val="accent1"/>
-          </a:effectRef>
-          <a:fontRef idx="minor">
-            <a:schemeClr val="lt1"/>
-          </a:fontRef>
-        </p:style>
-        <p:txBody>
-          <a:bodyPr rtlCol="0" anchor="ctr"/>
-          <a:lstStyle/>
-          <a:p>
-            <a:pPr algn="ctr"/>
-          </a:p>
-        </p:txBody>
-      </p:sp>
-      <p:sp>
-        <p:nvSpPr>
-          <p:cNvPr id="10" name="TextBox 9"/>
+          <a:p>
+            <a:pPr algn="l"/>
+            <a:r>
+              <a:rPr sz="1600" b="0" i="0">
+                <a:solidFill>
+                  <a:srgbClr val="C8D2E6"/>
+                </a:solidFill>
+                <a:latin typeface="Arial"/>
+              </a:rPr>
+              <a:t>Die drei Verfahrensfamilien und ihre KMU-Korrekturen verstehen.</a:t>
+            </a:r>
+          </a:p>
+        </p:txBody>
+      </p:sp>
+      <p:sp>
+        <p:nvSpPr>
+          <p:cNvPr id="7" name="TextBox 6"/>
           <p:cNvSpPr txBox="1"/>
           <p:nvPr/>
         </p:nvSpPr>
         <p:spPr>
           <a:xfrm>
-            <a:off x="685800" y="6583680"/>
-            <a:ext cx="6490411" cy="256032"/>
+            <a:off x="685800" y="6355080"/>
+            <a:ext cx="10817352" cy="274320"/>
           </a:xfrm>
           <a:prstGeom prst="rect">
             <a:avLst/>
@@ -7499,7 +11414,7 @@
             <a:r>
               <a:rPr sz="700">
                 <a:solidFill>
-                  <a:srgbClr val="A0B4D2"/>
+                  <a:srgbClr val="8CA0C3"/>
                 </a:solidFill>
                 <a:latin typeface="Consolas"/>
               </a:rPr>
@@ -7642,7 +11557,7 @@
                 </a:solidFill>
                 <a:latin typeface="Consolas"/>
               </a:rPr>
-              <a:t>M24  ·  ARBEITSBLATT</a:t>
+              <a:t>M24  ·  INHALT</a:t>
             </a:r>
           </a:p>
         </p:txBody>
@@ -7763,7 +11678,7 @@
                 </a:solidFill>
                 <a:latin typeface="Arial"/>
               </a:rPr>
-              <a:t>Praxisfall: Präzisionstechnik Musterregion GmbH</a:t>
+              <a:t>Drei Verfahrensfamilien der Unternehmensbewertung</a:t>
             </a:r>
           </a:p>
         </p:txBody>
@@ -7776,8 +11691,8 @@
         </p:nvSpPr>
         <p:spPr>
           <a:xfrm>
-            <a:off x="685800" y="1554480"/>
-            <a:ext cx="10817352" cy="3840480"/>
+            <a:off x="685800" y="1417320"/>
+            <a:ext cx="10817352" cy="4892040"/>
           </a:xfrm>
           <a:prstGeom prst="rect">
             <a:avLst/>
@@ -7785,10 +11700,29 @@
           <a:noFill/>
         </p:spPr>
         <p:txBody>
-          <a:bodyPr wrap="square">
+          <a:bodyPr wrap="square" anchor="ctr">
             <a:spAutoFit/>
           </a:bodyPr>
           <a:lstStyle/>
+          <a:p>
+            <a:pPr marL="177800" indent="-177800">
+              <a:spcBef>
+                <a:spcPts val="600"/>
+              </a:spcBef>
+              <a:spcAft>
+                <a:spcPts val="200"/>
+              </a:spcAft>
+            </a:pPr>
+            <a:r>
+              <a:rPr sz="1200" i="1">
+                <a:solidFill>
+                  <a:srgbClr val="3D5466"/>
+                </a:solidFill>
+                <a:latin typeface="Arial"/>
+              </a:rPr>
+              <a:t>→  Ertragswert, DCF und Multiples beantworten dieselbe Frage unterschiedlich – die Bandbreite entsteht aus dem Vergleich.</a:t>
+            </a:r>
+          </a:p>
           <a:p>
             <a:pPr marL="190500" indent="-190500">
               <a:spcBef>
@@ -7799,13 +11733,13 @@
               </a:spcAft>
             </a:pPr>
             <a:r>
-              <a:rPr sz="1400">
+              <a:rPr sz="1300">
                 <a:solidFill>
                   <a:srgbClr val="3D5466"/>
                 </a:solidFill>
                 <a:latin typeface="Arial"/>
               </a:rPr>
-              <a:t>▸  Unternehmensportrait (anonymisiert, branchentypisch)</a:t>
+              <a:t>▸  Ertragswert (IDW S 1): der nachhaltige Ertrag, kapitalisiert.</a:t>
             </a:r>
           </a:p>
           <a:p>
@@ -7818,13 +11752,13 @@
               </a:spcAft>
             </a:pPr>
             <a:r>
-              <a:rPr sz="1400">
+              <a:rPr sz="1300">
                 <a:solidFill>
                   <a:srgbClr val="3D5466"/>
                 </a:solidFill>
                 <a:latin typeface="Arial"/>
               </a:rPr>
-              <a:t>▸  Bereinigtes Ergebnis (Ableitung des nachhaltigen Ertrags, TEUR):</a:t>
+              <a:t>▸  DCF: die diskontierten künftigen Cashflows.</a:t>
             </a:r>
           </a:p>
           <a:p>
@@ -7837,51 +11771,13 @@
               </a:spcAft>
             </a:pPr>
             <a:r>
-              <a:rPr sz="1400">
+              <a:rPr sz="1300">
                 <a:solidFill>
                   <a:srgbClr val="3D5466"/>
                 </a:solidFill>
                 <a:latin typeface="Arial"/>
               </a:rPr>
-              <a:t>▸  Weitere Angaben:</a:t>
-            </a:r>
-          </a:p>
-          <a:p>
-            <a:pPr marL="190500" indent="-190500">
-              <a:spcBef>
-                <a:spcPts val="400"/>
-              </a:spcBef>
-              <a:spcAft>
-                <a:spcPts val="200"/>
-              </a:spcAft>
-            </a:pPr>
-            <a:r>
-              <a:rPr sz="1400">
-                <a:solidFill>
-                  <a:srgbClr val="3D5466"/>
-                </a:solidFill>
-                <a:latin typeface="Arial"/>
-              </a:rPr>
-              <a:t>▸  Nettofinanzverbindlichkeiten (Net Debt): 700 TEUR</a:t>
-            </a:r>
-          </a:p>
-          <a:p>
-            <a:pPr marL="190500" indent="-190500">
-              <a:spcBef>
-                <a:spcPts val="400"/>
-              </a:spcBef>
-              <a:spcAft>
-                <a:spcPts val="200"/>
-              </a:spcAft>
-            </a:pPr>
-            <a:r>
-              <a:rPr sz="1400">
-                <a:solidFill>
-                  <a:srgbClr val="3D5466"/>
-                </a:solidFill>
-                <a:latin typeface="Arial"/>
-              </a:rPr>
-              <a:t>▸  Nicht betriebsnotwendiges Vermögen (vermietetes Grundstück, Verkehrswert): 500 TEUR</a:t>
+              <a:t>▸  Multiples: der Marktvergleich über EBIT-/Umsatz-Faktoren.</a:t>
             </a:r>
           </a:p>
         </p:txBody>
@@ -7889,84 +11785,6 @@
       <p:sp>
         <p:nvSpPr>
           <p:cNvPr id="9" name="Rectangle 8"/>
-          <p:cNvSpPr/>
-          <p:nvPr/>
-        </p:nvSpPr>
-        <p:spPr>
-          <a:xfrm>
-            <a:off x="685800" y="5486400"/>
-            <a:ext cx="10817352" cy="640080"/>
-          </a:xfrm>
-          <a:prstGeom prst="rect">
-            <a:avLst/>
-          </a:prstGeom>
-          <a:solidFill>
-            <a:srgbClr val="1F2C56"/>
-          </a:solidFill>
-          <a:ln>
-            <a:noFill/>
-          </a:ln>
-        </p:spPr>
-        <p:style>
-          <a:lnRef idx="1">
-            <a:schemeClr val="accent1"/>
-          </a:lnRef>
-          <a:fillRef idx="3">
-            <a:schemeClr val="accent1"/>
-          </a:fillRef>
-          <a:effectRef idx="2">
-            <a:schemeClr val="accent1"/>
-          </a:effectRef>
-          <a:fontRef idx="minor">
-            <a:schemeClr val="lt1"/>
-          </a:fontRef>
-        </p:style>
-        <p:txBody>
-          <a:bodyPr rtlCol="0" anchor="ctr"/>
-          <a:lstStyle/>
-          <a:p>
-            <a:pPr algn="ctr"/>
-          </a:p>
-        </p:txBody>
-      </p:sp>
-      <p:sp>
-        <p:nvSpPr>
-          <p:cNvPr id="10" name="TextBox 9"/>
-          <p:cNvSpPr txBox="1"/>
-          <p:nvPr/>
-        </p:nvSpPr>
-        <p:spPr>
-          <a:xfrm>
-            <a:off x="868680" y="5596128"/>
-            <a:ext cx="10451592" cy="457200"/>
-          </a:xfrm>
-          <a:prstGeom prst="rect">
-            <a:avLst/>
-          </a:prstGeom>
-          <a:noFill/>
-        </p:spPr>
-        <p:txBody>
-          <a:bodyPr wrap="square">
-            <a:spAutoFit/>
-          </a:bodyPr>
-          <a:lstStyle/>
-          <a:p>
-            <a:pPr algn="l"/>
-            <a:r>
-              <a:rPr sz="1300" b="1" i="0">
-                <a:solidFill>
-                  <a:srgbClr val="FFFFFF"/>
-                </a:solidFill>
-                <a:latin typeface="Arial"/>
-              </a:rPr>
-              <a:t>→  Bearbeitung im Teilnehmer-Workbook (Arbeitsblatt mit Ausfüllfeldern)</a:t>
-            </a:r>
-          </a:p>
-        </p:txBody>
-      </p:sp>
-      <p:sp>
-        <p:nvSpPr>
-          <p:cNvPr id="11" name="Rectangle 10"/>
           <p:cNvSpPr/>
           <p:nvPr/>
         </p:nvSpPr>
@@ -8009,7 +11827,7 @@
       </p:sp>
       <p:sp>
         <p:nvSpPr>
-          <p:cNvPr id="12" name="TextBox 11"/>
+          <p:cNvPr id="10" name="TextBox 9"/>
           <p:cNvSpPr txBox="1"/>
           <p:nvPr/>
         </p:nvSpPr>
@@ -8211,7 +12029,7 @@
                 </a:solidFill>
                 <a:latin typeface="Arial"/>
               </a:rPr>
-              <a:t>Handlungsempfehlung</a:t>
+              <a:t>Die drei Verfahrensfamilien der Unternehmensbewertung</a:t>
             </a:r>
           </a:p>
         </p:txBody>
